--- a/CSOB_TLS_TDE_Presentation.pptx
+++ b/CSOB_TLS_TDE_Presentation.pptx
@@ -10,6 +10,8 @@
     <p:sldId id="258" r:id="rId4"/>
     <p:sldId id="259" r:id="rId5"/>
     <p:sldId id="260" r:id="rId6"/>
+    <p:sldId id="280" r:id="rId31"/>
+    <p:sldId id="281" r:id="rId32"/>
     <p:sldId id="261" r:id="rId7"/>
     <p:sldId id="262" r:id="rId8"/>
     <p:sldId id="263" r:id="rId9"/>
@@ -19,6 +21,8 @@
     <p:sldId id="276" r:id="rId27"/>
     <p:sldId id="277" r:id="rId28"/>
     <p:sldId id="267" r:id="rId13"/>
+    <p:sldId id="282" r:id="rId33"/>
+    <p:sldId id="283" r:id="rId34"/>
     <p:sldId id="268" r:id="rId14"/>
     <p:sldId id="269" r:id="rId15"/>
     <p:sldId id="270" r:id="rId16"/>
@@ -2620,7 +2624,7 @@
       </p:sp>
       <p:pic>
         <p:nvPicPr>
-          <p:cNvPr id="4" name="Image 0" descr="preencoded.png">    </p:cNvPr>
+          <p:cNvPr id="4" name="Image 0" descr="preencoded.png"/>
           <p:cNvPicPr>
             <a:picLocks noChangeAspect="1"/>
           </p:cNvPicPr>
@@ -2668,7 +2672,7 @@
       </p:sp>
       <p:pic>
         <p:nvPicPr>
-          <p:cNvPr id="6" name="Image 1" descr="preencoded.png">    </p:cNvPr>
+          <p:cNvPr id="6" name="Image 1" descr="preencoded.png"/>
           <p:cNvPicPr>
             <a:picLocks noChangeAspect="1"/>
           </p:cNvPicPr>
@@ -2815,7 +2819,7 @@
                 <a:ea typeface="Cambria" pitchFamily="34" charset="-122"/>
                 <a:cs typeface="Cambria" pitchFamily="34" charset="-120"/>
               </a:rPr>
-              <a:t>   &amp;   </a:t>
+              <a:t xml:space="preserve">   &amp;   </a:t>
             </a:r>
             <a:pPr indent="0" marL="0">
               <a:buNone/>
@@ -2974,7 +2978,7 @@
       </p:sp>
       <p:pic>
         <p:nvPicPr>
-          <p:cNvPr id="3" name="Image 0" descr="preencoded.png">    </p:cNvPr>
+          <p:cNvPr id="3" name="Image 0" descr="preencoded.png"/>
           <p:cNvPicPr>
             <a:picLocks noChangeAspect="1"/>
           </p:cNvPicPr>
@@ -3138,7 +3142,7 @@
       </p:sp>
       <p:pic>
         <p:nvPicPr>
-          <p:cNvPr id="8" name="Image 1" descr="preencoded.png">    </p:cNvPr>
+          <p:cNvPr id="8" name="Image 1" descr="preencoded.png"/>
           <p:cNvPicPr>
             <a:picLocks noChangeAspect="1"/>
           </p:cNvPicPr>
@@ -3235,7 +3239,7 @@
                 <a:ea typeface="Calibri" pitchFamily="34" charset="-122"/>
                 <a:cs typeface="Calibri" pitchFamily="34" charset="-120"/>
               </a:rPr>
-              <a:t>Free since 2013.  </a:t>
+              <a:t xml:space="preserve">Free since 2013.  </a:t>
             </a:r>
             <a:pPr indent="0" marL="0">
               <a:lnSpc>
@@ -3281,7 +3285,7 @@
                 <a:ea typeface="Calibri" pitchFamily="34" charset="-122"/>
                 <a:cs typeface="Calibri" pitchFamily="34" charset="-120"/>
               </a:rPr>
-              <a:t>Zero client change.  </a:t>
+              <a:t xml:space="preserve">Zero client change.  </a:t>
             </a:r>
             <a:endParaRPr lang="en-US" sz="1300" dirty="0"/>
           </a:p>
@@ -3474,7 +3478,7 @@
       </p:sp>
       <p:pic>
         <p:nvPicPr>
-          <p:cNvPr id="15" name="Image 2" descr="preencoded.png">    </p:cNvPr>
+          <p:cNvPr id="15" name="Image 2" descr="preencoded.png"/>
           <p:cNvPicPr>
             <a:picLocks noChangeAspect="1"/>
           </p:cNvPicPr>
@@ -3537,7 +3541,7 @@
       </p:sp>
       <p:pic>
         <p:nvPicPr>
-          <p:cNvPr id="17" name="Image 3" descr="preencoded.png">    </p:cNvPr>
+          <p:cNvPr id="17" name="Image 3" descr="preencoded.png"/>
           <p:cNvPicPr>
             <a:picLocks noChangeAspect="1"/>
           </p:cNvPicPr>
@@ -3592,7 +3596,7 @@
                 <a:ea typeface="Calibri" pitchFamily="34" charset="-122"/>
                 <a:cs typeface="Calibri" pitchFamily="34" charset="-120"/>
               </a:rPr>
-              <a:t>Encrypts the wire  —  </a:t>
+              <a:t xml:space="preserve">Encrypts the wire  —  </a:t>
             </a:r>
             <a:pPr indent="0" marL="0">
               <a:buNone/>
@@ -3614,7 +3618,7 @@
       </p:sp>
       <p:pic>
         <p:nvPicPr>
-          <p:cNvPr id="19" name="Image 4" descr="preencoded.png">    </p:cNvPr>
+          <p:cNvPr id="19" name="Image 4" descr="preencoded.png"/>
           <p:cNvPicPr>
             <a:picLocks noChangeAspect="1"/>
           </p:cNvPicPr>
@@ -3669,7 +3673,7 @@
                 <a:ea typeface="Calibri" pitchFamily="34" charset="-122"/>
                 <a:cs typeface="Calibri" pitchFamily="34" charset="-120"/>
               </a:rPr>
-              <a:t>Server authentication  —  </a:t>
+              <a:t xml:space="preserve">Server authentication  —  </a:t>
             </a:r>
             <a:pPr indent="0" marL="0">
               <a:buNone/>
@@ -3691,7 +3695,7 @@
       </p:sp>
       <p:pic>
         <p:nvPicPr>
-          <p:cNvPr id="21" name="Image 5" descr="preencoded.png">    </p:cNvPr>
+          <p:cNvPr id="21" name="Image 5" descr="preencoded.png"/>
           <p:cNvPicPr>
             <a:picLocks noChangeAspect="1"/>
           </p:cNvPicPr>
@@ -3746,7 +3750,7 @@
                 <a:ea typeface="Calibri" pitchFamily="34" charset="-122"/>
                 <a:cs typeface="Calibri" pitchFamily="34" charset="-120"/>
               </a:rPr>
-              <a:t>MITM protection via PKI  —  </a:t>
+              <a:t xml:space="preserve">MITM protection via PKI  —  </a:t>
             </a:r>
             <a:pPr indent="0" marL="0">
               <a:buNone/>
@@ -3768,7 +3772,7 @@
       </p:sp>
       <p:pic>
         <p:nvPicPr>
-          <p:cNvPr id="23" name="Image 6" descr="preencoded.png">    </p:cNvPr>
+          <p:cNvPr id="23" name="Image 6" descr="preencoded.png"/>
           <p:cNvPicPr>
             <a:picLocks noChangeAspect="1"/>
           </p:cNvPicPr>
@@ -3823,7 +3827,7 @@
                 <a:ea typeface="Calibri" pitchFamily="34" charset="-122"/>
                 <a:cs typeface="Calibri" pitchFamily="34" charset="-120"/>
               </a:rPr>
-              <a:t>Audit control fully met  —  </a:t>
+              <a:t xml:space="preserve">Audit control fully met  —  </a:t>
             </a:r>
             <a:pPr indent="0" marL="0">
               <a:buNone/>
@@ -3879,7 +3883,7 @@
                 <a:ea typeface="Calibri" pitchFamily="34" charset="-122"/>
                 <a:cs typeface="Calibri" pitchFamily="34" charset="-120"/>
               </a:rPr>
-              <a:t>Recommendation:  </a:t>
+              <a:t xml:space="preserve">Recommendation:  </a:t>
             </a:r>
             <a:pPr indent="0" marL="0">
               <a:lnSpc>
@@ -3899,6 +3903,45 @@
               <a:t>use as a short-lived interim, then supersede with TLS. Skip it if TLS lands on an acceptable timeline. Do not treat it as the end state.</a:t>
             </a:r>
             <a:endParaRPr lang="en-US" sz="1250" dirty="0"/>
+          </a:p>
+        </p:txBody>
+      </p:sp>
+      <p:sp>
+        <p:nvSpPr>
+          <p:cNvPr id="26" name="Footnote 26"/>
+          <p:cNvSpPr/>
+          <p:nvPr/>
+        </p:nvSpPr>
+        <p:spPr>
+          <a:xfrm>
+            <a:off x="566928" y="6438000"/>
+            <a:ext cx="11057839" cy="245000"/>
+          </a:xfrm>
+          <a:prstGeom prst="rect">
+            <a:avLst/>
+          </a:prstGeom>
+          <a:noFill/>
+          <a:ln/>
+        </p:spPr>
+        <p:txBody>
+          <a:bodyPr wrap="square" lIns="0" tIns="0" rIns="0" bIns="0" rtlCol="0" anchor="ctr"/>
+          <a:lstStyle/>
+          <a:p>
+            <a:pPr algn="l" indent="0" marL="0">
+              <a:buNone/>
+            </a:pPr>
+            <a:r>
+              <a:rPr lang="en-US" sz="900" i="1" kern="0" dirty="0">
+                <a:solidFill>
+                  <a:srgbClr val="8194A8"/>
+                </a:solidFill>
+                <a:latin typeface="Calibri" pitchFamily="34" charset="0"/>
+                <a:ea typeface="Calibri" pitchFamily="34" charset="-122"/>
+                <a:cs typeface="Calibri" pitchFamily="34" charset="-120"/>
+              </a:rPr>
+              <a:t>ANO = Advanced Networking Option (native SQL*Net encryption): encrypts the traffic but does not authenticate the server — hence interim only.</a:t>
+            </a:r>
+            <a:endParaRPr lang="en-US" sz="900" i="1" dirty="0"/>
           </a:p>
         </p:txBody>
       </p:sp>
@@ -3960,7 +4003,7 @@
       </p:sp>
       <p:pic>
         <p:nvPicPr>
-          <p:cNvPr id="3" name="Image 0" descr="preencoded.png">    </p:cNvPr>
+          <p:cNvPr id="3" name="Image 0" descr="preencoded.png"/>
           <p:cNvPicPr>
             <a:picLocks noChangeAspect="1"/>
           </p:cNvPicPr>
@@ -5196,7 +5239,7 @@
       </p:sp>
       <p:pic>
         <p:nvPicPr>
-          <p:cNvPr id="3" name="Image 0" descr="preencoded.png">    </p:cNvPr>
+          <p:cNvPr id="3" name="Image 0" descr="preencoded.png"/>
           <p:cNvPicPr>
             <a:picLocks noChangeAspect="1"/>
           </p:cNvPicPr>
@@ -6432,7 +6475,7 @@
       </p:sp>
       <p:pic>
         <p:nvPicPr>
-          <p:cNvPr id="3" name="Image 0" descr="preencoded.png">    </p:cNvPr>
+          <p:cNvPr id="3" name="Image 0" descr="preencoded.png"/>
           <p:cNvPicPr>
             <a:picLocks noChangeAspect="1"/>
           </p:cNvPicPr>
@@ -7682,7 +7725,7 @@
       </p:sp>
       <p:pic>
         <p:nvPicPr>
-          <p:cNvPr id="3" name="Image 0" descr="preencoded.png">    </p:cNvPr>
+          <p:cNvPr id="3" name="Image 0" descr="preencoded.png"/>
           <p:cNvPicPr>
             <a:picLocks noChangeAspect="1"/>
           </p:cNvPicPr>
@@ -7823,7 +7866,7 @@
       </p:sp>
       <p:pic>
         <p:nvPicPr>
-          <p:cNvPr id="7" name="Image 1" descr="preencoded.png">    </p:cNvPr>
+          <p:cNvPr id="7" name="Image 1" descr="preencoded.png"/>
           <p:cNvPicPr>
             <a:picLocks noChangeAspect="1"/>
           </p:cNvPicPr>
@@ -7886,7 +7929,7 @@
       </p:sp>
       <p:pic>
         <p:nvPicPr>
-          <p:cNvPr id="9" name="Image 2" descr="preencoded.png">    </p:cNvPr>
+          <p:cNvPr id="9" name="Image 2" descr="preencoded.png"/>
           <p:cNvPicPr>
             <a:picLocks noChangeAspect="1"/>
           </p:cNvPicPr>
@@ -7949,7 +7992,7 @@
       </p:sp>
       <p:pic>
         <p:nvPicPr>
-          <p:cNvPr id="11" name="Image 3" descr="preencoded.png">    </p:cNvPr>
+          <p:cNvPr id="11" name="Image 3" descr="preencoded.png"/>
           <p:cNvPicPr>
             <a:picLocks noChangeAspect="1"/>
           </p:cNvPicPr>
@@ -8012,7 +8055,7 @@
       </p:sp>
       <p:pic>
         <p:nvPicPr>
-          <p:cNvPr id="13" name="Image 4" descr="preencoded.png">    </p:cNvPr>
+          <p:cNvPr id="13" name="Image 4" descr="preencoded.png"/>
           <p:cNvPicPr>
             <a:picLocks noChangeAspect="1"/>
           </p:cNvPicPr>
@@ -8075,7 +8118,7 @@
       </p:sp>
       <p:pic>
         <p:nvPicPr>
-          <p:cNvPr id="15" name="Image 5" descr="preencoded.png">    </p:cNvPr>
+          <p:cNvPr id="15" name="Image 5" descr="preencoded.png"/>
           <p:cNvPicPr>
             <a:picLocks noChangeAspect="1"/>
           </p:cNvPicPr>
@@ -8138,7 +8181,7 @@
       </p:sp>
       <p:pic>
         <p:nvPicPr>
-          <p:cNvPr id="17" name="Image 6" descr="preencoded.png">    </p:cNvPr>
+          <p:cNvPr id="17" name="Image 6" descr="preencoded.png"/>
           <p:cNvPicPr>
             <a:picLocks noChangeAspect="1"/>
           </p:cNvPicPr>
@@ -8257,7 +8300,7 @@
       </p:sp>
       <p:pic>
         <p:nvPicPr>
-          <p:cNvPr id="3" name="Image 0" descr="preencoded.png">    </p:cNvPr>
+          <p:cNvPr id="3" name="Image 0" descr="preencoded.png"/>
           <p:cNvPicPr>
             <a:picLocks noChangeAspect="1"/>
           </p:cNvPicPr>
@@ -8421,7 +8464,7 @@
       </p:sp>
       <p:pic>
         <p:nvPicPr>
-          <p:cNvPr id="8" name="Image 1" descr="preencoded.png">    </p:cNvPr>
+          <p:cNvPr id="8" name="Image 1" descr="preencoded.png"/>
           <p:cNvPicPr>
             <a:picLocks noChangeAspect="1"/>
           </p:cNvPicPr>
@@ -8624,7 +8667,7 @@
       </p:sp>
       <p:pic>
         <p:nvPicPr>
-          <p:cNvPr id="13" name="Image 2" descr="preencoded.png">    </p:cNvPr>
+          <p:cNvPr id="13" name="Image 2" descr="preencoded.png"/>
           <p:cNvPicPr>
             <a:picLocks noChangeAspect="1"/>
           </p:cNvPicPr>
@@ -8710,7 +8753,7 @@
       </p:sp>
       <p:pic>
         <p:nvPicPr>
-          <p:cNvPr id="16" name="Image 3" descr="preencoded.png">    </p:cNvPr>
+          <p:cNvPr id="16" name="Image 3" descr="preencoded.png"/>
           <p:cNvPicPr>
             <a:picLocks noChangeAspect="1"/>
           </p:cNvPicPr>
@@ -8913,7 +8956,7 @@
       </p:sp>
       <p:pic>
         <p:nvPicPr>
-          <p:cNvPr id="21" name="Image 4" descr="preencoded.png">    </p:cNvPr>
+          <p:cNvPr id="21" name="Image 4" descr="preencoded.png"/>
           <p:cNvPicPr>
             <a:picLocks noChangeAspect="1"/>
           </p:cNvPicPr>
@@ -8999,7 +9042,7 @@
       </p:sp>
       <p:pic>
         <p:nvPicPr>
-          <p:cNvPr id="24" name="Image 5" descr="preencoded.png">    </p:cNvPr>
+          <p:cNvPr id="24" name="Image 5" descr="preencoded.png"/>
           <p:cNvPicPr>
             <a:picLocks noChangeAspect="1"/>
           </p:cNvPicPr>
@@ -9201,7 +9244,7 @@
       </p:sp>
       <p:pic>
         <p:nvPicPr>
-          <p:cNvPr id="29" name="Image 6" descr="preencoded.png">    </p:cNvPr>
+          <p:cNvPr id="29" name="Image 6" descr="preencoded.png"/>
           <p:cNvPicPr>
             <a:picLocks noChangeAspect="1"/>
           </p:cNvPicPr>
@@ -9344,7 +9387,7 @@
       </p:sp>
       <p:pic>
         <p:nvPicPr>
-          <p:cNvPr id="33" name="Image 7" descr="preencoded.png">    </p:cNvPr>
+          <p:cNvPr id="33" name="Image 7" descr="preencoded.png"/>
           <p:cNvPicPr>
             <a:picLocks noChangeAspect="1"/>
           </p:cNvPicPr>
@@ -9505,7 +9548,7 @@
       </p:sp>
       <p:pic>
         <p:nvPicPr>
-          <p:cNvPr id="3" name="Image 0" descr="preencoded.png">    </p:cNvPr>
+          <p:cNvPr id="3" name="Image 0" descr="preencoded.png"/>
           <p:cNvPicPr>
             <a:picLocks noChangeAspect="1"/>
           </p:cNvPicPr>
@@ -9829,7 +9872,7 @@
       </p:sp>
       <p:pic>
         <p:nvPicPr>
-          <p:cNvPr id="10" name="Image 1" descr="preencoded.png">    </p:cNvPr>
+          <p:cNvPr id="10" name="Image 1" descr="preencoded.png"/>
           <p:cNvPicPr>
             <a:picLocks noChangeAspect="1"/>
           </p:cNvPicPr>
@@ -10137,7 +10180,7 @@
       </p:sp>
       <p:pic>
         <p:nvPicPr>
-          <p:cNvPr id="17" name="Image 2" descr="preencoded.png">    </p:cNvPr>
+          <p:cNvPr id="17" name="Image 2" descr="preencoded.png"/>
           <p:cNvPicPr>
             <a:picLocks noChangeAspect="1"/>
           </p:cNvPicPr>
@@ -10234,7 +10277,7 @@
                 <a:ea typeface="Calibri" pitchFamily="34" charset="-122"/>
                 <a:cs typeface="Calibri" pitchFamily="34" charset="-120"/>
               </a:rPr>
-              <a:t>Standardise WALLET_ROOT + TDE_CONFIGURATION now, united keystore with per-PDB MEKs, non-local auto-login for Data Guard.  </a:t>
+              <a:t xml:space="preserve">Standardise WALLET_ROOT + TDE_CONFIGURATION now, united keystore with per-PDB MEKs, non-local auto-login for Data Guard.  </a:t>
             </a:r>
             <a:pPr indent="0" marL="0">
               <a:lnSpc>
@@ -10268,7 +10311,7 @@
                 <a:ea typeface="Calibri" pitchFamily="34" charset="-122"/>
                 <a:cs typeface="Calibri" pitchFamily="34" charset="-120"/>
               </a:rPr>
-              <a:t> (SET ENCRYPTION KEY … MIGRATE USING …) applied wave-by-wave — and it's reversible.</a:t>
+              <a:t xml:space="preserve"> (SET ENCRYPTION KEY … MIGRATE USING …) applied wave-by-wave — and it's reversible.</a:t>
             </a:r>
             <a:endParaRPr lang="en-US" sz="1280" dirty="0"/>
           </a:p>
@@ -10332,7 +10375,7 @@
       </p:sp>
       <p:pic>
         <p:nvPicPr>
-          <p:cNvPr id="3" name="Image 0" descr="preencoded.png">    </p:cNvPr>
+          <p:cNvPr id="3" name="Image 0" descr="preencoded.png"/>
           <p:cNvPicPr>
             <a:picLocks noChangeAspect="1"/>
           </p:cNvPicPr>
@@ -10489,7 +10532,7 @@
       </p:sp>
       <p:pic>
         <p:nvPicPr>
-          <p:cNvPr id="8" name="Image 1" descr="preencoded.png">    </p:cNvPr>
+          <p:cNvPr id="8" name="Image 1" descr="preencoded.png"/>
           <p:cNvPicPr>
             <a:picLocks noChangeAspect="1"/>
           </p:cNvPicPr>
@@ -10646,7 +10689,7 @@
       </p:sp>
       <p:pic>
         <p:nvPicPr>
-          <p:cNvPr id="13" name="Image 2" descr="preencoded.png">    </p:cNvPr>
+          <p:cNvPr id="13" name="Image 2" descr="preencoded.png"/>
           <p:cNvPicPr>
             <a:picLocks noChangeAspect="1"/>
           </p:cNvPicPr>
@@ -10803,7 +10846,7 @@
       </p:sp>
       <p:pic>
         <p:nvPicPr>
-          <p:cNvPr id="18" name="Image 3" descr="preencoded.png">    </p:cNvPr>
+          <p:cNvPr id="18" name="Image 3" descr="preencoded.png"/>
           <p:cNvPicPr>
             <a:picLocks noChangeAspect="1"/>
           </p:cNvPicPr>
@@ -10960,7 +11003,7 @@
       </p:sp>
       <p:pic>
         <p:nvPicPr>
-          <p:cNvPr id="23" name="Image 4" descr="preencoded.png">    </p:cNvPr>
+          <p:cNvPr id="23" name="Image 4" descr="preencoded.png"/>
           <p:cNvPicPr>
             <a:picLocks noChangeAspect="1"/>
           </p:cNvPicPr>
@@ -11117,7 +11160,7 @@
       </p:sp>
       <p:pic>
         <p:nvPicPr>
-          <p:cNvPr id="28" name="Image 5" descr="preencoded.png">    </p:cNvPr>
+          <p:cNvPr id="28" name="Image 5" descr="preencoded.png"/>
           <p:cNvPicPr>
             <a:picLocks noChangeAspect="1"/>
           </p:cNvPicPr>
@@ -11274,7 +11317,7 @@
       </p:sp>
       <p:pic>
         <p:nvPicPr>
-          <p:cNvPr id="33" name="Image 6" descr="preencoded.png">    </p:cNvPr>
+          <p:cNvPr id="33" name="Image 6" descr="preencoded.png"/>
           <p:cNvPicPr>
             <a:picLocks noChangeAspect="1"/>
           </p:cNvPicPr>
@@ -11477,7 +11520,7 @@
       </p:sp>
       <p:pic>
         <p:nvPicPr>
-          <p:cNvPr id="39" name="Image 7" descr="preencoded.png">    </p:cNvPr>
+          <p:cNvPr id="39" name="Image 7" descr="preencoded.png"/>
           <p:cNvPicPr>
             <a:picLocks noChangeAspect="1"/>
           </p:cNvPicPr>
@@ -11606,7 +11649,7 @@
       </p:sp>
       <p:pic>
         <p:nvPicPr>
-          <p:cNvPr id="43" name="Image 8" descr="preencoded.png">    </p:cNvPr>
+          <p:cNvPr id="43" name="Image 8" descr="preencoded.png"/>
           <p:cNvPicPr>
             <a:picLocks noChangeAspect="1"/>
           </p:cNvPicPr>
@@ -11735,7 +11778,7 @@
       </p:sp>
       <p:pic>
         <p:nvPicPr>
-          <p:cNvPr id="47" name="Image 9" descr="preencoded.png">    </p:cNvPr>
+          <p:cNvPr id="47" name="Image 9" descr="preencoded.png"/>
           <p:cNvPicPr>
             <a:picLocks noChangeAspect="1"/>
           </p:cNvPicPr>
@@ -11896,7 +11939,7 @@
       </p:sp>
       <p:pic>
         <p:nvPicPr>
-          <p:cNvPr id="3" name="Image 0" descr="preencoded.png">    </p:cNvPr>
+          <p:cNvPr id="3" name="Image 0" descr="preencoded.png"/>
           <p:cNvPicPr>
             <a:picLocks noChangeAspect="1"/>
           </p:cNvPicPr>
@@ -13803,7 +13846,7 @@
       </p:sp>
       <p:pic>
         <p:nvPicPr>
-          <p:cNvPr id="9" name="Image 1" descr="preencoded.png">    </p:cNvPr>
+          <p:cNvPr id="9" name="Image 1" descr="preencoded.png"/>
           <p:cNvPicPr>
             <a:picLocks noChangeAspect="1"/>
           </p:cNvPicPr>
@@ -13861,7 +13904,7 @@
                 <a:ea typeface="Calibri" pitchFamily="34" charset="-122"/>
                 <a:cs typeface="Calibri" pitchFamily="34" charset="-120"/>
               </a:rPr>
-              <a:t>Online encryption generates redo ≈ the full tablespace size.  </a:t>
+              <a:t xml:space="preserve">Online encryption generates redo ≈ the full tablespace size.  </a:t>
             </a:r>
             <a:pPr indent="0" marL="0">
               <a:lnSpc>
@@ -13942,7 +13985,7 @@
       </p:sp>
       <p:pic>
         <p:nvPicPr>
-          <p:cNvPr id="3" name="Image 0" descr="preencoded.png">    </p:cNvPr>
+          <p:cNvPr id="3" name="Image 0" descr="preencoded.png"/>
           <p:cNvPicPr>
             <a:picLocks noChangeAspect="1"/>
           </p:cNvPicPr>
@@ -14106,7 +14149,7 @@
       </p:sp>
       <p:pic>
         <p:nvPicPr>
-          <p:cNvPr id="8" name="Image 1" descr="preencoded.png">    </p:cNvPr>
+          <p:cNvPr id="8" name="Image 1" descr="preencoded.png"/>
           <p:cNvPicPr>
             <a:picLocks noChangeAspect="1"/>
           </p:cNvPicPr>
@@ -14208,7 +14251,7 @@
       </p:sp>
       <p:pic>
         <p:nvPicPr>
-          <p:cNvPr id="11" name="Image 2" descr="preencoded.png">    </p:cNvPr>
+          <p:cNvPr id="11" name="Image 2" descr="preencoded.png"/>
           <p:cNvPicPr>
             <a:picLocks noChangeAspect="1"/>
           </p:cNvPicPr>
@@ -14274,7 +14317,7 @@
       </p:sp>
       <p:pic>
         <p:nvPicPr>
-          <p:cNvPr id="13" name="Image 3" descr="preencoded.png">    </p:cNvPr>
+          <p:cNvPr id="13" name="Image 3" descr="preencoded.png"/>
           <p:cNvPicPr>
             <a:picLocks noChangeAspect="1"/>
           </p:cNvPicPr>
@@ -14340,7 +14383,7 @@
       </p:sp>
       <p:pic>
         <p:nvPicPr>
-          <p:cNvPr id="15" name="Image 4" descr="preencoded.png">    </p:cNvPr>
+          <p:cNvPr id="15" name="Image 4" descr="preencoded.png"/>
           <p:cNvPicPr>
             <a:picLocks noChangeAspect="1"/>
           </p:cNvPicPr>
@@ -14406,7 +14449,7 @@
       </p:sp>
       <p:pic>
         <p:nvPicPr>
-          <p:cNvPr id="17" name="Image 5" descr="preencoded.png">    </p:cNvPr>
+          <p:cNvPr id="17" name="Image 5" descr="preencoded.png"/>
           <p:cNvPicPr>
             <a:picLocks noChangeAspect="1"/>
           </p:cNvPicPr>
@@ -14472,7 +14515,7 @@
       </p:sp>
       <p:pic>
         <p:nvPicPr>
-          <p:cNvPr id="19" name="Image 6" descr="preencoded.png">    </p:cNvPr>
+          <p:cNvPr id="19" name="Image 6" descr="preencoded.png"/>
           <p:cNvPicPr>
             <a:picLocks noChangeAspect="1"/>
           </p:cNvPicPr>
@@ -14600,7 +14643,7 @@
       </p:sp>
       <p:pic>
         <p:nvPicPr>
-          <p:cNvPr id="23" name="Image 7" descr="preencoded.png">    </p:cNvPr>
+          <p:cNvPr id="23" name="Image 7" descr="preencoded.png"/>
           <p:cNvPicPr>
             <a:picLocks noChangeAspect="1"/>
           </p:cNvPicPr>
@@ -14736,7 +14779,7 @@
                 <a:ea typeface="Calibri" pitchFamily="34" charset="-122"/>
                 <a:cs typeface="Calibri" pitchFamily="34" charset="-120"/>
               </a:rPr>
-              <a:t>AIX/POWER crypto for TDE  </a:t>
+              <a:t xml:space="preserve">AIX/POWER crypto for TDE  </a:t>
             </a:r>
             <a:pPr indent="0" marL="0">
               <a:lnSpc>
@@ -14834,7 +14877,7 @@
                 <a:ea typeface="Calibri" pitchFamily="34" charset="-122"/>
                 <a:cs typeface="Calibri" pitchFamily="34" charset="-120"/>
               </a:rPr>
-              <a:t>Standby-first sequencing  </a:t>
+              <a:t xml:space="preserve">Standby-first sequencing  </a:t>
             </a:r>
             <a:pPr indent="0" marL="0">
               <a:lnSpc>
@@ -14932,7 +14975,7 @@
                 <a:ea typeface="Calibri" pitchFamily="34" charset="-122"/>
                 <a:cs typeface="Calibri" pitchFamily="34" charset="-120"/>
               </a:rPr>
-              <a:t>UNDO encryption path  </a:t>
+              <a:t xml:space="preserve">UNDO encryption path  </a:t>
             </a:r>
             <a:pPr indent="0" marL="0">
               <a:lnSpc>
@@ -15013,7 +15056,7 @@
       </p:sp>
       <p:pic>
         <p:nvPicPr>
-          <p:cNvPr id="3" name="Image 0" descr="preencoded.png">    </p:cNvPr>
+          <p:cNvPr id="3" name="Image 0" descr="preencoded.png"/>
           <p:cNvPicPr>
             <a:picLocks noChangeAspect="1"/>
           </p:cNvPicPr>
@@ -15216,7 +15259,7 @@
       </p:sp>
       <p:pic>
         <p:nvPicPr>
-          <p:cNvPr id="9" name="Image 1" descr="preencoded.png">    </p:cNvPr>
+          <p:cNvPr id="9" name="Image 1" descr="preencoded.png"/>
           <p:cNvPicPr>
             <a:picLocks noChangeAspect="1"/>
           </p:cNvPicPr>
@@ -15419,7 +15462,7 @@
       </p:sp>
       <p:pic>
         <p:nvPicPr>
-          <p:cNvPr id="15" name="Image 2" descr="preencoded.png">    </p:cNvPr>
+          <p:cNvPr id="15" name="Image 2" descr="preencoded.png"/>
           <p:cNvPicPr>
             <a:picLocks noChangeAspect="1"/>
           </p:cNvPicPr>
@@ -15622,7 +15665,7 @@
       </p:sp>
       <p:pic>
         <p:nvPicPr>
-          <p:cNvPr id="21" name="Image 3" descr="preencoded.png">    </p:cNvPr>
+          <p:cNvPr id="21" name="Image 3" descr="preencoded.png"/>
           <p:cNvPicPr>
             <a:picLocks noChangeAspect="1"/>
           </p:cNvPicPr>
@@ -15825,7 +15868,7 @@
       </p:sp>
       <p:pic>
         <p:nvPicPr>
-          <p:cNvPr id="27" name="Image 4" descr="preencoded.png">    </p:cNvPr>
+          <p:cNvPr id="27" name="Image 4" descr="preencoded.png"/>
           <p:cNvPicPr>
             <a:picLocks noChangeAspect="1"/>
           </p:cNvPicPr>
@@ -15983,7 +16026,7 @@
       </p:sp>
       <p:pic>
         <p:nvPicPr>
-          <p:cNvPr id="3" name="Image 0" descr="preencoded.png">    </p:cNvPr>
+          <p:cNvPr id="3" name="Image 0" descr="preencoded.png"/>
           <p:cNvPicPr>
             <a:picLocks noChangeAspect="1"/>
           </p:cNvPicPr>
@@ -17172,6 +17215,45 @@
               <a:t>Close the four caveats at the fleet's actual RU during pilot before wide rollout.</a:t>
             </a:r>
             <a:endParaRPr lang="en-US" sz="1180" dirty="0"/>
+          </a:p>
+        </p:txBody>
+      </p:sp>
+      <p:sp>
+        <p:nvSpPr>
+          <p:cNvPr id="36" name="Footnote 36"/>
+          <p:cNvSpPr/>
+          <p:nvPr/>
+        </p:nvSpPr>
+        <p:spPr>
+          <a:xfrm>
+            <a:off x="566928" y="6438000"/>
+            <a:ext cx="11057839" cy="245000"/>
+          </a:xfrm>
+          <a:prstGeom prst="rect">
+            <a:avLst/>
+          </a:prstGeom>
+          <a:noFill/>
+          <a:ln/>
+        </p:spPr>
+        <p:txBody>
+          <a:bodyPr wrap="square" lIns="0" tIns="0" rIns="0" bIns="0" rtlCol="0" anchor="ctr"/>
+          <a:lstStyle/>
+          <a:p>
+            <a:pPr algn="l" indent="0" marL="0">
+              <a:buNone/>
+            </a:pPr>
+            <a:r>
+              <a:rPr lang="en-US" sz="900" i="1" kern="0" dirty="0">
+                <a:solidFill>
+                  <a:srgbClr val="8194A8"/>
+                </a:solidFill>
+                <a:latin typeface="Calibri" pitchFamily="34" charset="0"/>
+                <a:ea typeface="Calibri" pitchFamily="34" charset="-122"/>
+                <a:cs typeface="Calibri" pitchFamily="34" charset="-120"/>
+              </a:rPr>
+              <a:t>CyberArk = enterprise password vault for privileged credentials. OKV = Oracle Key Vault, the central key-management appliance (Phase 2). HSM = tamper-proof key hardware.</a:t>
+            </a:r>
+            <a:endParaRPr lang="en-US" sz="900" i="1" dirty="0"/>
           </a:p>
         </p:txBody>
       </p:sp>
@@ -17219,7 +17301,7 @@
       </p:sp>
       <p:pic>
         <p:nvPicPr>
-          <p:cNvPr id="3" name="Image 0" descr="preencoded.png">    </p:cNvPr>
+          <p:cNvPr id="3" name="Image 0" descr="preencoded.png"/>
           <p:cNvPicPr>
             <a:picLocks noChangeAspect="1"/>
           </p:cNvPicPr>
@@ -18455,7 +18537,7 @@
       </p:sp>
       <p:pic>
         <p:nvPicPr>
-          <p:cNvPr id="3" name="Image 0" descr="preencoded.png">    </p:cNvPr>
+          <p:cNvPr id="3" name="Image 0" descr="preencoded.png"/>
           <p:cNvPicPr>
             <a:picLocks noChangeAspect="1"/>
           </p:cNvPicPr>
@@ -19705,7 +19787,7 @@
       </p:sp>
       <p:pic>
         <p:nvPicPr>
-          <p:cNvPr id="3" name="Image 0" descr="preencoded.png">    </p:cNvPr>
+          <p:cNvPr id="3" name="Image 0" descr="preencoded.png"/>
           <p:cNvPicPr>
             <a:picLocks noChangeAspect="1"/>
           </p:cNvPicPr>
@@ -19884,7 +19966,7 @@
       </p:sp>
       <p:pic>
         <p:nvPicPr>
-          <p:cNvPr id="8" name="Image 1" descr="preencoded.png">    </p:cNvPr>
+          <p:cNvPr id="8" name="Image 1" descr="preencoded.png"/>
           <p:cNvPicPr>
             <a:picLocks noChangeAspect="1"/>
           </p:cNvPicPr>
@@ -19985,7 +20067,7 @@
       </p:sp>
       <p:pic>
         <p:nvPicPr>
-          <p:cNvPr id="11" name="Image 2" descr="preencoded.png">    </p:cNvPr>
+          <p:cNvPr id="11" name="Image 2" descr="preencoded.png"/>
           <p:cNvPicPr>
             <a:picLocks noChangeAspect="1"/>
           </p:cNvPicPr>
@@ -20086,7 +20168,7 @@
       </p:sp>
       <p:pic>
         <p:nvPicPr>
-          <p:cNvPr id="14" name="Image 3" descr="preencoded.png">    </p:cNvPr>
+          <p:cNvPr id="14" name="Image 3" descr="preencoded.png"/>
           <p:cNvPicPr>
             <a:picLocks noChangeAspect="1"/>
           </p:cNvPicPr>
@@ -20187,7 +20269,7 @@
       </p:sp>
       <p:pic>
         <p:nvPicPr>
-          <p:cNvPr id="17" name="Image 4" descr="preencoded.png">    </p:cNvPr>
+          <p:cNvPr id="17" name="Image 4" descr="preencoded.png"/>
           <p:cNvPicPr>
             <a:picLocks noChangeAspect="1"/>
           </p:cNvPicPr>
@@ -20389,7 +20471,7 @@
       </p:sp>
       <p:pic>
         <p:nvPicPr>
-          <p:cNvPr id="23" name="Image 5" descr="preencoded.png">    </p:cNvPr>
+          <p:cNvPr id="23" name="Image 5" descr="preencoded.png"/>
           <p:cNvPicPr>
             <a:picLocks noChangeAspect="1"/>
           </p:cNvPicPr>
@@ -20608,7 +20690,7 @@
       </p:sp>
       <p:pic>
         <p:nvPicPr>
-          <p:cNvPr id="28" name="Image 6" descr="preencoded.png">    </p:cNvPr>
+          <p:cNvPr id="28" name="Image 6" descr="preencoded.png"/>
           <p:cNvPicPr>
             <a:picLocks noChangeAspect="1"/>
           </p:cNvPicPr>
@@ -20827,7 +20909,7 @@
       </p:sp>
       <p:pic>
         <p:nvPicPr>
-          <p:cNvPr id="33" name="Image 7" descr="preencoded.png">    </p:cNvPr>
+          <p:cNvPr id="33" name="Image 7" descr="preencoded.png"/>
           <p:cNvPicPr>
             <a:picLocks noChangeAspect="1"/>
           </p:cNvPicPr>
@@ -21156,7 +21238,7 @@
       </p:sp>
       <p:pic>
         <p:nvPicPr>
-          <p:cNvPr id="6" name="Image 0" descr="preencoded.png">    </p:cNvPr>
+          <p:cNvPr id="6" name="Image 0" descr="preencoded.png"/>
           <p:cNvPicPr>
             <a:picLocks noChangeAspect="1"/>
           </p:cNvPicPr>
@@ -21211,7 +21293,7 @@
                 <a:ea typeface="Calibri" pitchFamily="34" charset="-122"/>
                 <a:cs typeface="Calibri" pitchFamily="34" charset="-120"/>
               </a:rPr>
-              <a:t>TLS  </a:t>
+              <a:t xml:space="preserve">TLS  </a:t>
             </a:r>
             <a:pPr indent="0" marL="0">
               <a:buNone/>
@@ -21334,7 +21416,7 @@
       </p:sp>
       <p:pic>
         <p:nvPicPr>
-          <p:cNvPr id="11" name="Image 1" descr="preencoded.png">    </p:cNvPr>
+          <p:cNvPr id="11" name="Image 1" descr="preencoded.png"/>
           <p:cNvPicPr>
             <a:picLocks noChangeAspect="1"/>
           </p:cNvPicPr>
@@ -21389,7 +21471,7 @@
                 <a:ea typeface="Calibri" pitchFamily="34" charset="-122"/>
                 <a:cs typeface="Calibri" pitchFamily="34" charset="-120"/>
               </a:rPr>
-              <a:t>TDE  </a:t>
+              <a:t xml:space="preserve">TDE  </a:t>
             </a:r>
             <a:pPr indent="0" marL="0">
               <a:buNone/>
@@ -21583,7 +21665,7 @@
                 <a:ea typeface="Calibri" pitchFamily="34" charset="-122"/>
                 <a:cs typeface="Calibri" pitchFamily="34" charset="-120"/>
               </a:rPr>
-              <a:t>Select &amp; schedule the pilot   </a:t>
+              <a:t xml:space="preserve">Select &amp; schedule the pilot   </a:t>
             </a:r>
             <a:pPr indent="0" marL="0">
               <a:buNone/>
@@ -21699,7 +21781,7 @@
                 <a:ea typeface="Calibri" pitchFamily="34" charset="-122"/>
                 <a:cs typeface="Calibri" pitchFamily="34" charset="-120"/>
               </a:rPr>
-              <a:t>Confirm CA SAN process   </a:t>
+              <a:t xml:space="preserve">Confirm CA SAN process   </a:t>
             </a:r>
             <a:pPr indent="0" marL="0">
               <a:buNone/>
@@ -21815,7 +21897,7 @@
                 <a:ea typeface="Calibri" pitchFamily="34" charset="-122"/>
                 <a:cs typeface="Calibri" pitchFamily="34" charset="-120"/>
               </a:rPr>
-              <a:t>Decide ANO interim &amp; OKV   </a:t>
+              <a:t xml:space="preserve">Decide ANO interim &amp; OKV   </a:t>
             </a:r>
             <a:pPr indent="0" marL="0">
               <a:buNone/>
@@ -21931,7 +22013,7 @@
                 <a:ea typeface="Calibri" pitchFamily="34" charset="-122"/>
                 <a:cs typeface="Calibri" pitchFamily="34" charset="-120"/>
               </a:rPr>
-              <a:t>Engage app teams now   </a:t>
+              <a:t xml:space="preserve">Engage app teams now   </a:t>
             </a:r>
             <a:pPr indent="0" marL="0">
               <a:buNone/>
@@ -21987,6 +22069,5130 @@
               <a:t>Documentation: docs/00–04  ·  Scripts: scripts/tls · scripts/tde · scripts/dg</a:t>
             </a:r>
             <a:endParaRPr lang="en-US" sz="1150" dirty="0"/>
+          </a:p>
+        </p:txBody>
+      </p:sp>
+    </p:spTree>
+  </p:cSld>
+  <p:clrMapOvr>
+    <a:masterClrMapping/>
+  </p:clrMapOvr>
+</p:sld>
+</file>
+
+<file path=ppt/slides/slide25.xml><?xml version="1.0" encoding="utf-8"?>
+<p:sld xmlns:a="http://schemas.openxmlformats.org/drawingml/2006/main" xmlns:r="http://schemas.openxmlformats.org/officeDocument/2006/relationships" xmlns:p="http://schemas.openxmlformats.org/presentationml/2006/main">
+  <p:cSld name="Slide 6">
+    <p:bg>
+      <p:bgPr>
+        <a:solidFill>
+          <a:srgbClr val="FFFFFF"/>
+        </a:solidFill>
+      </p:bgPr>
+    </p:bg>
+    <p:spTree>
+      <p:nvGrpSpPr>
+        <p:cNvPr id="1" name=""/>
+        <p:cNvGrpSpPr/>
+        <p:nvPr/>
+      </p:nvGrpSpPr>
+      <p:grpSpPr>
+        <a:xfrm>
+          <a:off x="0" y="0"/>
+          <a:ext cx="0" cy="0"/>
+          <a:chOff x="0" y="0"/>
+          <a:chExt cx="0" cy="0"/>
+        </a:xfrm>
+      </p:grpSpPr>
+      <p:sp>
+        <p:nvSpPr>
+          <p:cNvPr id="2" name="Shape 0"/>
+          <p:cNvSpPr/>
+          <p:nvPr/>
+        </p:nvSpPr>
+        <p:spPr>
+          <a:xfrm>
+            <a:off x="566928" y="457200"/>
+            <a:ext cx="566928" cy="566928"/>
+          </a:xfrm>
+          <a:prstGeom prst="ellipse">
+            <a:avLst/>
+          </a:prstGeom>
+          <a:solidFill>
+            <a:srgbClr val="0F8B85"/>
+          </a:solidFill>
+          <a:ln/>
+        </p:spPr>
+        <p:txBody>
+          <a:bodyPr/>
+          <a:p/>
+        </p:txBody>
+      </p:sp>
+      <p:pic>
+        <p:nvPicPr>
+          <p:cNvPr id="3" name="Image 0" descr="preencoded.png"/>
+          <p:cNvPicPr>
+            <a:picLocks noChangeAspect="1"/>
+          </p:cNvPicPr>
+          <p:nvPr/>
+        </p:nvPicPr>
+        <p:blipFill>
+          <a:blip r:embed="rId1"/>
+          <a:stretch>
+            <a:fillRect/>
+          </a:stretch>
+        </p:blipFill>
+        <p:spPr>
+          <a:xfrm>
+            <a:off x="714329" y="604601"/>
+            <a:ext cx="272125" cy="272125"/>
+          </a:xfrm>
+          <a:prstGeom prst="rect">
+            <a:avLst/>
+          </a:prstGeom>
+        </p:spPr>
+      </p:pic>
+      <p:sp>
+        <p:nvSpPr>
+          <p:cNvPr id="4" name="Text 1"/>
+          <p:cNvSpPr/>
+          <p:nvPr/>
+        </p:nvSpPr>
+        <p:spPr>
+          <a:xfrm>
+            <a:off x="1298448" y="457200"/>
+            <a:ext cx="10326319" cy="274320"/>
+          </a:xfrm>
+          <a:prstGeom prst="rect">
+            <a:avLst/>
+          </a:prstGeom>
+          <a:noFill/>
+          <a:ln/>
+        </p:spPr>
+        <p:txBody>
+          <a:bodyPr wrap="square" lIns="0" tIns="0" rIns="0" bIns="0" rtlCol="0" anchor="ctr"/>
+          <a:lstStyle/>
+          <a:p>
+            <a:pPr algn="l" indent="0" marL="0">
+              <a:buNone/>
+            </a:pPr>
+            <a:r>
+              <a:rPr lang="en-US" sz="1250" b="1" spc="200" kern="0" dirty="0">
+                <a:solidFill>
+                  <a:srgbClr val="0F8B85"/>
+                </a:solidFill>
+                <a:latin typeface="Calibri" pitchFamily="34" charset="0"/>
+                <a:ea typeface="Calibri" pitchFamily="34" charset="-122"/>
+                <a:cs typeface="Calibri" pitchFamily="34" charset="-120"/>
+              </a:rPr>
+              <a:t>FOUNDATIONS — FOR THOSE NEW TO THE TOPIC</a:t>
+            </a:r>
+            <a:endParaRPr lang="en-US" sz="1250" dirty="0"/>
+          </a:p>
+        </p:txBody>
+      </p:sp>
+      <p:sp>
+        <p:nvSpPr>
+          <p:cNvPr id="5" name="Text 2"/>
+          <p:cNvSpPr/>
+          <p:nvPr/>
+        </p:nvSpPr>
+        <p:spPr>
+          <a:xfrm>
+            <a:off x="1298448" y="731520"/>
+            <a:ext cx="10326319" cy="566928"/>
+          </a:xfrm>
+          <a:prstGeom prst="rect">
+            <a:avLst/>
+          </a:prstGeom>
+          <a:noFill/>
+          <a:ln/>
+        </p:spPr>
+        <p:txBody>
+          <a:bodyPr wrap="square" lIns="0" tIns="0" rIns="0" bIns="0" rtlCol="0" anchor="ctr"/>
+          <a:lstStyle/>
+          <a:p>
+            <a:pPr algn="l" indent="0" marL="0">
+              <a:buNone/>
+            </a:pPr>
+            <a:r>
+              <a:rPr lang="en-US" sz="2700" b="1" dirty="0">
+                <a:solidFill>
+                  <a:srgbClr val="1C2A3E"/>
+                </a:solidFill>
+                <a:latin typeface="Cambria" pitchFamily="34" charset="0"/>
+                <a:ea typeface="Cambria" pitchFamily="34" charset="-122"/>
+                <a:cs typeface="Cambria" pitchFamily="34" charset="-120"/>
+              </a:rPr>
+              <a:t>TLS in five minutes</a:t>
+            </a:r>
+            <a:endParaRPr lang="en-US" sz="2700" dirty="0"/>
+          </a:p>
+        </p:txBody>
+      </p:sp>
+      <p:sp>
+        <p:nvSpPr>
+          <p:cNvPr id="6" name="Shape 3"/>
+          <p:cNvSpPr/>
+          <p:nvPr/>
+        </p:nvSpPr>
+        <p:spPr>
+          <a:xfrm>
+            <a:off x="566928" y="1874520"/>
+            <a:ext cx="3977640" cy="1965960"/>
+          </a:xfrm>
+          <a:prstGeom prst="roundRect">
+            <a:avLst>
+              <a:gd name="adj" fmla="val 3721"/>
+            </a:avLst>
+          </a:prstGeom>
+          <a:solidFill>
+            <a:srgbClr val="FAEBE9"/>
+          </a:solidFill>
+          <a:ln w="12700">
+            <a:solidFill>
+              <a:srgbClr val="D8E0EA"/>
+            </a:solidFill>
+            <a:prstDash val="solid"/>
+          </a:ln>
+          <a:effectLst>
+            <a:outerShdw sx="100000" sy="100000" kx="0" ky="0" algn="bl" rotWithShape="0" blurRad="88900" dist="38100" dir="5400000">
+              <a:srgbClr val="1C2A3E">
+                <a:alpha val="13000"/>
+              </a:srgbClr>
+            </a:outerShdw>
+          </a:effectLst>
+        </p:spPr>
+        <p:txBody>
+          <a:bodyPr/>
+          <a:p/>
+        </p:txBody>
+      </p:sp>
+      <p:sp>
+        <p:nvSpPr>
+          <p:cNvPr id="7" name="Text 4"/>
+          <p:cNvSpPr/>
+          <p:nvPr/>
+        </p:nvSpPr>
+        <p:spPr>
+          <a:xfrm>
+            <a:off x="795528" y="2057400"/>
+            <a:ext cx="3520440" cy="274320"/>
+          </a:xfrm>
+          <a:prstGeom prst="rect">
+            <a:avLst/>
+          </a:prstGeom>
+          <a:noFill/>
+          <a:ln/>
+        </p:spPr>
+        <p:txBody>
+          <a:bodyPr wrap="square" lIns="0" tIns="0" rIns="0" bIns="0" rtlCol="0" anchor="ctr"/>
+          <a:lstStyle/>
+          <a:p>
+            <a:pPr indent="0" marL="0">
+              <a:buNone/>
+            </a:pPr>
+            <a:r>
+              <a:rPr lang="en-US" sz="1200" b="1" spc="200" kern="0" dirty="0">
+                <a:solidFill>
+                  <a:srgbClr val="C0392B"/>
+                </a:solidFill>
+                <a:latin typeface="Calibri" pitchFamily="34" charset="0"/>
+                <a:ea typeface="Calibri" pitchFamily="34" charset="-122"/>
+                <a:cs typeface="Calibri" pitchFamily="34" charset="-120"/>
+              </a:rPr>
+              <a:t>THREE GUARANTEES</a:t>
+            </a:r>
+            <a:endParaRPr lang="en-US" sz="1200" dirty="0"/>
+          </a:p>
+        </p:txBody>
+      </p:sp>
+      <p:sp>
+        <p:nvSpPr>
+          <p:cNvPr id="8" name="Text 5"/>
+          <p:cNvSpPr/>
+          <p:nvPr/>
+        </p:nvSpPr>
+        <p:spPr>
+          <a:xfrm>
+            <a:off x="795528" y="2331720"/>
+            <a:ext cx="3520440" cy="411480"/>
+          </a:xfrm>
+          <a:prstGeom prst="rect">
+            <a:avLst/>
+          </a:prstGeom>
+          <a:noFill/>
+          <a:ln/>
+        </p:spPr>
+        <p:txBody>
+          <a:bodyPr wrap="square" lIns="0" tIns="0" rIns="0" bIns="0" rtlCol="0" anchor="ctr"/>
+          <a:lstStyle/>
+          <a:p>
+            <a:pPr indent="0" marL="0">
+              <a:buNone/>
+            </a:pPr>
+            <a:r>
+              <a:rPr lang="en-US" sz="2000" b="1" dirty="0">
+                <a:solidFill>
+                  <a:srgbClr val="1C2A3E"/>
+                </a:solidFill>
+                <a:latin typeface="Cambria" pitchFamily="34" charset="0"/>
+                <a:ea typeface="Cambria" pitchFamily="34" charset="-122"/>
+                <a:cs typeface="Cambria" pitchFamily="34" charset="-120"/>
+              </a:rPr>
+              <a:t>What TLS gives you</a:t>
+            </a:r>
+            <a:endParaRPr lang="en-US" sz="2000" dirty="0"/>
+          </a:p>
+        </p:txBody>
+      </p:sp>
+      <p:sp>
+        <p:nvSpPr>
+          <p:cNvPr id="9" name="Text 6"/>
+          <p:cNvSpPr/>
+          <p:nvPr/>
+        </p:nvSpPr>
+        <p:spPr>
+          <a:xfrm>
+            <a:off x="841248" y="2788920"/>
+            <a:ext cx="3474720" cy="960120"/>
+          </a:xfrm>
+          <a:prstGeom prst="rect">
+            <a:avLst/>
+          </a:prstGeom>
+          <a:noFill/>
+          <a:ln/>
+        </p:spPr>
+        <p:txBody>
+          <a:bodyPr wrap="square" lIns="0" tIns="0" rIns="0" bIns="0" rtlCol="0" anchor="ctr"/>
+          <a:lstStyle/>
+          <a:p>
+            <a:pPr marL="342900" indent="-342900">
+              <a:spcAft>
+                <a:spcPts val="400"/>
+              </a:spcAft>
+              <a:buSzPct val="100000"/>
+              <a:buChar char="•"/>
+            </a:pPr>
+            <a:r>
+              <a:rPr lang="en-US" sz="1300" dirty="0">
+                <a:solidFill>
+                  <a:srgbClr val="44586E"/>
+                </a:solidFill>
+                <a:latin typeface="Calibri" pitchFamily="34" charset="0"/>
+                <a:ea typeface="Calibri" pitchFamily="34" charset="-122"/>
+                <a:cs typeface="Calibri" pitchFamily="34" charset="-120"/>
+              </a:rPr>
+              <a:t>Confidential — nobody reads the wire</a:t>
+            </a:r>
+            <a:endParaRPr lang="en-US" sz="1300" dirty="0"/>
+          </a:p>
+          <a:p>
+            <a:pPr marL="342900" indent="-342900">
+              <a:spcAft>
+                <a:spcPts val="400"/>
+              </a:spcAft>
+              <a:buSzPct val="100000"/>
+              <a:buChar char="•"/>
+            </a:pPr>
+            <a:r>
+              <a:rPr lang="en-US" sz="1300" dirty="0">
+                <a:solidFill>
+                  <a:srgbClr val="44586E"/>
+                </a:solidFill>
+                <a:latin typeface="Calibri" pitchFamily="34" charset="0"/>
+                <a:ea typeface="Calibri" pitchFamily="34" charset="-122"/>
+                <a:cs typeface="Calibri" pitchFamily="34" charset="-120"/>
+              </a:rPr>
+              <a:t>Authentic — you reach the real DB</a:t>
+            </a:r>
+            <a:endParaRPr lang="en-US" sz="1300" dirty="0"/>
+          </a:p>
+          <a:p>
+            <a:pPr marL="342900" indent="-342900">
+              <a:spcAft>
+                <a:spcPts val="400"/>
+              </a:spcAft>
+              <a:buSzPct val="100000"/>
+              <a:buChar char="•"/>
+            </a:pPr>
+            <a:r>
+              <a:rPr lang="en-US" sz="1300" dirty="0">
+                <a:solidFill>
+                  <a:srgbClr val="44586E"/>
+                </a:solidFill>
+                <a:latin typeface="Calibri" pitchFamily="34" charset="0"/>
+                <a:ea typeface="Calibri" pitchFamily="34" charset="-122"/>
+                <a:cs typeface="Calibri" pitchFamily="34" charset="-120"/>
+              </a:rPr>
+              <a:t>Integrity — tampering is detected</a:t>
+            </a:r>
+            <a:endParaRPr lang="en-US" sz="1300" dirty="0"/>
+          </a:p>
+        </p:txBody>
+      </p:sp>
+      <p:pic>
+        <p:nvPicPr>
+          <p:cNvPr id="10" name="Image 1" descr="preencoded.png"/>
+          <p:cNvPicPr>
+            <a:picLocks noChangeAspect="1"/>
+          </p:cNvPicPr>
+          <p:nvPr/>
+        </p:nvPicPr>
+        <p:blipFill>
+          <a:blip r:embed="rId2"/>
+          <a:stretch>
+            <a:fillRect/>
+          </a:stretch>
+        </p:blipFill>
+        <p:spPr>
+          <a:xfrm>
+            <a:off x="4654296" y="2697480"/>
+            <a:ext cx="384048" cy="384048"/>
+          </a:xfrm>
+          <a:prstGeom prst="rect">
+            <a:avLst/>
+          </a:prstGeom>
+        </p:spPr>
+      </p:pic>
+      <p:sp>
+        <p:nvSpPr>
+          <p:cNvPr id="11" name="Shape 7"/>
+          <p:cNvSpPr/>
+          <p:nvPr/>
+        </p:nvSpPr>
+        <p:spPr>
+          <a:xfrm>
+            <a:off x="5148072" y="1874520"/>
+            <a:ext cx="3977640" cy="1965960"/>
+          </a:xfrm>
+          <a:prstGeom prst="roundRect">
+            <a:avLst>
+              <a:gd name="adj" fmla="val 3721"/>
+            </a:avLst>
+          </a:prstGeom>
+          <a:solidFill>
+            <a:srgbClr val="E7F4F3"/>
+          </a:solidFill>
+          <a:ln w="12700">
+            <a:solidFill>
+              <a:srgbClr val="D8E0EA"/>
+            </a:solidFill>
+            <a:prstDash val="solid"/>
+          </a:ln>
+          <a:effectLst>
+            <a:outerShdw sx="100000" sy="100000" kx="0" ky="0" algn="bl" rotWithShape="0" blurRad="88900" dist="38100" dir="5400000">
+              <a:srgbClr val="1C2A3E">
+                <a:alpha val="13000"/>
+              </a:srgbClr>
+            </a:outerShdw>
+          </a:effectLst>
+        </p:spPr>
+        <p:txBody>
+          <a:bodyPr/>
+          <a:p/>
+        </p:txBody>
+      </p:sp>
+      <p:sp>
+        <p:nvSpPr>
+          <p:cNvPr id="12" name="Text 8"/>
+          <p:cNvSpPr/>
+          <p:nvPr/>
+        </p:nvSpPr>
+        <p:spPr>
+          <a:xfrm>
+            <a:off x="5376672" y="2057400"/>
+            <a:ext cx="3520440" cy="274320"/>
+          </a:xfrm>
+          <a:prstGeom prst="rect">
+            <a:avLst/>
+          </a:prstGeom>
+          <a:noFill/>
+          <a:ln/>
+        </p:spPr>
+        <p:txBody>
+          <a:bodyPr wrap="square" lIns="0" tIns="0" rIns="0" bIns="0" rtlCol="0" anchor="ctr"/>
+          <a:lstStyle/>
+          <a:p>
+            <a:pPr indent="0" marL="0">
+              <a:buNone/>
+            </a:pPr>
+            <a:r>
+              <a:rPr lang="en-US" sz="1200" b="1" spc="200" kern="0" dirty="0">
+                <a:solidFill>
+                  <a:srgbClr val="0B6B66"/>
+                </a:solidFill>
+                <a:latin typeface="Calibri" pitchFamily="34" charset="0"/>
+                <a:ea typeface="Calibri" pitchFamily="34" charset="-122"/>
+                <a:cs typeface="Calibri" pitchFamily="34" charset="-120"/>
+              </a:rPr>
+              <a:t>THE HANDSHAKE</a:t>
+            </a:r>
+            <a:endParaRPr lang="en-US" sz="1200" dirty="0"/>
+          </a:p>
+        </p:txBody>
+      </p:sp>
+      <p:sp>
+        <p:nvSpPr>
+          <p:cNvPr id="13" name="Text 9"/>
+          <p:cNvSpPr/>
+          <p:nvPr/>
+        </p:nvSpPr>
+        <p:spPr>
+          <a:xfrm>
+            <a:off x="5376672" y="2331720"/>
+            <a:ext cx="3520440" cy="411480"/>
+          </a:xfrm>
+          <a:prstGeom prst="rect">
+            <a:avLst/>
+          </a:prstGeom>
+          <a:noFill/>
+          <a:ln/>
+        </p:spPr>
+        <p:txBody>
+          <a:bodyPr wrap="square" lIns="0" tIns="0" rIns="0" bIns="0" rtlCol="0" anchor="ctr"/>
+          <a:lstStyle/>
+          <a:p>
+            <a:pPr indent="0" marL="0">
+              <a:buNone/>
+            </a:pPr>
+            <a:r>
+              <a:rPr lang="en-US" sz="2000" b="1" dirty="0">
+                <a:solidFill>
+                  <a:srgbClr val="1C2A3E"/>
+                </a:solidFill>
+                <a:latin typeface="Cambria" pitchFamily="34" charset="0"/>
+                <a:ea typeface="Cambria" pitchFamily="34" charset="-122"/>
+                <a:cs typeface="Cambria" pitchFamily="34" charset="-120"/>
+              </a:rPr>
+              <a:t>In plain words</a:t>
+            </a:r>
+            <a:endParaRPr lang="en-US" sz="2000" dirty="0"/>
+          </a:p>
+        </p:txBody>
+      </p:sp>
+      <p:sp>
+        <p:nvSpPr>
+          <p:cNvPr id="14" name="Text 10"/>
+          <p:cNvSpPr/>
+          <p:nvPr/>
+        </p:nvSpPr>
+        <p:spPr>
+          <a:xfrm>
+            <a:off x="5422392" y="2788920"/>
+            <a:ext cx="3474720" cy="960120"/>
+          </a:xfrm>
+          <a:prstGeom prst="rect">
+            <a:avLst/>
+          </a:prstGeom>
+          <a:noFill/>
+          <a:ln/>
+        </p:spPr>
+        <p:txBody>
+          <a:bodyPr wrap="square" lIns="0" tIns="0" rIns="0" bIns="0" rtlCol="0" anchor="ctr"/>
+          <a:lstStyle/>
+          <a:p>
+            <a:pPr marL="342900" indent="-342900">
+              <a:spcAft>
+                <a:spcPts val="400"/>
+              </a:spcAft>
+              <a:buSzPct val="100000"/>
+              <a:buChar char="•"/>
+            </a:pPr>
+            <a:r>
+              <a:rPr lang="en-US" sz="1300" dirty="0">
+                <a:solidFill>
+                  <a:srgbClr val="44586E"/>
+                </a:solidFill>
+                <a:latin typeface="Calibri" pitchFamily="34" charset="0"/>
+                <a:ea typeface="Calibri" pitchFamily="34" charset="-122"/>
+                <a:cs typeface="Calibri" pitchFamily="34" charset="-120"/>
+              </a:rPr>
+              <a:t>Server presents its certificate</a:t>
+            </a:r>
+            <a:endParaRPr lang="en-US" sz="1300" dirty="0"/>
+          </a:p>
+          <a:p>
+            <a:pPr marL="342900" indent="-342900">
+              <a:spcAft>
+                <a:spcPts val="400"/>
+              </a:spcAft>
+              <a:buSzPct val="100000"/>
+              <a:buChar char="•"/>
+            </a:pPr>
+            <a:r>
+              <a:rPr lang="en-US" sz="1300" dirty="0">
+                <a:solidFill>
+                  <a:srgbClr val="44586E"/>
+                </a:solidFill>
+                <a:latin typeface="Calibri" pitchFamily="34" charset="0"/>
+                <a:ea typeface="Calibri" pitchFamily="34" charset="-122"/>
+                <a:cs typeface="Calibri" pitchFamily="34" charset="-120"/>
+              </a:rPr>
+              <a:t>Client verifies the CA signature</a:t>
+            </a:r>
+            <a:endParaRPr lang="en-US" sz="1300" dirty="0"/>
+          </a:p>
+          <a:p>
+            <a:pPr marL="342900" indent="-342900">
+              <a:spcAft>
+                <a:spcPts val="400"/>
+              </a:spcAft>
+              <a:buSzPct val="100000"/>
+              <a:buChar char="•"/>
+            </a:pPr>
+            <a:r>
+              <a:rPr lang="en-US" sz="1300" dirty="0">
+                <a:solidFill>
+                  <a:srgbClr val="44586E"/>
+                </a:solidFill>
+                <a:latin typeface="Calibri" pitchFamily="34" charset="0"/>
+                <a:ea typeface="Calibri" pitchFamily="34" charset="-122"/>
+                <a:cs typeface="Calibri" pitchFamily="34" charset="-120"/>
+              </a:rPr>
+              <a:t>Both agree keys, then encrypt</a:t>
+            </a:r>
+            <a:endParaRPr lang="en-US" sz="1300" dirty="0"/>
+          </a:p>
+        </p:txBody>
+      </p:sp>
+      <p:sp>
+        <p:nvSpPr>
+          <p:cNvPr id="15" name="Shape 11"/>
+          <p:cNvSpPr/>
+          <p:nvPr/>
+        </p:nvSpPr>
+        <p:spPr>
+          <a:xfrm>
+            <a:off x="9445752" y="1874520"/>
+            <a:ext cx="2179015" cy="1965960"/>
+          </a:xfrm>
+          <a:prstGeom prst="roundRect">
+            <a:avLst>
+              <a:gd name="adj" fmla="val 3721"/>
+            </a:avLst>
+          </a:prstGeom>
+          <a:solidFill>
+            <a:srgbClr val="12223F"/>
+          </a:solidFill>
+          <a:ln w="12700">
+            <a:solidFill>
+              <a:srgbClr val="D8E0EA"/>
+            </a:solidFill>
+            <a:prstDash val="solid"/>
+          </a:ln>
+          <a:effectLst>
+            <a:outerShdw sx="100000" sy="100000" kx="0" ky="0" algn="bl" rotWithShape="0" blurRad="88900" dist="38100" dir="5400000">
+              <a:srgbClr val="1C2A3E">
+                <a:alpha val="13000"/>
+              </a:srgbClr>
+            </a:outerShdw>
+          </a:effectLst>
+        </p:spPr>
+        <p:txBody>
+          <a:bodyPr/>
+          <a:p/>
+        </p:txBody>
+      </p:sp>
+      <p:sp>
+        <p:nvSpPr>
+          <p:cNvPr id="16" name="Shape 12"/>
+          <p:cNvSpPr/>
+          <p:nvPr/>
+        </p:nvSpPr>
+        <p:spPr>
+          <a:xfrm>
+            <a:off x="9701784" y="2103120"/>
+            <a:ext cx="548640" cy="548640"/>
+          </a:xfrm>
+          <a:prstGeom prst="ellipse">
+            <a:avLst/>
+          </a:prstGeom>
+          <a:solidFill>
+            <a:srgbClr val="0F8B85"/>
+          </a:solidFill>
+          <a:ln/>
+        </p:spPr>
+        <p:txBody>
+          <a:bodyPr/>
+          <a:p/>
+        </p:txBody>
+      </p:sp>
+      <p:pic>
+        <p:nvPicPr>
+          <p:cNvPr id="17" name="Image 2" descr="preencoded.png"/>
+          <p:cNvPicPr>
+            <a:picLocks noChangeAspect="1"/>
+          </p:cNvPicPr>
+          <p:nvPr/>
+        </p:nvPicPr>
+        <p:blipFill>
+          <a:blip r:embed="rId3"/>
+          <a:stretch>
+            <a:fillRect/>
+          </a:stretch>
+        </p:blipFill>
+        <p:spPr>
+          <a:xfrm>
+            <a:off x="9844430" y="2245766"/>
+            <a:ext cx="263347" cy="263347"/>
+          </a:xfrm>
+          <a:prstGeom prst="rect">
+            <a:avLst/>
+          </a:prstGeom>
+        </p:spPr>
+      </p:pic>
+      <p:sp>
+        <p:nvSpPr>
+          <p:cNvPr id="18" name="Text 13"/>
+          <p:cNvSpPr/>
+          <p:nvPr/>
+        </p:nvSpPr>
+        <p:spPr>
+          <a:xfrm>
+            <a:off x="10341864" y="2103120"/>
+            <a:ext cx="1173175" cy="548640"/>
+          </a:xfrm>
+          <a:prstGeom prst="rect">
+            <a:avLst/>
+          </a:prstGeom>
+          <a:noFill/>
+          <a:ln/>
+        </p:spPr>
+        <p:txBody>
+          <a:bodyPr wrap="square" lIns="0" tIns="0" rIns="0" bIns="0" rtlCol="0" anchor="ctr"/>
+          <a:lstStyle/>
+          <a:p>
+            <a:pPr indent="0" marL="0">
+              <a:buNone/>
+            </a:pPr>
+            <a:r>
+              <a:rPr lang="en-US" sz="1800" b="1" dirty="0">
+                <a:solidFill>
+                  <a:srgbClr val="FFFFFF"/>
+                </a:solidFill>
+                <a:latin typeface="Cambria" pitchFamily="34" charset="0"/>
+                <a:ea typeface="Cambria" pitchFamily="34" charset="-122"/>
+                <a:cs typeface="Cambria" pitchFamily="34" charset="-120"/>
+              </a:rPr>
+              <a:t>In Oracle</a:t>
+            </a:r>
+            <a:endParaRPr lang="en-US" sz="1800" dirty="0"/>
+          </a:p>
+        </p:txBody>
+      </p:sp>
+      <p:sp>
+        <p:nvSpPr>
+          <p:cNvPr id="19" name="Text 14"/>
+          <p:cNvSpPr/>
+          <p:nvPr/>
+        </p:nvSpPr>
+        <p:spPr>
+          <a:xfrm>
+            <a:off x="9701784" y="2743200"/>
+            <a:ext cx="1676095" cy="1005840"/>
+          </a:xfrm>
+          <a:prstGeom prst="rect">
+            <a:avLst/>
+          </a:prstGeom>
+          <a:noFill/>
+          <a:ln/>
+        </p:spPr>
+        <p:txBody>
+          <a:bodyPr wrap="square" lIns="0" tIns="0" rIns="0" bIns="0" rtlCol="0" anchor="ctr"/>
+          <a:lstStyle/>
+          <a:p>
+            <a:pPr indent="0" marL="0">
+              <a:lnSpc>
+                <a:spcPct val="108000"/>
+              </a:lnSpc>
+              <a:spcAft>
+                <a:spcPts val="300"/>
+              </a:spcAft>
+              <a:buNone/>
+            </a:pPr>
+            <a:r>
+              <a:rPr lang="en-US" sz="1250" b="1" dirty="0">
+                <a:solidFill>
+                  <a:srgbClr val="0F8B85"/>
+                </a:solidFill>
+                <a:latin typeface="Calibri" pitchFamily="34" charset="0"/>
+                <a:ea typeface="Calibri" pitchFamily="34" charset="-122"/>
+                <a:cs typeface="Calibri" pitchFamily="34" charset="-120"/>
+              </a:rPr>
+              <a:t>TCPS</a:t>
+            </a:r>
+            <a:endParaRPr lang="en-US" sz="1250" dirty="0"/>
+          </a:p>
+          <a:p>
+            <a:pPr indent="0" marL="0">
+              <a:lnSpc>
+                <a:spcPct val="108000"/>
+              </a:lnSpc>
+              <a:spcAft>
+                <a:spcPts val="300"/>
+              </a:spcAft>
+              <a:buNone/>
+            </a:pPr>
+            <a:r>
+              <a:rPr lang="en-US" sz="1250" dirty="0">
+                <a:solidFill>
+                  <a:srgbClr val="C7D2E0"/>
+                </a:solidFill>
+                <a:latin typeface="Calibri" pitchFamily="34" charset="0"/>
+                <a:ea typeface="Calibri" pitchFamily="34" charset="-122"/>
+                <a:cs typeface="Calibri" pitchFamily="34" charset="-120"/>
+              </a:rPr>
+              <a:t>SQL*Net simply run over TLS. The wallet is Oracle’s container for the keys and certificates.</a:t>
+            </a:r>
+            <a:endParaRPr lang="en-US" sz="1250" dirty="0"/>
+          </a:p>
+          <a:p>
+            <a:pPr indent="0" marL="0">
+              <a:lnSpc>
+                <a:spcPct val="108000"/>
+              </a:lnSpc>
+              <a:spcAft>
+                <a:spcPts val="300"/>
+              </a:spcAft>
+              <a:buNone/>
+            </a:pPr>
+            <a:r>
+              <a:rPr lang="en-US" sz="1250" i="1" dirty="0">
+                <a:solidFill>
+                  <a:srgbClr val="8194A8"/>
+                </a:solidFill>
+                <a:latin typeface="Calibri" pitchFamily="34" charset="0"/>
+                <a:ea typeface="Calibri" pitchFamily="34" charset="-122"/>
+                <a:cs typeface="Calibri" pitchFamily="34" charset="-120"/>
+              </a:rPr>
+              <a:t>The listener just gains a second endpoint.</a:t>
+            </a:r>
+            <a:endParaRPr lang="en-US" sz="1250" dirty="0"/>
+          </a:p>
+        </p:txBody>
+      </p:sp>
+      <p:sp>
+        <p:nvSpPr>
+          <p:cNvPr id="20" name="Shape 15"/>
+          <p:cNvSpPr/>
+          <p:nvPr/>
+        </p:nvSpPr>
+        <p:spPr>
+          <a:xfrm>
+            <a:off x="566928" y="4114800"/>
+            <a:ext cx="11057839" cy="2103120"/>
+          </a:xfrm>
+          <a:prstGeom prst="roundRect">
+            <a:avLst>
+              <a:gd name="adj" fmla="val 3478"/>
+            </a:avLst>
+          </a:prstGeom>
+          <a:solidFill>
+            <a:srgbClr val="F3F6FA"/>
+          </a:solidFill>
+          <a:ln w="12700">
+            <a:solidFill>
+              <a:srgbClr val="D8E0EA"/>
+            </a:solidFill>
+            <a:prstDash val="solid"/>
+          </a:ln>
+          <a:effectLst>
+            <a:outerShdw sx="100000" sy="100000" kx="0" ky="0" algn="bl" rotWithShape="0" blurRad="88900" dist="38100" dir="5400000">
+              <a:srgbClr val="1C2A3E">
+                <a:alpha val="13000"/>
+              </a:srgbClr>
+            </a:outerShdw>
+          </a:effectLst>
+        </p:spPr>
+        <p:txBody>
+          <a:bodyPr/>
+          <a:p/>
+        </p:txBody>
+      </p:sp>
+      <p:sp>
+        <p:nvSpPr>
+          <p:cNvPr id="21" name="Shape 16"/>
+          <p:cNvSpPr/>
+          <p:nvPr/>
+        </p:nvSpPr>
+        <p:spPr>
+          <a:xfrm>
+            <a:off x="859536" y="4370832"/>
+            <a:ext cx="640080" cy="640080"/>
+          </a:xfrm>
+          <a:prstGeom prst="ellipse">
+            <a:avLst/>
+          </a:prstGeom>
+          <a:solidFill>
+            <a:srgbClr val="0F8B85"/>
+          </a:solidFill>
+          <a:ln/>
+        </p:spPr>
+        <p:txBody>
+          <a:bodyPr/>
+          <a:p/>
+        </p:txBody>
+      </p:sp>
+      <p:pic>
+        <p:nvPicPr>
+          <p:cNvPr id="22" name="Image 3" descr="preencoded.png"/>
+          <p:cNvPicPr>
+            <a:picLocks noChangeAspect="1"/>
+          </p:cNvPicPr>
+          <p:nvPr/>
+        </p:nvPicPr>
+        <p:blipFill>
+          <a:blip r:embed="rId4"/>
+          <a:stretch>
+            <a:fillRect/>
+          </a:stretch>
+        </p:blipFill>
+        <p:spPr>
+          <a:xfrm>
+            <a:off x="1025957" y="4537253"/>
+            <a:ext cx="307238" cy="307238"/>
+          </a:xfrm>
+          <a:prstGeom prst="rect">
+            <a:avLst/>
+          </a:prstGeom>
+        </p:spPr>
+      </p:pic>
+      <p:sp>
+        <p:nvSpPr>
+          <p:cNvPr id="23" name="Text 17"/>
+          <p:cNvSpPr/>
+          <p:nvPr/>
+        </p:nvSpPr>
+        <p:spPr>
+          <a:xfrm>
+            <a:off x="1664208" y="4315968"/>
+            <a:ext cx="9777679" cy="411480"/>
+          </a:xfrm>
+          <a:prstGeom prst="rect">
+            <a:avLst/>
+          </a:prstGeom>
+          <a:noFill/>
+          <a:ln/>
+        </p:spPr>
+        <p:txBody>
+          <a:bodyPr wrap="square" lIns="0" tIns="0" rIns="0" bIns="0" rtlCol="0" anchor="ctr"/>
+          <a:lstStyle/>
+          <a:p>
+            <a:pPr indent="0" marL="0">
+              <a:buNone/>
+            </a:pPr>
+            <a:r>
+              <a:rPr lang="en-US" sz="1800" b="1" dirty="0">
+                <a:solidFill>
+                  <a:srgbClr val="1C2A3E"/>
+                </a:solidFill>
+                <a:latin typeface="Cambria" pitchFamily="34" charset="0"/>
+                <a:ea typeface="Cambria" pitchFamily="34" charset="-122"/>
+                <a:cs typeface="Cambria" pitchFamily="34" charset="-120"/>
+              </a:rPr>
+              <a:t>The same proven technology that protects HTTPS and banking sites</a:t>
+            </a:r>
+            <a:endParaRPr lang="en-US" sz="1800" dirty="0"/>
+          </a:p>
+        </p:txBody>
+      </p:sp>
+      <p:sp>
+        <p:nvSpPr>
+          <p:cNvPr id="24" name="Text 18"/>
+          <p:cNvSpPr/>
+          <p:nvPr/>
+        </p:nvSpPr>
+        <p:spPr>
+          <a:xfrm>
+            <a:off x="1664208" y="4754880"/>
+            <a:ext cx="9686239" cy="1280160"/>
+          </a:xfrm>
+          <a:prstGeom prst="rect">
+            <a:avLst/>
+          </a:prstGeom>
+          <a:noFill/>
+          <a:ln/>
+        </p:spPr>
+        <p:txBody>
+          <a:bodyPr wrap="square" lIns="0" tIns="0" rIns="0" bIns="0" rtlCol="0" anchor="t"/>
+          <a:lstStyle/>
+          <a:p>
+            <a:pPr indent="0" marL="0">
+              <a:lnSpc>
+                <a:spcPct val="112000"/>
+              </a:lnSpc>
+              <a:buNone/>
+            </a:pPr>
+            <a:r>
+              <a:rPr lang="en-US" sz="1400" b="1" dirty="0">
+                <a:solidFill>
+                  <a:srgbClr val="1C2A3E"/>
+                </a:solidFill>
+                <a:latin typeface="Calibri" pitchFamily="34" charset="0"/>
+                <a:ea typeface="Calibri" pitchFamily="34" charset="-122"/>
+                <a:cs typeface="Calibri" pitchFamily="34" charset="-120"/>
+              </a:rPr>
+              <a:t xml:space="preserve">This is the identical TLS that secures HTTPS and online banking. </a:t>
+            </a:r>
+            <a:pPr indent="0" marL="0">
+              <a:lnSpc>
+                <a:spcPct val="112000"/>
+              </a:lnSpc>
+              <a:buNone/>
+            </a:pPr>
+            <a:r>
+              <a:rPr lang="en-US" sz="1400" dirty="0">
+                <a:solidFill>
+                  <a:srgbClr val="44586E"/>
+                </a:solidFill>
+                <a:latin typeface="Calibri" pitchFamily="34" charset="0"/>
+                <a:ea typeface="Calibri" pitchFamily="34" charset="-122"/>
+                <a:cs typeface="Calibri" pitchFamily="34" charset="-120"/>
+              </a:rPr>
+              <a:t xml:space="preserve">It is a standard, battle-tested internet protocol — not Oracle-specific magic. Oracle simply wraps it: </a:t>
+            </a:r>
+            <a:pPr indent="0" marL="0">
+              <a:lnSpc>
+                <a:spcPct val="112000"/>
+              </a:lnSpc>
+              <a:buNone/>
+            </a:pPr>
+            <a:r>
+              <a:rPr lang="en-US" sz="1400" b="1" dirty="0">
+                <a:solidFill>
+                  <a:srgbClr val="0B6B66"/>
+                </a:solidFill>
+                <a:latin typeface="Calibri" pitchFamily="34" charset="0"/>
+                <a:ea typeface="Calibri" pitchFamily="34" charset="-122"/>
+                <a:cs typeface="Calibri" pitchFamily="34" charset="-120"/>
+              </a:rPr>
+              <a:t>TCPS, the wallet, and a second listener port</a:t>
+            </a:r>
+            <a:pPr indent="0" marL="0">
+              <a:lnSpc>
+                <a:spcPct val="112000"/>
+              </a:lnSpc>
+              <a:buNone/>
+            </a:pPr>
+            <a:r>
+              <a:rPr lang="en-US" sz="1400" dirty="0">
+                <a:solidFill>
+                  <a:srgbClr val="44586E"/>
+                </a:solidFill>
+                <a:latin typeface="Calibri" pitchFamily="34" charset="0"/>
+                <a:ea typeface="Calibri" pitchFamily="34" charset="-122"/>
+                <a:cs typeface="Calibri" pitchFamily="34" charset="-120"/>
+              </a:rPr>
+              <a:t xml:space="preserve"> are the only new pieces you meet. If you trust the padlock in your browser, you already trust this.</a:t>
+            </a:r>
+            <a:endParaRPr lang="en-US" sz="1400" dirty="0"/>
+          </a:p>
+        </p:txBody>
+      </p:sp>
+    </p:spTree>
+  </p:cSld>
+  <p:clrMapOvr>
+    <a:masterClrMapping/>
+  </p:clrMapOvr>
+</p:sld>
+</file>
+
+<file path=ppt/slides/slide26.xml><?xml version="1.0" encoding="utf-8"?>
+<p:sld xmlns:a="http://schemas.openxmlformats.org/drawingml/2006/main" xmlns:r="http://schemas.openxmlformats.org/officeDocument/2006/relationships" xmlns:p="http://schemas.openxmlformats.org/presentationml/2006/main">
+  <p:cSld name="Slide 8">
+    <p:bg>
+      <p:bgPr>
+        <a:solidFill>
+          <a:srgbClr val="FFFFFF"/>
+        </a:solidFill>
+      </p:bgPr>
+    </p:bg>
+    <p:spTree>
+      <p:nvGrpSpPr>
+        <p:cNvPr id="1" name=""/>
+        <p:cNvGrpSpPr/>
+        <p:nvPr/>
+      </p:nvGrpSpPr>
+      <p:grpSpPr>
+        <a:xfrm>
+          <a:off x="0" y="0"/>
+          <a:ext cx="0" cy="0"/>
+          <a:chOff x="0" y="0"/>
+          <a:chExt cx="0" cy="0"/>
+        </a:xfrm>
+      </p:grpSpPr>
+      <p:sp>
+        <p:nvSpPr>
+          <p:cNvPr id="2" name="Shape 0"/>
+          <p:cNvSpPr/>
+          <p:nvPr/>
+        </p:nvSpPr>
+        <p:spPr>
+          <a:xfrm>
+            <a:off x="566928" y="457200"/>
+            <a:ext cx="566928" cy="566928"/>
+          </a:xfrm>
+          <a:prstGeom prst="ellipse">
+            <a:avLst/>
+          </a:prstGeom>
+          <a:solidFill>
+            <a:srgbClr val="0F8B85"/>
+          </a:solidFill>
+          <a:ln/>
+        </p:spPr>
+        <p:txBody>
+          <a:bodyPr/>
+          <a:p/>
+        </p:txBody>
+      </p:sp>
+      <p:pic>
+        <p:nvPicPr>
+          <p:cNvPr id="3" name="Image 0" descr="preencoded.png"/>
+          <p:cNvPicPr>
+            <a:picLocks noChangeAspect="1"/>
+          </p:cNvPicPr>
+          <p:nvPr/>
+        </p:nvPicPr>
+        <p:blipFill>
+          <a:blip r:embed="rId1"/>
+          <a:stretch>
+            <a:fillRect/>
+          </a:stretch>
+        </p:blipFill>
+        <p:spPr>
+          <a:xfrm>
+            <a:off x="714329" y="604601"/>
+            <a:ext cx="272125" cy="272125"/>
+          </a:xfrm>
+          <a:prstGeom prst="rect">
+            <a:avLst/>
+          </a:prstGeom>
+        </p:spPr>
+      </p:pic>
+      <p:sp>
+        <p:nvSpPr>
+          <p:cNvPr id="4" name="Text 1"/>
+          <p:cNvSpPr/>
+          <p:nvPr/>
+        </p:nvSpPr>
+        <p:spPr>
+          <a:xfrm>
+            <a:off x="1298448" y="457200"/>
+            <a:ext cx="10326319" cy="274320"/>
+          </a:xfrm>
+          <a:prstGeom prst="rect">
+            <a:avLst/>
+          </a:prstGeom>
+          <a:noFill/>
+          <a:ln/>
+        </p:spPr>
+        <p:txBody>
+          <a:bodyPr wrap="square" lIns="0" tIns="0" rIns="0" bIns="0" rtlCol="0" anchor="ctr"/>
+          <a:lstStyle/>
+          <a:p>
+            <a:pPr algn="l" indent="0" marL="0">
+              <a:buNone/>
+            </a:pPr>
+            <a:r>
+              <a:rPr lang="en-US" sz="1250" b="1" spc="200" kern="0" dirty="0">
+                <a:solidFill>
+                  <a:srgbClr val="0F8B85"/>
+                </a:solidFill>
+                <a:latin typeface="Calibri" pitchFamily="34" charset="0"/>
+                <a:ea typeface="Calibri" pitchFamily="34" charset="-122"/>
+                <a:cs typeface="Calibri" pitchFamily="34" charset="-120"/>
+              </a:rPr>
+              <a:t>FOUNDATIONS — FOR THOSE NEW TO THE TOPIC</a:t>
+            </a:r>
+            <a:endParaRPr lang="en-US" sz="1250" dirty="0"/>
+          </a:p>
+        </p:txBody>
+      </p:sp>
+      <p:sp>
+        <p:nvSpPr>
+          <p:cNvPr id="5" name="Text 2"/>
+          <p:cNvSpPr/>
+          <p:nvPr/>
+        </p:nvSpPr>
+        <p:spPr>
+          <a:xfrm>
+            <a:off x="1298448" y="731520"/>
+            <a:ext cx="10326319" cy="566928"/>
+          </a:xfrm>
+          <a:prstGeom prst="rect">
+            <a:avLst/>
+          </a:prstGeom>
+          <a:noFill/>
+          <a:ln/>
+        </p:spPr>
+        <p:txBody>
+          <a:bodyPr wrap="square" lIns="0" tIns="0" rIns="0" bIns="0" rtlCol="0" anchor="ctr"/>
+          <a:lstStyle/>
+          <a:p>
+            <a:pPr algn="l" indent="0" marL="0">
+              <a:buNone/>
+            </a:pPr>
+            <a:r>
+              <a:rPr lang="en-US" sz="2700" b="1" dirty="0">
+                <a:solidFill>
+                  <a:srgbClr val="1C2A3E"/>
+                </a:solidFill>
+                <a:latin typeface="Cambria" pitchFamily="34" charset="0"/>
+                <a:ea typeface="Cambria" pitchFamily="34" charset="-122"/>
+                <a:cs typeface="Cambria" pitchFamily="34" charset="-120"/>
+              </a:rPr>
+              <a:t>TLS vocabulary — the terms you’ll meet</a:t>
+            </a:r>
+            <a:endParaRPr lang="en-US" sz="2700" dirty="0"/>
+          </a:p>
+        </p:txBody>
+      </p:sp>
+      <p:sp>
+        <p:nvSpPr>
+          <p:cNvPr id="6" name="Shape 3"/>
+          <p:cNvSpPr/>
+          <p:nvPr/>
+        </p:nvSpPr>
+        <p:spPr>
+          <a:xfrm>
+            <a:off x="566928" y="1810512"/>
+            <a:ext cx="5368900" cy="731520"/>
+          </a:xfrm>
+          <a:prstGeom prst="roundRect">
+            <a:avLst>
+              <a:gd name="adj" fmla="val 7500"/>
+            </a:avLst>
+          </a:prstGeom>
+          <a:solidFill>
+            <a:srgbClr val="F3F6FA"/>
+          </a:solidFill>
+          <a:ln w="12700">
+            <a:solidFill>
+              <a:srgbClr val="D8E0EA"/>
+            </a:solidFill>
+            <a:prstDash val="solid"/>
+          </a:ln>
+        </p:spPr>
+        <p:txBody>
+          <a:bodyPr/>
+          <a:p/>
+        </p:txBody>
+      </p:sp>
+      <p:sp>
+        <p:nvSpPr>
+          <p:cNvPr id="7" name="Shape 4"/>
+          <p:cNvSpPr/>
+          <p:nvPr/>
+        </p:nvSpPr>
+        <p:spPr>
+          <a:xfrm>
+            <a:off x="704088" y="1938528"/>
+            <a:ext cx="475488" cy="475488"/>
+          </a:xfrm>
+          <a:prstGeom prst="ellipse">
+            <a:avLst/>
+          </a:prstGeom>
+          <a:solidFill>
+            <a:srgbClr val="0F8B85"/>
+          </a:solidFill>
+          <a:ln/>
+        </p:spPr>
+        <p:txBody>
+          <a:bodyPr/>
+          <a:p/>
+        </p:txBody>
+      </p:sp>
+      <p:pic>
+        <p:nvPicPr>
+          <p:cNvPr id="8" name="Image 1" descr="preencoded.png"/>
+          <p:cNvPicPr>
+            <a:picLocks noChangeAspect="1"/>
+          </p:cNvPicPr>
+          <p:nvPr/>
+        </p:nvPicPr>
+        <p:blipFill>
+          <a:blip r:embed="rId2"/>
+          <a:stretch>
+            <a:fillRect/>
+          </a:stretch>
+        </p:blipFill>
+        <p:spPr>
+          <a:xfrm>
+            <a:off x="827715" y="2062155"/>
+            <a:ext cx="228234" cy="228234"/>
+          </a:xfrm>
+          <a:prstGeom prst="rect">
+            <a:avLst/>
+          </a:prstGeom>
+        </p:spPr>
+      </p:pic>
+      <p:sp>
+        <p:nvSpPr>
+          <p:cNvPr id="9" name="Text 5"/>
+          <p:cNvSpPr/>
+          <p:nvPr/>
+        </p:nvSpPr>
+        <p:spPr>
+          <a:xfrm>
+            <a:off x="1298448" y="1901952"/>
+            <a:ext cx="4500220" cy="292608"/>
+          </a:xfrm>
+          <a:prstGeom prst="rect">
+            <a:avLst/>
+          </a:prstGeom>
+          <a:noFill/>
+          <a:ln/>
+        </p:spPr>
+        <p:txBody>
+          <a:bodyPr wrap="square" lIns="0" tIns="0" rIns="0" bIns="0" rtlCol="0" anchor="ctr"/>
+          <a:lstStyle/>
+          <a:p>
+            <a:pPr indent="0" marL="0">
+              <a:buNone/>
+            </a:pPr>
+            <a:r>
+              <a:rPr lang="en-US" sz="1400" b="1" dirty="0">
+                <a:solidFill>
+                  <a:srgbClr val="1C2A3E"/>
+                </a:solidFill>
+                <a:latin typeface="Calibri" pitchFamily="34" charset="0"/>
+                <a:ea typeface="Calibri" pitchFamily="34" charset="-122"/>
+                <a:cs typeface="Calibri" pitchFamily="34" charset="-120"/>
+              </a:rPr>
+              <a:t>Certificate</a:t>
+            </a:r>
+            <a:endParaRPr lang="en-US" sz="1400" dirty="0"/>
+          </a:p>
+        </p:txBody>
+      </p:sp>
+      <p:sp>
+        <p:nvSpPr>
+          <p:cNvPr id="10" name="Text 6"/>
+          <p:cNvSpPr/>
+          <p:nvPr/>
+        </p:nvSpPr>
+        <p:spPr>
+          <a:xfrm>
+            <a:off x="1298448" y="2176272"/>
+            <a:ext cx="4500220" cy="310896"/>
+          </a:xfrm>
+          <a:prstGeom prst="rect">
+            <a:avLst/>
+          </a:prstGeom>
+          <a:noFill/>
+          <a:ln/>
+        </p:spPr>
+        <p:txBody>
+          <a:bodyPr wrap="square" lIns="0" tIns="0" rIns="0" bIns="0" rtlCol="0" anchor="ctr"/>
+          <a:lstStyle/>
+          <a:p>
+            <a:pPr indent="0" marL="0">
+              <a:buNone/>
+            </a:pPr>
+            <a:r>
+              <a:rPr lang="en-US" sz="1080" dirty="0">
+                <a:solidFill>
+                  <a:srgbClr val="44586E"/>
+                </a:solidFill>
+                <a:latin typeface="Calibri" pitchFamily="34" charset="0"/>
+                <a:ea typeface="Calibri" pitchFamily="34" charset="-122"/>
+                <a:cs typeface="Calibri" pitchFamily="34" charset="-120"/>
+              </a:rPr>
+              <a:t>A signed digital ID card binding a server name to its public key.</a:t>
+            </a:r>
+            <a:endParaRPr lang="en-US" sz="1080" dirty="0"/>
+          </a:p>
+        </p:txBody>
+      </p:sp>
+      <p:sp>
+        <p:nvSpPr>
+          <p:cNvPr id="11" name="Shape 7"/>
+          <p:cNvSpPr/>
+          <p:nvPr/>
+        </p:nvSpPr>
+        <p:spPr>
+          <a:xfrm>
+            <a:off x="6255868" y="1810512"/>
+            <a:ext cx="5368900" cy="731520"/>
+          </a:xfrm>
+          <a:prstGeom prst="roundRect">
+            <a:avLst>
+              <a:gd name="adj" fmla="val 7500"/>
+            </a:avLst>
+          </a:prstGeom>
+          <a:solidFill>
+            <a:srgbClr val="F3F6FA"/>
+          </a:solidFill>
+          <a:ln w="12700">
+            <a:solidFill>
+              <a:srgbClr val="D8E0EA"/>
+            </a:solidFill>
+            <a:prstDash val="solid"/>
+          </a:ln>
+        </p:spPr>
+        <p:txBody>
+          <a:bodyPr/>
+          <a:p/>
+        </p:txBody>
+      </p:sp>
+      <p:sp>
+        <p:nvSpPr>
+          <p:cNvPr id="12" name="Shape 8"/>
+          <p:cNvSpPr/>
+          <p:nvPr/>
+        </p:nvSpPr>
+        <p:spPr>
+          <a:xfrm>
+            <a:off x="6393028" y="1938528"/>
+            <a:ext cx="475488" cy="475488"/>
+          </a:xfrm>
+          <a:prstGeom prst="ellipse">
+            <a:avLst/>
+          </a:prstGeom>
+          <a:solidFill>
+            <a:srgbClr val="0F8B85"/>
+          </a:solidFill>
+          <a:ln/>
+        </p:spPr>
+        <p:txBody>
+          <a:bodyPr/>
+          <a:p/>
+        </p:txBody>
+      </p:sp>
+      <p:pic>
+        <p:nvPicPr>
+          <p:cNvPr id="13" name="Image 2" descr="preencoded.png"/>
+          <p:cNvPicPr>
+            <a:picLocks noChangeAspect="1"/>
+          </p:cNvPicPr>
+          <p:nvPr/>
+        </p:nvPicPr>
+        <p:blipFill>
+          <a:blip r:embed="rId3"/>
+          <a:stretch>
+            <a:fillRect/>
+          </a:stretch>
+        </p:blipFill>
+        <p:spPr>
+          <a:xfrm>
+            <a:off x="6516654" y="2062155"/>
+            <a:ext cx="228234" cy="228234"/>
+          </a:xfrm>
+          <a:prstGeom prst="rect">
+            <a:avLst/>
+          </a:prstGeom>
+        </p:spPr>
+      </p:pic>
+      <p:sp>
+        <p:nvSpPr>
+          <p:cNvPr id="14" name="Text 9"/>
+          <p:cNvSpPr/>
+          <p:nvPr/>
+        </p:nvSpPr>
+        <p:spPr>
+          <a:xfrm>
+            <a:off x="6987388" y="1901952"/>
+            <a:ext cx="4500220" cy="292608"/>
+          </a:xfrm>
+          <a:prstGeom prst="rect">
+            <a:avLst/>
+          </a:prstGeom>
+          <a:noFill/>
+          <a:ln/>
+        </p:spPr>
+        <p:txBody>
+          <a:bodyPr wrap="square" lIns="0" tIns="0" rIns="0" bIns="0" rtlCol="0" anchor="ctr"/>
+          <a:lstStyle/>
+          <a:p>
+            <a:pPr indent="0" marL="0">
+              <a:buNone/>
+            </a:pPr>
+            <a:r>
+              <a:rPr lang="en-US" sz="1400" b="1" dirty="0">
+                <a:solidFill>
+                  <a:srgbClr val="1C2A3E"/>
+                </a:solidFill>
+                <a:latin typeface="Calibri" pitchFamily="34" charset="0"/>
+                <a:ea typeface="Calibri" pitchFamily="34" charset="-122"/>
+                <a:cs typeface="Calibri" pitchFamily="34" charset="-120"/>
+              </a:rPr>
+              <a:t>CA — Certificate Authority</a:t>
+            </a:r>
+            <a:endParaRPr lang="en-US" sz="1400" dirty="0"/>
+          </a:p>
+        </p:txBody>
+      </p:sp>
+      <p:sp>
+        <p:nvSpPr>
+          <p:cNvPr id="15" name="Text 10"/>
+          <p:cNvSpPr/>
+          <p:nvPr/>
+        </p:nvSpPr>
+        <p:spPr>
+          <a:xfrm>
+            <a:off x="6987388" y="2176272"/>
+            <a:ext cx="4500220" cy="310896"/>
+          </a:xfrm>
+          <a:prstGeom prst="rect">
+            <a:avLst/>
+          </a:prstGeom>
+          <a:noFill/>
+          <a:ln/>
+        </p:spPr>
+        <p:txBody>
+          <a:bodyPr wrap="square" lIns="0" tIns="0" rIns="0" bIns="0" rtlCol="0" anchor="ctr"/>
+          <a:lstStyle/>
+          <a:p>
+            <a:pPr indent="0" marL="0">
+              <a:buNone/>
+            </a:pPr>
+            <a:r>
+              <a:rPr lang="en-US" sz="1080" dirty="0">
+                <a:solidFill>
+                  <a:srgbClr val="44586E"/>
+                </a:solidFill>
+                <a:latin typeface="Calibri" pitchFamily="34" charset="0"/>
+                <a:ea typeface="Calibri" pitchFamily="34" charset="-122"/>
+                <a:cs typeface="Calibri" pitchFamily="34" charset="-120"/>
+              </a:rPr>
+              <a:t>The trusted issuer whose signature everyone accepts — here, our internal enterprise CA.</a:t>
+            </a:r>
+            <a:endParaRPr lang="en-US" sz="1080" dirty="0"/>
+          </a:p>
+        </p:txBody>
+      </p:sp>
+      <p:sp>
+        <p:nvSpPr>
+          <p:cNvPr id="16" name="Shape 11"/>
+          <p:cNvSpPr/>
+          <p:nvPr/>
+        </p:nvSpPr>
+        <p:spPr>
+          <a:xfrm>
+            <a:off x="566928" y="2651760"/>
+            <a:ext cx="5368900" cy="731520"/>
+          </a:xfrm>
+          <a:prstGeom prst="roundRect">
+            <a:avLst>
+              <a:gd name="adj" fmla="val 7500"/>
+            </a:avLst>
+          </a:prstGeom>
+          <a:solidFill>
+            <a:srgbClr val="F3F6FA"/>
+          </a:solidFill>
+          <a:ln w="12700">
+            <a:solidFill>
+              <a:srgbClr val="D8E0EA"/>
+            </a:solidFill>
+            <a:prstDash val="solid"/>
+          </a:ln>
+        </p:spPr>
+        <p:txBody>
+          <a:bodyPr/>
+          <a:p/>
+        </p:txBody>
+      </p:sp>
+      <p:sp>
+        <p:nvSpPr>
+          <p:cNvPr id="17" name="Shape 12"/>
+          <p:cNvSpPr/>
+          <p:nvPr/>
+        </p:nvSpPr>
+        <p:spPr>
+          <a:xfrm>
+            <a:off x="704088" y="2779776"/>
+            <a:ext cx="475488" cy="475488"/>
+          </a:xfrm>
+          <a:prstGeom prst="ellipse">
+            <a:avLst/>
+          </a:prstGeom>
+          <a:solidFill>
+            <a:srgbClr val="0F8B85"/>
+          </a:solidFill>
+          <a:ln/>
+        </p:spPr>
+        <p:txBody>
+          <a:bodyPr/>
+          <a:p/>
+        </p:txBody>
+      </p:sp>
+      <p:pic>
+        <p:nvPicPr>
+          <p:cNvPr id="18" name="Image 3" descr="preencoded.png"/>
+          <p:cNvPicPr>
+            <a:picLocks noChangeAspect="1"/>
+          </p:cNvPicPr>
+          <p:nvPr/>
+        </p:nvPicPr>
+        <p:blipFill>
+          <a:blip r:embed="rId4"/>
+          <a:stretch>
+            <a:fillRect/>
+          </a:stretch>
+        </p:blipFill>
+        <p:spPr>
+          <a:xfrm>
+            <a:off x="827715" y="2903403"/>
+            <a:ext cx="228234" cy="228234"/>
+          </a:xfrm>
+          <a:prstGeom prst="rect">
+            <a:avLst/>
+          </a:prstGeom>
+        </p:spPr>
+      </p:pic>
+      <p:sp>
+        <p:nvSpPr>
+          <p:cNvPr id="19" name="Text 13"/>
+          <p:cNvSpPr/>
+          <p:nvPr/>
+        </p:nvSpPr>
+        <p:spPr>
+          <a:xfrm>
+            <a:off x="1298448" y="2743200"/>
+            <a:ext cx="4500220" cy="292608"/>
+          </a:xfrm>
+          <a:prstGeom prst="rect">
+            <a:avLst/>
+          </a:prstGeom>
+          <a:noFill/>
+          <a:ln/>
+        </p:spPr>
+        <p:txBody>
+          <a:bodyPr wrap="square" lIns="0" tIns="0" rIns="0" bIns="0" rtlCol="0" anchor="ctr"/>
+          <a:lstStyle/>
+          <a:p>
+            <a:pPr indent="0" marL="0">
+              <a:buNone/>
+            </a:pPr>
+            <a:r>
+              <a:rPr lang="en-US" sz="1400" b="1" dirty="0">
+                <a:solidFill>
+                  <a:srgbClr val="1C2A3E"/>
+                </a:solidFill>
+                <a:latin typeface="Calibri" pitchFamily="34" charset="0"/>
+                <a:ea typeface="Calibri" pitchFamily="34" charset="-122"/>
+                <a:cs typeface="Calibri" pitchFamily="34" charset="-120"/>
+              </a:rPr>
+              <a:t>CSR</a:t>
+            </a:r>
+            <a:endParaRPr lang="en-US" sz="1400" dirty="0"/>
+          </a:p>
+        </p:txBody>
+      </p:sp>
+      <p:sp>
+        <p:nvSpPr>
+          <p:cNvPr id="20" name="Text 14"/>
+          <p:cNvSpPr/>
+          <p:nvPr/>
+        </p:nvSpPr>
+        <p:spPr>
+          <a:xfrm>
+            <a:off x="1298448" y="3017520"/>
+            <a:ext cx="4500220" cy="310896"/>
+          </a:xfrm>
+          <a:prstGeom prst="rect">
+            <a:avLst/>
+          </a:prstGeom>
+          <a:noFill/>
+          <a:ln/>
+        </p:spPr>
+        <p:txBody>
+          <a:bodyPr wrap="square" lIns="0" tIns="0" rIns="0" bIns="0" rtlCol="0" anchor="ctr"/>
+          <a:lstStyle/>
+          <a:p>
+            <a:pPr indent="0" marL="0">
+              <a:buNone/>
+            </a:pPr>
+            <a:r>
+              <a:rPr lang="en-US" sz="1080" dirty="0">
+                <a:solidFill>
+                  <a:srgbClr val="44586E"/>
+                </a:solidFill>
+                <a:latin typeface="Calibri" pitchFamily="34" charset="0"/>
+                <a:ea typeface="Calibri" pitchFamily="34" charset="-122"/>
+                <a:cs typeface="Calibri" pitchFamily="34" charset="-120"/>
+              </a:rPr>
+              <a:t>Certificate Signing Request — “please issue a certificate for this name.”</a:t>
+            </a:r>
+            <a:endParaRPr lang="en-US" sz="1080" dirty="0"/>
+          </a:p>
+        </p:txBody>
+      </p:sp>
+      <p:sp>
+        <p:nvSpPr>
+          <p:cNvPr id="21" name="Shape 15"/>
+          <p:cNvSpPr/>
+          <p:nvPr/>
+        </p:nvSpPr>
+        <p:spPr>
+          <a:xfrm>
+            <a:off x="6255868" y="2651760"/>
+            <a:ext cx="5368900" cy="731520"/>
+          </a:xfrm>
+          <a:prstGeom prst="roundRect">
+            <a:avLst>
+              <a:gd name="adj" fmla="val 7500"/>
+            </a:avLst>
+          </a:prstGeom>
+          <a:solidFill>
+            <a:srgbClr val="F3F6FA"/>
+          </a:solidFill>
+          <a:ln w="12700">
+            <a:solidFill>
+              <a:srgbClr val="D8E0EA"/>
+            </a:solidFill>
+            <a:prstDash val="solid"/>
+          </a:ln>
+        </p:spPr>
+        <p:txBody>
+          <a:bodyPr/>
+          <a:p/>
+        </p:txBody>
+      </p:sp>
+      <p:sp>
+        <p:nvSpPr>
+          <p:cNvPr id="22" name="Shape 16"/>
+          <p:cNvSpPr/>
+          <p:nvPr/>
+        </p:nvSpPr>
+        <p:spPr>
+          <a:xfrm>
+            <a:off x="6393028" y="2779776"/>
+            <a:ext cx="475488" cy="475488"/>
+          </a:xfrm>
+          <a:prstGeom prst="ellipse">
+            <a:avLst/>
+          </a:prstGeom>
+          <a:solidFill>
+            <a:srgbClr val="0F8B85"/>
+          </a:solidFill>
+          <a:ln/>
+        </p:spPr>
+        <p:txBody>
+          <a:bodyPr/>
+          <a:p/>
+        </p:txBody>
+      </p:sp>
+      <p:pic>
+        <p:nvPicPr>
+          <p:cNvPr id="23" name="Image 4" descr="preencoded.png"/>
+          <p:cNvPicPr>
+            <a:picLocks noChangeAspect="1"/>
+          </p:cNvPicPr>
+          <p:nvPr/>
+        </p:nvPicPr>
+        <p:blipFill>
+          <a:blip r:embed="rId5"/>
+          <a:stretch>
+            <a:fillRect/>
+          </a:stretch>
+        </p:blipFill>
+        <p:spPr>
+          <a:xfrm>
+            <a:off x="6516654" y="2903403"/>
+            <a:ext cx="228234" cy="228234"/>
+          </a:xfrm>
+          <a:prstGeom prst="rect">
+            <a:avLst/>
+          </a:prstGeom>
+        </p:spPr>
+      </p:pic>
+      <p:sp>
+        <p:nvSpPr>
+          <p:cNvPr id="24" name="Text 17"/>
+          <p:cNvSpPr/>
+          <p:nvPr/>
+        </p:nvSpPr>
+        <p:spPr>
+          <a:xfrm>
+            <a:off x="6987388" y="2743200"/>
+            <a:ext cx="4500220" cy="292608"/>
+          </a:xfrm>
+          <a:prstGeom prst="rect">
+            <a:avLst/>
+          </a:prstGeom>
+          <a:noFill/>
+          <a:ln/>
+        </p:spPr>
+        <p:txBody>
+          <a:bodyPr wrap="square" lIns="0" tIns="0" rIns="0" bIns="0" rtlCol="0" anchor="ctr"/>
+          <a:lstStyle/>
+          <a:p>
+            <a:pPr indent="0" marL="0">
+              <a:buNone/>
+            </a:pPr>
+            <a:r>
+              <a:rPr lang="en-US" sz="1400" b="1" dirty="0">
+                <a:solidFill>
+                  <a:srgbClr val="1C2A3E"/>
+                </a:solidFill>
+                <a:latin typeface="Calibri" pitchFamily="34" charset="0"/>
+                <a:ea typeface="Calibri" pitchFamily="34" charset="-122"/>
+                <a:cs typeface="Calibri" pitchFamily="34" charset="-120"/>
+              </a:rPr>
+              <a:t>Chain of trust</a:t>
+            </a:r>
+            <a:endParaRPr lang="en-US" sz="1400" dirty="0"/>
+          </a:p>
+        </p:txBody>
+      </p:sp>
+      <p:sp>
+        <p:nvSpPr>
+          <p:cNvPr id="25" name="Text 18"/>
+          <p:cNvSpPr/>
+          <p:nvPr/>
+        </p:nvSpPr>
+        <p:spPr>
+          <a:xfrm>
+            <a:off x="6987388" y="3017520"/>
+            <a:ext cx="4500220" cy="310896"/>
+          </a:xfrm>
+          <a:prstGeom prst="rect">
+            <a:avLst/>
+          </a:prstGeom>
+          <a:noFill/>
+          <a:ln/>
+        </p:spPr>
+        <p:txBody>
+          <a:bodyPr wrap="square" lIns="0" tIns="0" rIns="0" bIns="0" rtlCol="0" anchor="ctr"/>
+          <a:lstStyle/>
+          <a:p>
+            <a:pPr indent="0" marL="0">
+              <a:buNone/>
+            </a:pPr>
+            <a:r>
+              <a:rPr lang="en-US" sz="1080" dirty="0">
+                <a:solidFill>
+                  <a:srgbClr val="44586E"/>
+                </a:solidFill>
+                <a:latin typeface="Calibri" pitchFamily="34" charset="0"/>
+                <a:ea typeface="Calibri" pitchFamily="34" charset="-122"/>
+                <a:cs typeface="Calibri" pitchFamily="34" charset="-120"/>
+              </a:rPr>
+              <a:t>Server cert → intermediate → root; the client must hold the root.</a:t>
+            </a:r>
+            <a:endParaRPr lang="en-US" sz="1080" dirty="0"/>
+          </a:p>
+        </p:txBody>
+      </p:sp>
+      <p:sp>
+        <p:nvSpPr>
+          <p:cNvPr id="26" name="Shape 19"/>
+          <p:cNvSpPr/>
+          <p:nvPr/>
+        </p:nvSpPr>
+        <p:spPr>
+          <a:xfrm>
+            <a:off x="566928" y="3493008"/>
+            <a:ext cx="5368900" cy="731520"/>
+          </a:xfrm>
+          <a:prstGeom prst="roundRect">
+            <a:avLst>
+              <a:gd name="adj" fmla="val 7500"/>
+            </a:avLst>
+          </a:prstGeom>
+          <a:solidFill>
+            <a:srgbClr val="F3F6FA"/>
+          </a:solidFill>
+          <a:ln w="12700">
+            <a:solidFill>
+              <a:srgbClr val="D8E0EA"/>
+            </a:solidFill>
+            <a:prstDash val="solid"/>
+          </a:ln>
+        </p:spPr>
+        <p:txBody>
+          <a:bodyPr/>
+          <a:p/>
+        </p:txBody>
+      </p:sp>
+      <p:sp>
+        <p:nvSpPr>
+          <p:cNvPr id="27" name="Shape 20"/>
+          <p:cNvSpPr/>
+          <p:nvPr/>
+        </p:nvSpPr>
+        <p:spPr>
+          <a:xfrm>
+            <a:off x="704088" y="3621024"/>
+            <a:ext cx="475488" cy="475488"/>
+          </a:xfrm>
+          <a:prstGeom prst="ellipse">
+            <a:avLst/>
+          </a:prstGeom>
+          <a:solidFill>
+            <a:srgbClr val="0F8B85"/>
+          </a:solidFill>
+          <a:ln/>
+        </p:spPr>
+        <p:txBody>
+          <a:bodyPr/>
+          <a:p/>
+        </p:txBody>
+      </p:sp>
+      <p:pic>
+        <p:nvPicPr>
+          <p:cNvPr id="28" name="Image 5" descr="preencoded.png"/>
+          <p:cNvPicPr>
+            <a:picLocks noChangeAspect="1"/>
+          </p:cNvPicPr>
+          <p:nvPr/>
+        </p:nvPicPr>
+        <p:blipFill>
+          <a:blip r:embed="rId6"/>
+          <a:stretch>
+            <a:fillRect/>
+          </a:stretch>
+        </p:blipFill>
+        <p:spPr>
+          <a:xfrm>
+            <a:off x="827715" y="3744651"/>
+            <a:ext cx="228234" cy="228234"/>
+          </a:xfrm>
+          <a:prstGeom prst="rect">
+            <a:avLst/>
+          </a:prstGeom>
+        </p:spPr>
+      </p:pic>
+      <p:sp>
+        <p:nvSpPr>
+          <p:cNvPr id="29" name="Text 21"/>
+          <p:cNvSpPr/>
+          <p:nvPr/>
+        </p:nvSpPr>
+        <p:spPr>
+          <a:xfrm>
+            <a:off x="1298448" y="3584448"/>
+            <a:ext cx="4500220" cy="292608"/>
+          </a:xfrm>
+          <a:prstGeom prst="rect">
+            <a:avLst/>
+          </a:prstGeom>
+          <a:noFill/>
+          <a:ln/>
+        </p:spPr>
+        <p:txBody>
+          <a:bodyPr wrap="square" lIns="0" tIns="0" rIns="0" bIns="0" rtlCol="0" anchor="ctr"/>
+          <a:lstStyle/>
+          <a:p>
+            <a:pPr indent="0" marL="0">
+              <a:buNone/>
+            </a:pPr>
+            <a:r>
+              <a:rPr lang="en-US" sz="1400" b="1" dirty="0">
+                <a:solidFill>
+                  <a:srgbClr val="1C2A3E"/>
+                </a:solidFill>
+                <a:latin typeface="Calibri" pitchFamily="34" charset="0"/>
+                <a:ea typeface="Calibri" pitchFamily="34" charset="-122"/>
+                <a:cs typeface="Calibri" pitchFamily="34" charset="-120"/>
+              </a:rPr>
+              <a:t>CN / SAN</a:t>
+            </a:r>
+            <a:endParaRPr lang="en-US" sz="1400" dirty="0"/>
+          </a:p>
+        </p:txBody>
+      </p:sp>
+      <p:sp>
+        <p:nvSpPr>
+          <p:cNvPr id="30" name="Text 22"/>
+          <p:cNvSpPr/>
+          <p:nvPr/>
+        </p:nvSpPr>
+        <p:spPr>
+          <a:xfrm>
+            <a:off x="1298448" y="3858768"/>
+            <a:ext cx="4500220" cy="310896"/>
+          </a:xfrm>
+          <a:prstGeom prst="rect">
+            <a:avLst/>
+          </a:prstGeom>
+          <a:noFill/>
+          <a:ln/>
+        </p:spPr>
+        <p:txBody>
+          <a:bodyPr wrap="square" lIns="0" tIns="0" rIns="0" bIns="0" rtlCol="0" anchor="ctr"/>
+          <a:lstStyle/>
+          <a:p>
+            <a:pPr indent="0" marL="0">
+              <a:buNone/>
+            </a:pPr>
+            <a:r>
+              <a:rPr lang="en-US" sz="1080" dirty="0">
+                <a:solidFill>
+                  <a:srgbClr val="44586E"/>
+                </a:solidFill>
+                <a:latin typeface="Calibri" pitchFamily="34" charset="0"/>
+                <a:ea typeface="Calibri" pitchFamily="34" charset="-122"/>
+                <a:cs typeface="Calibri" pitchFamily="34" charset="-120"/>
+              </a:rPr>
+              <a:t>The names inside the cert — must match what clients connect to, hence FQDN.</a:t>
+            </a:r>
+            <a:endParaRPr lang="en-US" sz="1080" dirty="0"/>
+          </a:p>
+        </p:txBody>
+      </p:sp>
+      <p:sp>
+        <p:nvSpPr>
+          <p:cNvPr id="31" name="Shape 23"/>
+          <p:cNvSpPr/>
+          <p:nvPr/>
+        </p:nvSpPr>
+        <p:spPr>
+          <a:xfrm>
+            <a:off x="6255868" y="3493008"/>
+            <a:ext cx="5368900" cy="731520"/>
+          </a:xfrm>
+          <a:prstGeom prst="roundRect">
+            <a:avLst>
+              <a:gd name="adj" fmla="val 7500"/>
+            </a:avLst>
+          </a:prstGeom>
+          <a:solidFill>
+            <a:srgbClr val="F3F6FA"/>
+          </a:solidFill>
+          <a:ln w="12700">
+            <a:solidFill>
+              <a:srgbClr val="D8E0EA"/>
+            </a:solidFill>
+            <a:prstDash val="solid"/>
+          </a:ln>
+        </p:spPr>
+        <p:txBody>
+          <a:bodyPr/>
+          <a:p/>
+        </p:txBody>
+      </p:sp>
+      <p:sp>
+        <p:nvSpPr>
+          <p:cNvPr id="32" name="Shape 24"/>
+          <p:cNvSpPr/>
+          <p:nvPr/>
+        </p:nvSpPr>
+        <p:spPr>
+          <a:xfrm>
+            <a:off x="6393028" y="3621024"/>
+            <a:ext cx="475488" cy="475488"/>
+          </a:xfrm>
+          <a:prstGeom prst="ellipse">
+            <a:avLst/>
+          </a:prstGeom>
+          <a:solidFill>
+            <a:srgbClr val="0F8B85"/>
+          </a:solidFill>
+          <a:ln/>
+        </p:spPr>
+        <p:txBody>
+          <a:bodyPr/>
+          <a:p/>
+        </p:txBody>
+      </p:sp>
+      <p:pic>
+        <p:nvPicPr>
+          <p:cNvPr id="33" name="Image 6" descr="preencoded.png"/>
+          <p:cNvPicPr>
+            <a:picLocks noChangeAspect="1"/>
+          </p:cNvPicPr>
+          <p:nvPr/>
+        </p:nvPicPr>
+        <p:blipFill>
+          <a:blip r:embed="rId7"/>
+          <a:stretch>
+            <a:fillRect/>
+          </a:stretch>
+        </p:blipFill>
+        <p:spPr>
+          <a:xfrm>
+            <a:off x="6516654" y="3744651"/>
+            <a:ext cx="228234" cy="228234"/>
+          </a:xfrm>
+          <a:prstGeom prst="rect">
+            <a:avLst/>
+          </a:prstGeom>
+        </p:spPr>
+      </p:pic>
+      <p:sp>
+        <p:nvSpPr>
+          <p:cNvPr id="34" name="Text 25"/>
+          <p:cNvSpPr/>
+          <p:nvPr/>
+        </p:nvSpPr>
+        <p:spPr>
+          <a:xfrm>
+            <a:off x="6987388" y="3584448"/>
+            <a:ext cx="4500220" cy="292608"/>
+          </a:xfrm>
+          <a:prstGeom prst="rect">
+            <a:avLst/>
+          </a:prstGeom>
+          <a:noFill/>
+          <a:ln/>
+        </p:spPr>
+        <p:txBody>
+          <a:bodyPr wrap="square" lIns="0" tIns="0" rIns="0" bIns="0" rtlCol="0" anchor="ctr"/>
+          <a:lstStyle/>
+          <a:p>
+            <a:pPr indent="0" marL="0">
+              <a:buNone/>
+            </a:pPr>
+            <a:r>
+              <a:rPr lang="en-US" sz="1400" b="1" dirty="0">
+                <a:solidFill>
+                  <a:srgbClr val="1C2A3E"/>
+                </a:solidFill>
+                <a:latin typeface="Calibri" pitchFamily="34" charset="0"/>
+                <a:ea typeface="Calibri" pitchFamily="34" charset="-122"/>
+                <a:cs typeface="Calibri" pitchFamily="34" charset="-120"/>
+              </a:rPr>
+              <a:t>Cipher suite</a:t>
+            </a:r>
+            <a:endParaRPr lang="en-US" sz="1400" dirty="0"/>
+          </a:p>
+        </p:txBody>
+      </p:sp>
+      <p:sp>
+        <p:nvSpPr>
+          <p:cNvPr id="35" name="Text 26"/>
+          <p:cNvSpPr/>
+          <p:nvPr/>
+        </p:nvSpPr>
+        <p:spPr>
+          <a:xfrm>
+            <a:off x="6987388" y="3858768"/>
+            <a:ext cx="4500220" cy="310896"/>
+          </a:xfrm>
+          <a:prstGeom prst="rect">
+            <a:avLst/>
+          </a:prstGeom>
+          <a:noFill/>
+          <a:ln/>
+        </p:spPr>
+        <p:txBody>
+          <a:bodyPr wrap="square" lIns="0" tIns="0" rIns="0" bIns="0" rtlCol="0" anchor="ctr"/>
+          <a:lstStyle/>
+          <a:p>
+            <a:pPr indent="0" marL="0">
+              <a:buNone/>
+            </a:pPr>
+            <a:r>
+              <a:rPr lang="en-US" sz="1080" dirty="0">
+                <a:solidFill>
+                  <a:srgbClr val="44586E"/>
+                </a:solidFill>
+                <a:latin typeface="Calibri" pitchFamily="34" charset="0"/>
+                <a:ea typeface="Calibri" pitchFamily="34" charset="-122"/>
+                <a:cs typeface="Calibri" pitchFamily="34" charset="-120"/>
+              </a:rPr>
+              <a:t>The negotiated set of algorithms both sides agree to use.</a:t>
+            </a:r>
+            <a:endParaRPr lang="en-US" sz="1080" dirty="0"/>
+          </a:p>
+        </p:txBody>
+      </p:sp>
+      <p:sp>
+        <p:nvSpPr>
+          <p:cNvPr id="36" name="Shape 27"/>
+          <p:cNvSpPr/>
+          <p:nvPr/>
+        </p:nvSpPr>
+        <p:spPr>
+          <a:xfrm>
+            <a:off x="566928" y="4334256"/>
+            <a:ext cx="5368900" cy="731520"/>
+          </a:xfrm>
+          <a:prstGeom prst="roundRect">
+            <a:avLst>
+              <a:gd name="adj" fmla="val 7500"/>
+            </a:avLst>
+          </a:prstGeom>
+          <a:solidFill>
+            <a:srgbClr val="F3F6FA"/>
+          </a:solidFill>
+          <a:ln w="12700">
+            <a:solidFill>
+              <a:srgbClr val="D8E0EA"/>
+            </a:solidFill>
+            <a:prstDash val="solid"/>
+          </a:ln>
+        </p:spPr>
+        <p:txBody>
+          <a:bodyPr/>
+          <a:p/>
+        </p:txBody>
+      </p:sp>
+      <p:sp>
+        <p:nvSpPr>
+          <p:cNvPr id="37" name="Shape 28"/>
+          <p:cNvSpPr/>
+          <p:nvPr/>
+        </p:nvSpPr>
+        <p:spPr>
+          <a:xfrm>
+            <a:off x="704088" y="4462272"/>
+            <a:ext cx="475488" cy="475488"/>
+          </a:xfrm>
+          <a:prstGeom prst="ellipse">
+            <a:avLst/>
+          </a:prstGeom>
+          <a:solidFill>
+            <a:srgbClr val="0F8B85"/>
+          </a:solidFill>
+          <a:ln/>
+        </p:spPr>
+        <p:txBody>
+          <a:bodyPr/>
+          <a:p/>
+        </p:txBody>
+      </p:sp>
+      <p:pic>
+        <p:nvPicPr>
+          <p:cNvPr id="38" name="Image 7" descr="preencoded.png"/>
+          <p:cNvPicPr>
+            <a:picLocks noChangeAspect="1"/>
+          </p:cNvPicPr>
+          <p:nvPr/>
+        </p:nvPicPr>
+        <p:blipFill>
+          <a:blip r:embed="rId8"/>
+          <a:stretch>
+            <a:fillRect/>
+          </a:stretch>
+        </p:blipFill>
+        <p:spPr>
+          <a:xfrm>
+            <a:off x="827715" y="4585899"/>
+            <a:ext cx="228234" cy="228234"/>
+          </a:xfrm>
+          <a:prstGeom prst="rect">
+            <a:avLst/>
+          </a:prstGeom>
+        </p:spPr>
+      </p:pic>
+      <p:sp>
+        <p:nvSpPr>
+          <p:cNvPr id="39" name="Text 29"/>
+          <p:cNvSpPr/>
+          <p:nvPr/>
+        </p:nvSpPr>
+        <p:spPr>
+          <a:xfrm>
+            <a:off x="1298448" y="4425696"/>
+            <a:ext cx="4500220" cy="292608"/>
+          </a:xfrm>
+          <a:prstGeom prst="rect">
+            <a:avLst/>
+          </a:prstGeom>
+          <a:noFill/>
+          <a:ln/>
+        </p:spPr>
+        <p:txBody>
+          <a:bodyPr wrap="square" lIns="0" tIns="0" rIns="0" bIns="0" rtlCol="0" anchor="ctr"/>
+          <a:lstStyle/>
+          <a:p>
+            <a:pPr indent="0" marL="0">
+              <a:buNone/>
+            </a:pPr>
+            <a:r>
+              <a:rPr lang="en-US" sz="1400" b="1" dirty="0">
+                <a:solidFill>
+                  <a:srgbClr val="1C2A3E"/>
+                </a:solidFill>
+                <a:latin typeface="Calibri" pitchFamily="34" charset="0"/>
+                <a:ea typeface="Calibri" pitchFamily="34" charset="-122"/>
+                <a:cs typeface="Calibri" pitchFamily="34" charset="-120"/>
+              </a:rPr>
+              <a:t>One-way vs mutual TLS</a:t>
+            </a:r>
+            <a:endParaRPr lang="en-US" sz="1400" dirty="0"/>
+          </a:p>
+        </p:txBody>
+      </p:sp>
+      <p:sp>
+        <p:nvSpPr>
+          <p:cNvPr id="40" name="Text 30"/>
+          <p:cNvSpPr/>
+          <p:nvPr/>
+        </p:nvSpPr>
+        <p:spPr>
+          <a:xfrm>
+            <a:off x="1298448" y="4700016"/>
+            <a:ext cx="4500220" cy="310896"/>
+          </a:xfrm>
+          <a:prstGeom prst="rect">
+            <a:avLst/>
+          </a:prstGeom>
+          <a:noFill/>
+          <a:ln/>
+        </p:spPr>
+        <p:txBody>
+          <a:bodyPr wrap="square" lIns="0" tIns="0" rIns="0" bIns="0" rtlCol="0" anchor="ctr"/>
+          <a:lstStyle/>
+          <a:p>
+            <a:pPr indent="0" marL="0">
+              <a:buNone/>
+            </a:pPr>
+            <a:r>
+              <a:rPr lang="en-US" sz="1080" dirty="0">
+                <a:solidFill>
+                  <a:srgbClr val="44586E"/>
+                </a:solidFill>
+                <a:latin typeface="Calibri" pitchFamily="34" charset="0"/>
+                <a:ea typeface="Calibri" pitchFamily="34" charset="-122"/>
+                <a:cs typeface="Calibri" pitchFamily="34" charset="-120"/>
+              </a:rPr>
+              <a:t>Only the server proves identity (mTLS = both sides) — we use one-way.</a:t>
+            </a:r>
+            <a:endParaRPr lang="en-US" sz="1080" dirty="0"/>
+          </a:p>
+        </p:txBody>
+      </p:sp>
+      <p:sp>
+        <p:nvSpPr>
+          <p:cNvPr id="41" name="Shape 31"/>
+          <p:cNvSpPr/>
+          <p:nvPr/>
+        </p:nvSpPr>
+        <p:spPr>
+          <a:xfrm>
+            <a:off x="6255868" y="4334256"/>
+            <a:ext cx="5368900" cy="731520"/>
+          </a:xfrm>
+          <a:prstGeom prst="roundRect">
+            <a:avLst>
+              <a:gd name="adj" fmla="val 7500"/>
+            </a:avLst>
+          </a:prstGeom>
+          <a:solidFill>
+            <a:srgbClr val="F3F6FA"/>
+          </a:solidFill>
+          <a:ln w="12700">
+            <a:solidFill>
+              <a:srgbClr val="D8E0EA"/>
+            </a:solidFill>
+            <a:prstDash val="solid"/>
+          </a:ln>
+        </p:spPr>
+        <p:txBody>
+          <a:bodyPr/>
+          <a:p/>
+        </p:txBody>
+      </p:sp>
+      <p:sp>
+        <p:nvSpPr>
+          <p:cNvPr id="42" name="Shape 32"/>
+          <p:cNvSpPr/>
+          <p:nvPr/>
+        </p:nvSpPr>
+        <p:spPr>
+          <a:xfrm>
+            <a:off x="6393028" y="4462272"/>
+            <a:ext cx="475488" cy="475488"/>
+          </a:xfrm>
+          <a:prstGeom prst="ellipse">
+            <a:avLst/>
+          </a:prstGeom>
+          <a:solidFill>
+            <a:srgbClr val="0F8B85"/>
+          </a:solidFill>
+          <a:ln/>
+        </p:spPr>
+        <p:txBody>
+          <a:bodyPr/>
+          <a:p/>
+        </p:txBody>
+      </p:sp>
+      <p:pic>
+        <p:nvPicPr>
+          <p:cNvPr id="43" name="Image 8" descr="preencoded.png"/>
+          <p:cNvPicPr>
+            <a:picLocks noChangeAspect="1"/>
+          </p:cNvPicPr>
+          <p:nvPr/>
+        </p:nvPicPr>
+        <p:blipFill>
+          <a:blip r:embed="rId9"/>
+          <a:stretch>
+            <a:fillRect/>
+          </a:stretch>
+        </p:blipFill>
+        <p:spPr>
+          <a:xfrm>
+            <a:off x="6516654" y="4585899"/>
+            <a:ext cx="228234" cy="228234"/>
+          </a:xfrm>
+          <a:prstGeom prst="rect">
+            <a:avLst/>
+          </a:prstGeom>
+        </p:spPr>
+      </p:pic>
+      <p:sp>
+        <p:nvSpPr>
+          <p:cNvPr id="44" name="Text 33"/>
+          <p:cNvSpPr/>
+          <p:nvPr/>
+        </p:nvSpPr>
+        <p:spPr>
+          <a:xfrm>
+            <a:off x="6987388" y="4425696"/>
+            <a:ext cx="4500220" cy="292608"/>
+          </a:xfrm>
+          <a:prstGeom prst="rect">
+            <a:avLst/>
+          </a:prstGeom>
+          <a:noFill/>
+          <a:ln/>
+        </p:spPr>
+        <p:txBody>
+          <a:bodyPr wrap="square" lIns="0" tIns="0" rIns="0" bIns="0" rtlCol="0" anchor="ctr"/>
+          <a:lstStyle/>
+          <a:p>
+            <a:pPr indent="0" marL="0">
+              <a:buNone/>
+            </a:pPr>
+            <a:r>
+              <a:rPr lang="en-US" sz="1400" b="1" dirty="0">
+                <a:solidFill>
+                  <a:srgbClr val="1C2A3E"/>
+                </a:solidFill>
+                <a:latin typeface="Calibri" pitchFamily="34" charset="0"/>
+                <a:ea typeface="Calibri" pitchFamily="34" charset="-122"/>
+                <a:cs typeface="Calibri" pitchFamily="34" charset="-120"/>
+              </a:rPr>
+              <a:t>Oracle wallet</a:t>
+            </a:r>
+            <a:endParaRPr lang="en-US" sz="1400" dirty="0"/>
+          </a:p>
+        </p:txBody>
+      </p:sp>
+      <p:sp>
+        <p:nvSpPr>
+          <p:cNvPr id="45" name="Text 34"/>
+          <p:cNvSpPr/>
+          <p:nvPr/>
+        </p:nvSpPr>
+        <p:spPr>
+          <a:xfrm>
+            <a:off x="6987388" y="4700016"/>
+            <a:ext cx="4500220" cy="310896"/>
+          </a:xfrm>
+          <a:prstGeom prst="rect">
+            <a:avLst/>
+          </a:prstGeom>
+          <a:noFill/>
+          <a:ln/>
+        </p:spPr>
+        <p:txBody>
+          <a:bodyPr wrap="square" lIns="0" tIns="0" rIns="0" bIns="0" rtlCol="0" anchor="ctr"/>
+          <a:lstStyle/>
+          <a:p>
+            <a:pPr indent="0" marL="0">
+              <a:buNone/>
+            </a:pPr>
+            <a:r>
+              <a:rPr lang="en-US" sz="1080" dirty="0">
+                <a:solidFill>
+                  <a:srgbClr val="44586E"/>
+                </a:solidFill>
+                <a:latin typeface="Calibri" pitchFamily="34" charset="0"/>
+                <a:ea typeface="Calibri" pitchFamily="34" charset="-122"/>
+                <a:cs typeface="Calibri" pitchFamily="34" charset="-120"/>
+              </a:rPr>
+              <a:t>A password-protected directory of keys and certs; cwallet.sso is the auto-login copy.</a:t>
+            </a:r>
+            <a:endParaRPr lang="en-US" sz="1080" dirty="0"/>
+          </a:p>
+        </p:txBody>
+      </p:sp>
+      <p:sp>
+        <p:nvSpPr>
+          <p:cNvPr id="46" name="Shape 35"/>
+          <p:cNvSpPr/>
+          <p:nvPr/>
+        </p:nvSpPr>
+        <p:spPr>
+          <a:xfrm>
+            <a:off x="566928" y="5349240"/>
+            <a:ext cx="11057839" cy="914400"/>
+          </a:xfrm>
+          <a:prstGeom prst="roundRect">
+            <a:avLst>
+              <a:gd name="adj" fmla="val 8000"/>
+            </a:avLst>
+          </a:prstGeom>
+          <a:solidFill>
+            <a:srgbClr val="12223F"/>
+          </a:solidFill>
+          <a:ln w="12700">
+            <a:solidFill>
+              <a:srgbClr val="D8E0EA"/>
+            </a:solidFill>
+            <a:prstDash val="solid"/>
+          </a:ln>
+          <a:effectLst>
+            <a:outerShdw sx="100000" sy="100000" kx="0" ky="0" algn="bl" rotWithShape="0" blurRad="88900" dist="38100" dir="5400000">
+              <a:srgbClr val="1C2A3E">
+                <a:alpha val="13000"/>
+              </a:srgbClr>
+            </a:outerShdw>
+          </a:effectLst>
+        </p:spPr>
+        <p:txBody>
+          <a:bodyPr/>
+          <a:p/>
+        </p:txBody>
+      </p:sp>
+      <p:sp>
+        <p:nvSpPr>
+          <p:cNvPr id="47" name="Text 36"/>
+          <p:cNvSpPr/>
+          <p:nvPr/>
+        </p:nvSpPr>
+        <p:spPr>
+          <a:xfrm>
+            <a:off x="841248" y="5468112"/>
+            <a:ext cx="1371600" cy="274320"/>
+          </a:xfrm>
+          <a:prstGeom prst="rect">
+            <a:avLst/>
+          </a:prstGeom>
+          <a:noFill/>
+          <a:ln/>
+        </p:spPr>
+        <p:txBody>
+          <a:bodyPr wrap="square" lIns="0" tIns="0" rIns="0" bIns="0" rtlCol="0" anchor="ctr"/>
+          <a:lstStyle/>
+          <a:p>
+            <a:pPr indent="0" marL="0">
+              <a:buNone/>
+            </a:pPr>
+            <a:r>
+              <a:rPr lang="en-US" sz="1200" b="1" spc="200" kern="0" dirty="0">
+                <a:solidFill>
+                  <a:srgbClr val="0F8B85"/>
+                </a:solidFill>
+                <a:latin typeface="Calibri" pitchFamily="34" charset="0"/>
+                <a:ea typeface="Calibri" pitchFamily="34" charset="-122"/>
+                <a:cs typeface="Calibri" pitchFamily="34" charset="-120"/>
+              </a:rPr>
+              <a:t>GOOD TO KNOW</a:t>
+            </a:r>
+            <a:endParaRPr lang="en-US" sz="1200" dirty="0"/>
+          </a:p>
+        </p:txBody>
+      </p:sp>
+      <p:sp>
+        <p:nvSpPr>
+          <p:cNvPr id="48" name="Text 37"/>
+          <p:cNvSpPr/>
+          <p:nvPr/>
+        </p:nvSpPr>
+        <p:spPr>
+          <a:xfrm>
+            <a:off x="841248" y="5760720"/>
+            <a:ext cx="10509199" cy="411480"/>
+          </a:xfrm>
+          <a:prstGeom prst="rect">
+            <a:avLst/>
+          </a:prstGeom>
+          <a:noFill/>
+          <a:ln/>
+        </p:spPr>
+        <p:txBody>
+          <a:bodyPr wrap="square" lIns="0" tIns="0" rIns="0" bIns="0" rtlCol="0" anchor="ctr"/>
+          <a:lstStyle/>
+          <a:p>
+            <a:pPr indent="0" marL="0">
+              <a:buNone/>
+            </a:pPr>
+            <a:r>
+              <a:rPr lang="en-US" sz="1250" b="1" dirty="0">
+                <a:solidFill>
+                  <a:srgbClr val="FFFFFF"/>
+                </a:solidFill>
+                <a:latin typeface="Calibri" pitchFamily="34" charset="0"/>
+                <a:ea typeface="Calibri" pitchFamily="34" charset="-122"/>
+                <a:cs typeface="Calibri" pitchFamily="34" charset="-120"/>
+              </a:rPr>
+              <a:t xml:space="preserve">These are standard PKI terms — </a:t>
+            </a:r>
+            <a:pPr indent="0" marL="0">
+              <a:buNone/>
+            </a:pPr>
+            <a:r>
+              <a:rPr lang="en-US" sz="1250" dirty="0">
+                <a:solidFill>
+                  <a:srgbClr val="C7D2E0"/>
+                </a:solidFill>
+                <a:latin typeface="Calibri" pitchFamily="34" charset="0"/>
+                <a:ea typeface="Calibri" pitchFamily="34" charset="-122"/>
+                <a:cs typeface="Calibri" pitchFamily="34" charset="-120"/>
+              </a:rPr>
+              <a:t>the same building blocks behind every HTTPS certificate, not Oracle inventions.</a:t>
+            </a:r>
+            <a:endParaRPr lang="en-US" sz="1250" dirty="0"/>
+          </a:p>
+        </p:txBody>
+      </p:sp>
+    </p:spTree>
+  </p:cSld>
+  <p:clrMapOvr>
+    <a:masterClrMapping/>
+  </p:clrMapOvr>
+</p:sld>
+</file>
+
+<file path=ppt/slides/slide27.xml><?xml version="1.0" encoding="utf-8"?>
+<p:sld xmlns:a="http://schemas.openxmlformats.org/drawingml/2006/main" xmlns:r="http://schemas.openxmlformats.org/officeDocument/2006/relationships" xmlns:p="http://schemas.openxmlformats.org/presentationml/2006/main">
+  <p:cSld name="Slide 6">
+    <p:bg>
+      <p:bgPr>
+        <a:solidFill>
+          <a:srgbClr val="FFFFFF"/>
+        </a:solidFill>
+      </p:bgPr>
+    </p:bg>
+    <p:spTree>
+      <p:nvGrpSpPr>
+        <p:cNvPr id="1" name=""/>
+        <p:cNvGrpSpPr/>
+        <p:nvPr/>
+      </p:nvGrpSpPr>
+      <p:grpSpPr>
+        <a:xfrm>
+          <a:off x="0" y="0"/>
+          <a:ext cx="0" cy="0"/>
+          <a:chOff x="0" y="0"/>
+          <a:chExt cx="0" cy="0"/>
+        </a:xfrm>
+      </p:grpSpPr>
+      <p:sp>
+        <p:nvSpPr>
+          <p:cNvPr id="2" name="Shape 0"/>
+          <p:cNvSpPr/>
+          <p:nvPr/>
+        </p:nvSpPr>
+        <p:spPr>
+          <a:xfrm>
+            <a:off x="566928" y="457200"/>
+            <a:ext cx="566928" cy="566928"/>
+          </a:xfrm>
+          <a:prstGeom prst="ellipse">
+            <a:avLst/>
+          </a:prstGeom>
+          <a:solidFill>
+            <a:srgbClr val="0F8B85"/>
+          </a:solidFill>
+          <a:ln/>
+        </p:spPr>
+        <p:txBody>
+          <a:bodyPr/>
+          <a:p/>
+        </p:txBody>
+      </p:sp>
+      <p:pic>
+        <p:nvPicPr>
+          <p:cNvPr id="3" name="Image 0" descr="preencoded.png"/>
+          <p:cNvPicPr>
+            <a:picLocks noChangeAspect="1"/>
+          </p:cNvPicPr>
+          <p:nvPr/>
+        </p:nvPicPr>
+        <p:blipFill>
+          <a:blip r:embed="rId1"/>
+          <a:stretch>
+            <a:fillRect/>
+          </a:stretch>
+        </p:blipFill>
+        <p:spPr>
+          <a:xfrm>
+            <a:off x="714329" y="604601"/>
+            <a:ext cx="272125" cy="272125"/>
+          </a:xfrm>
+          <a:prstGeom prst="rect">
+            <a:avLst/>
+          </a:prstGeom>
+        </p:spPr>
+      </p:pic>
+      <p:sp>
+        <p:nvSpPr>
+          <p:cNvPr id="4" name="Text 1"/>
+          <p:cNvSpPr/>
+          <p:nvPr/>
+        </p:nvSpPr>
+        <p:spPr>
+          <a:xfrm>
+            <a:off x="1298448" y="457200"/>
+            <a:ext cx="10326319" cy="274320"/>
+          </a:xfrm>
+          <a:prstGeom prst="rect">
+            <a:avLst/>
+          </a:prstGeom>
+          <a:noFill/>
+          <a:ln/>
+        </p:spPr>
+        <p:txBody>
+          <a:bodyPr wrap="square" lIns="0" tIns="0" rIns="0" bIns="0" rtlCol="0" anchor="ctr"/>
+          <a:lstStyle/>
+          <a:p>
+            <a:pPr algn="l" indent="0" marL="0">
+              <a:buNone/>
+            </a:pPr>
+            <a:r>
+              <a:rPr lang="en-US" sz="1250" b="1" spc="200" kern="0" dirty="0">
+                <a:solidFill>
+                  <a:srgbClr val="0F8B85"/>
+                </a:solidFill>
+                <a:latin typeface="Calibri" pitchFamily="34" charset="0"/>
+                <a:ea typeface="Calibri" pitchFamily="34" charset="-122"/>
+                <a:cs typeface="Calibri" pitchFamily="34" charset="-120"/>
+              </a:rPr>
+              <a:t>FOUNDATIONS — FOR THOSE NEW TO THE TOPIC</a:t>
+            </a:r>
+            <a:endParaRPr lang="en-US" sz="1250" dirty="0"/>
+          </a:p>
+        </p:txBody>
+      </p:sp>
+      <p:sp>
+        <p:nvSpPr>
+          <p:cNvPr id="5" name="Text 2"/>
+          <p:cNvSpPr/>
+          <p:nvPr/>
+        </p:nvSpPr>
+        <p:spPr>
+          <a:xfrm>
+            <a:off x="1298448" y="731520"/>
+            <a:ext cx="10326319" cy="566928"/>
+          </a:xfrm>
+          <a:prstGeom prst="rect">
+            <a:avLst/>
+          </a:prstGeom>
+          <a:noFill/>
+          <a:ln/>
+        </p:spPr>
+        <p:txBody>
+          <a:bodyPr wrap="square" lIns="0" tIns="0" rIns="0" bIns="0" rtlCol="0" anchor="ctr"/>
+          <a:lstStyle/>
+          <a:p>
+            <a:pPr algn="l" indent="0" marL="0">
+              <a:buNone/>
+            </a:pPr>
+            <a:r>
+              <a:rPr lang="en-US" sz="2700" b="1" dirty="0">
+                <a:solidFill>
+                  <a:srgbClr val="1C2A3E"/>
+                </a:solidFill>
+                <a:latin typeface="Cambria" pitchFamily="34" charset="0"/>
+                <a:ea typeface="Cambria" pitchFamily="34" charset="-122"/>
+                <a:cs typeface="Cambria" pitchFamily="34" charset="-120"/>
+              </a:rPr>
+              <a:t>Encryption at rest in five minutes</a:t>
+            </a:r>
+            <a:endParaRPr lang="en-US" sz="2700" dirty="0"/>
+          </a:p>
+        </p:txBody>
+      </p:sp>
+      <p:sp>
+        <p:nvSpPr>
+          <p:cNvPr id="6" name="Shape 3"/>
+          <p:cNvSpPr/>
+          <p:nvPr/>
+        </p:nvSpPr>
+        <p:spPr>
+          <a:xfrm>
+            <a:off x="566928" y="1874520"/>
+            <a:ext cx="3977640" cy="1965960"/>
+          </a:xfrm>
+          <a:prstGeom prst="roundRect">
+            <a:avLst>
+              <a:gd name="adj" fmla="val 3721"/>
+            </a:avLst>
+          </a:prstGeom>
+          <a:solidFill>
+            <a:srgbClr val="FAEBE9"/>
+          </a:solidFill>
+          <a:ln w="12700">
+            <a:solidFill>
+              <a:srgbClr val="D8E0EA"/>
+            </a:solidFill>
+            <a:prstDash val="solid"/>
+          </a:ln>
+          <a:effectLst>
+            <a:outerShdw sx="100000" sy="100000" kx="0" ky="0" algn="bl" rotWithShape="0" blurRad="88900" dist="38100" dir="5400000">
+              <a:srgbClr val="1C2A3E">
+                <a:alpha val="13000"/>
+              </a:srgbClr>
+            </a:outerShdw>
+          </a:effectLst>
+        </p:spPr>
+        <p:txBody>
+          <a:bodyPr/>
+          <a:p/>
+        </p:txBody>
+      </p:sp>
+      <p:sp>
+        <p:nvSpPr>
+          <p:cNvPr id="7" name="Text 4"/>
+          <p:cNvSpPr/>
+          <p:nvPr/>
+        </p:nvSpPr>
+        <p:spPr>
+          <a:xfrm>
+            <a:off x="795528" y="2057400"/>
+            <a:ext cx="3520440" cy="274320"/>
+          </a:xfrm>
+          <a:prstGeom prst="rect">
+            <a:avLst/>
+          </a:prstGeom>
+          <a:noFill/>
+          <a:ln/>
+        </p:spPr>
+        <p:txBody>
+          <a:bodyPr wrap="square" lIns="0" tIns="0" rIns="0" bIns="0" rtlCol="0" anchor="ctr"/>
+          <a:lstStyle/>
+          <a:p>
+            <a:pPr indent="0" marL="0">
+              <a:buNone/>
+            </a:pPr>
+            <a:r>
+              <a:rPr lang="en-US" sz="1200" b="1" spc="200" kern="0" dirty="0">
+                <a:solidFill>
+                  <a:srgbClr val="C0392B"/>
+                </a:solidFill>
+                <a:latin typeface="Calibri" pitchFamily="34" charset="0"/>
+                <a:ea typeface="Calibri" pitchFamily="34" charset="-122"/>
+                <a:cs typeface="Calibri" pitchFamily="34" charset="-120"/>
+              </a:rPr>
+              <a:t>DOES NOT PROTECT AGAINST</a:t>
+            </a:r>
+            <a:endParaRPr lang="en-US" sz="1200" dirty="0"/>
+          </a:p>
+        </p:txBody>
+      </p:sp>
+      <p:sp>
+        <p:nvSpPr>
+          <p:cNvPr id="8" name="Text 5"/>
+          <p:cNvSpPr/>
+          <p:nvPr/>
+        </p:nvSpPr>
+        <p:spPr>
+          <a:xfrm>
+            <a:off x="795528" y="2331720"/>
+            <a:ext cx="3520440" cy="411480"/>
+          </a:xfrm>
+          <a:prstGeom prst="rect">
+            <a:avLst/>
+          </a:prstGeom>
+          <a:noFill/>
+          <a:ln/>
+        </p:spPr>
+        <p:txBody>
+          <a:bodyPr wrap="square" lIns="0" tIns="0" rIns="0" bIns="0" rtlCol="0" anchor="ctr"/>
+          <a:lstStyle/>
+          <a:p>
+            <a:pPr indent="0" marL="0">
+              <a:buNone/>
+            </a:pPr>
+            <a:r>
+              <a:rPr lang="en-US" sz="2000" b="1" dirty="0">
+                <a:solidFill>
+                  <a:srgbClr val="1C2A3E"/>
+                </a:solidFill>
+                <a:latin typeface="Cambria" pitchFamily="34" charset="0"/>
+                <a:ea typeface="Cambria" pitchFamily="34" charset="-122"/>
+                <a:cs typeface="Cambria" pitchFamily="34" charset="-120"/>
+              </a:rPr>
+              <a:t>Anyone who can log in</a:t>
+            </a:r>
+            <a:endParaRPr lang="en-US" sz="2000" dirty="0"/>
+          </a:p>
+        </p:txBody>
+      </p:sp>
+      <p:sp>
+        <p:nvSpPr>
+          <p:cNvPr id="9" name="Text 6"/>
+          <p:cNvSpPr/>
+          <p:nvPr/>
+        </p:nvSpPr>
+        <p:spPr>
+          <a:xfrm>
+            <a:off x="841248" y="2788920"/>
+            <a:ext cx="3474720" cy="960120"/>
+          </a:xfrm>
+          <a:prstGeom prst="rect">
+            <a:avLst/>
+          </a:prstGeom>
+          <a:noFill/>
+          <a:ln/>
+        </p:spPr>
+        <p:txBody>
+          <a:bodyPr wrap="square" lIns="0" tIns="0" rIns="0" bIns="0" rtlCol="0" anchor="ctr"/>
+          <a:lstStyle/>
+          <a:p>
+            <a:pPr marL="342900" indent="-342900">
+              <a:spcAft>
+                <a:spcPts val="400"/>
+              </a:spcAft>
+              <a:buSzPct val="100000"/>
+              <a:buChar char="•"/>
+            </a:pPr>
+            <a:r>
+              <a:rPr lang="en-US" sz="1300" dirty="0">
+                <a:solidFill>
+                  <a:srgbClr val="44586E"/>
+                </a:solidFill>
+                <a:latin typeface="Calibri" pitchFamily="34" charset="0"/>
+                <a:ea typeface="Calibri" pitchFamily="34" charset="-122"/>
+                <a:cs typeface="Calibri" pitchFamily="34" charset="-120"/>
+              </a:rPr>
+              <a:t>SQL access always sees clear data</a:t>
+            </a:r>
+            <a:endParaRPr lang="en-US" sz="1300" dirty="0"/>
+          </a:p>
+          <a:p>
+            <a:pPr marL="342900" indent="-342900">
+              <a:spcAft>
+                <a:spcPts val="400"/>
+              </a:spcAft>
+              <a:buSzPct val="100000"/>
+              <a:buChar char="•"/>
+            </a:pPr>
+            <a:r>
+              <a:rPr lang="en-US" sz="1300" dirty="0">
+                <a:solidFill>
+                  <a:srgbClr val="44586E"/>
+                </a:solidFill>
+                <a:latin typeface="Calibri" pitchFamily="34" charset="0"/>
+                <a:ea typeface="Calibri" pitchFamily="34" charset="-122"/>
+                <a:cs typeface="Calibri" pitchFamily="34" charset="-120"/>
+              </a:rPr>
+              <a:t>Guard that with privileges and auditing</a:t>
+            </a:r>
+            <a:endParaRPr lang="en-US" sz="1300" dirty="0"/>
+          </a:p>
+          <a:p>
+            <a:pPr marL="342900" indent="-342900">
+              <a:spcAft>
+                <a:spcPts val="400"/>
+              </a:spcAft>
+              <a:buSzPct val="100000"/>
+              <a:buChar char="•"/>
+            </a:pPr>
+            <a:r>
+              <a:rPr lang="en-US" sz="1300" dirty="0">
+                <a:solidFill>
+                  <a:srgbClr val="44586E"/>
+                </a:solidFill>
+                <a:latin typeface="Calibri" pitchFamily="34" charset="0"/>
+                <a:ea typeface="Calibri" pitchFamily="34" charset="-122"/>
+                <a:cs typeface="Calibri" pitchFamily="34" charset="-120"/>
+              </a:rPr>
+              <a:t>TDE is encryption, not access control</a:t>
+            </a:r>
+            <a:endParaRPr lang="en-US" sz="1300" dirty="0"/>
+          </a:p>
+        </p:txBody>
+      </p:sp>
+      <p:pic>
+        <p:nvPicPr>
+          <p:cNvPr id="10" name="Image 1" descr="preencoded.png"/>
+          <p:cNvPicPr>
+            <a:picLocks noChangeAspect="1"/>
+          </p:cNvPicPr>
+          <p:nvPr/>
+        </p:nvPicPr>
+        <p:blipFill>
+          <a:blip r:embed="rId2"/>
+          <a:stretch>
+            <a:fillRect/>
+          </a:stretch>
+        </p:blipFill>
+        <p:spPr>
+          <a:xfrm>
+            <a:off x="4654296" y="2697480"/>
+            <a:ext cx="384048" cy="384048"/>
+          </a:xfrm>
+          <a:prstGeom prst="rect">
+            <a:avLst/>
+          </a:prstGeom>
+        </p:spPr>
+      </p:pic>
+      <p:sp>
+        <p:nvSpPr>
+          <p:cNvPr id="11" name="Shape 7"/>
+          <p:cNvSpPr/>
+          <p:nvPr/>
+        </p:nvSpPr>
+        <p:spPr>
+          <a:xfrm>
+            <a:off x="5148072" y="1874520"/>
+            <a:ext cx="3977640" cy="1965960"/>
+          </a:xfrm>
+          <a:prstGeom prst="roundRect">
+            <a:avLst>
+              <a:gd name="adj" fmla="val 3721"/>
+            </a:avLst>
+          </a:prstGeom>
+          <a:solidFill>
+            <a:srgbClr val="E7F4F3"/>
+          </a:solidFill>
+          <a:ln w="12700">
+            <a:solidFill>
+              <a:srgbClr val="D8E0EA"/>
+            </a:solidFill>
+            <a:prstDash val="solid"/>
+          </a:ln>
+          <a:effectLst>
+            <a:outerShdw sx="100000" sy="100000" kx="0" ky="0" algn="bl" rotWithShape="0" blurRad="88900" dist="38100" dir="5400000">
+              <a:srgbClr val="1C2A3E">
+                <a:alpha val="13000"/>
+              </a:srgbClr>
+            </a:outerShdw>
+          </a:effectLst>
+        </p:spPr>
+        <p:txBody>
+          <a:bodyPr/>
+          <a:p/>
+        </p:txBody>
+      </p:sp>
+      <p:sp>
+        <p:nvSpPr>
+          <p:cNvPr id="12" name="Text 8"/>
+          <p:cNvSpPr/>
+          <p:nvPr/>
+        </p:nvSpPr>
+        <p:spPr>
+          <a:xfrm>
+            <a:off x="5376672" y="2057400"/>
+            <a:ext cx="3520440" cy="274320"/>
+          </a:xfrm>
+          <a:prstGeom prst="rect">
+            <a:avLst/>
+          </a:prstGeom>
+          <a:noFill/>
+          <a:ln/>
+        </p:spPr>
+        <p:txBody>
+          <a:bodyPr wrap="square" lIns="0" tIns="0" rIns="0" bIns="0" rtlCol="0" anchor="ctr"/>
+          <a:lstStyle/>
+          <a:p>
+            <a:pPr indent="0" marL="0">
+              <a:buNone/>
+            </a:pPr>
+            <a:r>
+              <a:rPr lang="en-US" sz="1200" b="1" spc="200" kern="0" dirty="0">
+                <a:solidFill>
+                  <a:srgbClr val="0B6B66"/>
+                </a:solidFill>
+                <a:latin typeface="Calibri" pitchFamily="34" charset="0"/>
+                <a:ea typeface="Calibri" pitchFamily="34" charset="-122"/>
+                <a:cs typeface="Calibri" pitchFamily="34" charset="-120"/>
+              </a:rPr>
+              <a:t>WHAT IT PROTECTS</a:t>
+            </a:r>
+            <a:endParaRPr lang="en-US" sz="1200" dirty="0"/>
+          </a:p>
+        </p:txBody>
+      </p:sp>
+      <p:sp>
+        <p:nvSpPr>
+          <p:cNvPr id="13" name="Text 9"/>
+          <p:cNvSpPr/>
+          <p:nvPr/>
+        </p:nvSpPr>
+        <p:spPr>
+          <a:xfrm>
+            <a:off x="5376672" y="2331720"/>
+            <a:ext cx="3520440" cy="411480"/>
+          </a:xfrm>
+          <a:prstGeom prst="rect">
+            <a:avLst/>
+          </a:prstGeom>
+          <a:noFill/>
+          <a:ln/>
+        </p:spPr>
+        <p:txBody>
+          <a:bodyPr wrap="square" lIns="0" tIns="0" rIns="0" bIns="0" rtlCol="0" anchor="ctr"/>
+          <a:lstStyle/>
+          <a:p>
+            <a:pPr indent="0" marL="0">
+              <a:buNone/>
+            </a:pPr>
+            <a:r>
+              <a:rPr lang="en-US" sz="2000" b="1" dirty="0">
+                <a:solidFill>
+                  <a:srgbClr val="1C2A3E"/>
+                </a:solidFill>
+                <a:latin typeface="Cambria" pitchFamily="34" charset="0"/>
+                <a:ea typeface="Cambria" pitchFamily="34" charset="-122"/>
+                <a:cs typeface="Cambria" pitchFamily="34" charset="-120"/>
+              </a:rPr>
+              <a:t>The files at rest</a:t>
+            </a:r>
+            <a:endParaRPr lang="en-US" sz="2000" dirty="0"/>
+          </a:p>
+        </p:txBody>
+      </p:sp>
+      <p:sp>
+        <p:nvSpPr>
+          <p:cNvPr id="14" name="Text 10"/>
+          <p:cNvSpPr/>
+          <p:nvPr/>
+        </p:nvSpPr>
+        <p:spPr>
+          <a:xfrm>
+            <a:off x="5422392" y="2788920"/>
+            <a:ext cx="3474720" cy="960120"/>
+          </a:xfrm>
+          <a:prstGeom prst="rect">
+            <a:avLst/>
+          </a:prstGeom>
+          <a:noFill/>
+          <a:ln/>
+        </p:spPr>
+        <p:txBody>
+          <a:bodyPr wrap="square" lIns="0" tIns="0" rIns="0" bIns="0" rtlCol="0" anchor="ctr"/>
+          <a:lstStyle/>
+          <a:p>
+            <a:pPr marL="342900" indent="-342900">
+              <a:spcAft>
+                <a:spcPts val="400"/>
+              </a:spcAft>
+              <a:buSzPct val="100000"/>
+              <a:buChar char="•"/>
+            </a:pPr>
+            <a:r>
+              <a:rPr lang="en-US" sz="1300" dirty="0">
+                <a:solidFill>
+                  <a:srgbClr val="44586E"/>
+                </a:solidFill>
+                <a:latin typeface="Calibri" pitchFamily="34" charset="0"/>
+                <a:ea typeface="Calibri" pitchFamily="34" charset="-122"/>
+                <a:cs typeface="Calibri" pitchFamily="34" charset="-120"/>
+              </a:rPr>
+              <a:t>Stolen disks, LUNs or datafiles</a:t>
+            </a:r>
+            <a:endParaRPr lang="en-US" sz="1300" dirty="0"/>
+          </a:p>
+          <a:p>
+            <a:pPr marL="342900" indent="-342900">
+              <a:spcAft>
+                <a:spcPts val="400"/>
+              </a:spcAft>
+              <a:buSzPct val="100000"/>
+              <a:buChar char="•"/>
+            </a:pPr>
+            <a:r>
+              <a:rPr lang="en-US" sz="1300" dirty="0">
+                <a:solidFill>
+                  <a:srgbClr val="44586E"/>
+                </a:solidFill>
+                <a:latin typeface="Calibri" pitchFamily="34" charset="0"/>
+                <a:ea typeface="Calibri" pitchFamily="34" charset="-122"/>
+                <a:cs typeface="Calibri" pitchFamily="34" charset="-120"/>
+              </a:rPr>
+              <a:t>Lost or stolen backup tapes</a:t>
+            </a:r>
+            <a:endParaRPr lang="en-US" sz="1300" dirty="0"/>
+          </a:p>
+          <a:p>
+            <a:pPr marL="342900" indent="-342900">
+              <a:spcAft>
+                <a:spcPts val="400"/>
+              </a:spcAft>
+              <a:buSzPct val="100000"/>
+              <a:buChar char="•"/>
+            </a:pPr>
+            <a:r>
+              <a:rPr lang="en-US" sz="1300" dirty="0">
+                <a:solidFill>
+                  <a:srgbClr val="44586E"/>
+                </a:solidFill>
+                <a:latin typeface="Calibri" pitchFamily="34" charset="0"/>
+                <a:ea typeface="Calibri" pitchFamily="34" charset="-122"/>
+                <a:cs typeface="Calibri" pitchFamily="34" charset="-120"/>
+              </a:rPr>
+              <a:t>OS-level reads of the datafiles</a:t>
+            </a:r>
+            <a:endParaRPr lang="en-US" sz="1300" dirty="0"/>
+          </a:p>
+        </p:txBody>
+      </p:sp>
+      <p:sp>
+        <p:nvSpPr>
+          <p:cNvPr id="15" name="Shape 11"/>
+          <p:cNvSpPr/>
+          <p:nvPr/>
+        </p:nvSpPr>
+        <p:spPr>
+          <a:xfrm>
+            <a:off x="9445752" y="1874520"/>
+            <a:ext cx="2179015" cy="1965960"/>
+          </a:xfrm>
+          <a:prstGeom prst="roundRect">
+            <a:avLst>
+              <a:gd name="adj" fmla="val 3721"/>
+            </a:avLst>
+          </a:prstGeom>
+          <a:solidFill>
+            <a:srgbClr val="12223F"/>
+          </a:solidFill>
+          <a:ln w="12700">
+            <a:solidFill>
+              <a:srgbClr val="D8E0EA"/>
+            </a:solidFill>
+            <a:prstDash val="solid"/>
+          </a:ln>
+          <a:effectLst>
+            <a:outerShdw sx="100000" sy="100000" kx="0" ky="0" algn="bl" rotWithShape="0" blurRad="88900" dist="38100" dir="5400000">
+              <a:srgbClr val="1C2A3E">
+                <a:alpha val="13000"/>
+              </a:srgbClr>
+            </a:outerShdw>
+          </a:effectLst>
+        </p:spPr>
+        <p:txBody>
+          <a:bodyPr/>
+          <a:p/>
+        </p:txBody>
+      </p:sp>
+      <p:sp>
+        <p:nvSpPr>
+          <p:cNvPr id="16" name="Shape 12"/>
+          <p:cNvSpPr/>
+          <p:nvPr/>
+        </p:nvSpPr>
+        <p:spPr>
+          <a:xfrm>
+            <a:off x="9701784" y="2103120"/>
+            <a:ext cx="548640" cy="548640"/>
+          </a:xfrm>
+          <a:prstGeom prst="ellipse">
+            <a:avLst/>
+          </a:prstGeom>
+          <a:solidFill>
+            <a:srgbClr val="0F8B85"/>
+          </a:solidFill>
+          <a:ln/>
+        </p:spPr>
+        <p:txBody>
+          <a:bodyPr/>
+          <a:p/>
+        </p:txBody>
+      </p:sp>
+      <p:pic>
+        <p:nvPicPr>
+          <p:cNvPr id="17" name="Image 2" descr="preencoded.png"/>
+          <p:cNvPicPr>
+            <a:picLocks noChangeAspect="1"/>
+          </p:cNvPicPr>
+          <p:nvPr/>
+        </p:nvPicPr>
+        <p:blipFill>
+          <a:blip r:embed="rId3"/>
+          <a:stretch>
+            <a:fillRect/>
+          </a:stretch>
+        </p:blipFill>
+        <p:spPr>
+          <a:xfrm>
+            <a:off x="9844430" y="2245766"/>
+            <a:ext cx="263347" cy="263347"/>
+          </a:xfrm>
+          <a:prstGeom prst="rect">
+            <a:avLst/>
+          </a:prstGeom>
+        </p:spPr>
+      </p:pic>
+      <p:sp>
+        <p:nvSpPr>
+          <p:cNvPr id="18" name="Text 13"/>
+          <p:cNvSpPr/>
+          <p:nvPr/>
+        </p:nvSpPr>
+        <p:spPr>
+          <a:xfrm>
+            <a:off x="10341864" y="2103120"/>
+            <a:ext cx="1173175" cy="548640"/>
+          </a:xfrm>
+          <a:prstGeom prst="rect">
+            <a:avLst/>
+          </a:prstGeom>
+          <a:noFill/>
+          <a:ln/>
+        </p:spPr>
+        <p:txBody>
+          <a:bodyPr wrap="square" lIns="0" tIns="0" rIns="0" bIns="0" rtlCol="0" anchor="ctr"/>
+          <a:lstStyle/>
+          <a:p>
+            <a:pPr indent="0" marL="0">
+              <a:buNone/>
+            </a:pPr>
+            <a:r>
+              <a:rPr lang="en-US" sz="1800" b="1" dirty="0">
+                <a:solidFill>
+                  <a:srgbClr val="FFFFFF"/>
+                </a:solidFill>
+                <a:latin typeface="Cambria" pitchFamily="34" charset="0"/>
+                <a:ea typeface="Cambria" pitchFamily="34" charset="-122"/>
+                <a:cs typeface="Cambria" pitchFamily="34" charset="-120"/>
+              </a:rPr>
+              <a:t>Transparent</a:t>
+            </a:r>
+            <a:endParaRPr lang="en-US" sz="1800" dirty="0"/>
+          </a:p>
+        </p:txBody>
+      </p:sp>
+      <p:sp>
+        <p:nvSpPr>
+          <p:cNvPr id="19" name="Text 14"/>
+          <p:cNvSpPr/>
+          <p:nvPr/>
+        </p:nvSpPr>
+        <p:spPr>
+          <a:xfrm>
+            <a:off x="9701784" y="2743200"/>
+            <a:ext cx="1676095" cy="1005840"/>
+          </a:xfrm>
+          <a:prstGeom prst="rect">
+            <a:avLst/>
+          </a:prstGeom>
+          <a:noFill/>
+          <a:ln/>
+        </p:spPr>
+        <p:txBody>
+          <a:bodyPr wrap="square" lIns="0" tIns="0" rIns="0" bIns="0" rtlCol="0" anchor="ctr"/>
+          <a:lstStyle/>
+          <a:p>
+            <a:pPr indent="0" marL="0">
+              <a:lnSpc>
+                <a:spcPct val="108000"/>
+              </a:lnSpc>
+              <a:spcAft>
+                <a:spcPts val="300"/>
+              </a:spcAft>
+              <a:buNone/>
+            </a:pPr>
+            <a:r>
+              <a:rPr lang="en-US" sz="1250" b="1" dirty="0">
+                <a:solidFill>
+                  <a:srgbClr val="0F8B85"/>
+                </a:solidFill>
+                <a:latin typeface="Calibri" pitchFamily="34" charset="0"/>
+                <a:ea typeface="Calibri" pitchFamily="34" charset="-122"/>
+                <a:cs typeface="Calibri" pitchFamily="34" charset="-120"/>
+              </a:rPr>
+              <a:t>Below SQL</a:t>
+            </a:r>
+            <a:endParaRPr lang="en-US" sz="1250" dirty="0"/>
+          </a:p>
+          <a:p>
+            <a:pPr indent="0" marL="0">
+              <a:lnSpc>
+                <a:spcPct val="108000"/>
+              </a:lnSpc>
+              <a:spcAft>
+                <a:spcPts val="300"/>
+              </a:spcAft>
+              <a:buNone/>
+            </a:pPr>
+            <a:r>
+              <a:rPr lang="en-US" sz="1250" dirty="0">
+                <a:solidFill>
+                  <a:srgbClr val="C7D2E0"/>
+                </a:solidFill>
+                <a:latin typeface="Calibri" pitchFamily="34" charset="0"/>
+                <a:ea typeface="Calibri" pitchFamily="34" charset="-122"/>
+                <a:cs typeface="Calibri" pitchFamily="34" charset="-120"/>
+              </a:rPr>
+              <a:t>Encryption and decryption happen in the database layer, beneath SQL.</a:t>
+            </a:r>
+            <a:endParaRPr lang="en-US" sz="1250" dirty="0"/>
+          </a:p>
+          <a:p>
+            <a:pPr indent="0" marL="0">
+              <a:lnSpc>
+                <a:spcPct val="108000"/>
+              </a:lnSpc>
+              <a:spcAft>
+                <a:spcPts val="300"/>
+              </a:spcAft>
+              <a:buNone/>
+            </a:pPr>
+            <a:r>
+              <a:rPr lang="en-US" sz="1250" i="1" dirty="0">
+                <a:solidFill>
+                  <a:srgbClr val="8194A8"/>
+                </a:solidFill>
+                <a:latin typeface="Calibri" pitchFamily="34" charset="0"/>
+                <a:ea typeface="Calibri" pitchFamily="34" charset="-122"/>
+                <a:cs typeface="Calibri" pitchFamily="34" charset="-120"/>
+              </a:rPr>
+              <a:t>Zero application or schema changes.</a:t>
+            </a:r>
+            <a:endParaRPr lang="en-US" sz="1250" dirty="0"/>
+          </a:p>
+        </p:txBody>
+      </p:sp>
+      <p:sp>
+        <p:nvSpPr>
+          <p:cNvPr id="20" name="Shape 15"/>
+          <p:cNvSpPr/>
+          <p:nvPr/>
+        </p:nvSpPr>
+        <p:spPr>
+          <a:xfrm>
+            <a:off x="566928" y="4114800"/>
+            <a:ext cx="11057839" cy="2103120"/>
+          </a:xfrm>
+          <a:prstGeom prst="roundRect">
+            <a:avLst>
+              <a:gd name="adj" fmla="val 3478"/>
+            </a:avLst>
+          </a:prstGeom>
+          <a:solidFill>
+            <a:srgbClr val="F3F6FA"/>
+          </a:solidFill>
+          <a:ln w="12700">
+            <a:solidFill>
+              <a:srgbClr val="D8E0EA"/>
+            </a:solidFill>
+            <a:prstDash val="solid"/>
+          </a:ln>
+          <a:effectLst>
+            <a:outerShdw sx="100000" sy="100000" kx="0" ky="0" algn="bl" rotWithShape="0" blurRad="88900" dist="38100" dir="5400000">
+              <a:srgbClr val="1C2A3E">
+                <a:alpha val="13000"/>
+              </a:srgbClr>
+            </a:outerShdw>
+          </a:effectLst>
+        </p:spPr>
+        <p:txBody>
+          <a:bodyPr/>
+          <a:p/>
+        </p:txBody>
+      </p:sp>
+      <p:sp>
+        <p:nvSpPr>
+          <p:cNvPr id="21" name="Shape 16"/>
+          <p:cNvSpPr/>
+          <p:nvPr/>
+        </p:nvSpPr>
+        <p:spPr>
+          <a:xfrm>
+            <a:off x="859536" y="4370832"/>
+            <a:ext cx="640080" cy="640080"/>
+          </a:xfrm>
+          <a:prstGeom prst="ellipse">
+            <a:avLst/>
+          </a:prstGeom>
+          <a:solidFill>
+            <a:srgbClr val="0F8B85"/>
+          </a:solidFill>
+          <a:ln/>
+        </p:spPr>
+        <p:txBody>
+          <a:bodyPr/>
+          <a:p/>
+        </p:txBody>
+      </p:sp>
+      <p:pic>
+        <p:nvPicPr>
+          <p:cNvPr id="22" name="Image 3" descr="preencoded.png"/>
+          <p:cNvPicPr>
+            <a:picLocks noChangeAspect="1"/>
+          </p:cNvPicPr>
+          <p:nvPr/>
+        </p:nvPicPr>
+        <p:blipFill>
+          <a:blip r:embed="rId4"/>
+          <a:stretch>
+            <a:fillRect/>
+          </a:stretch>
+        </p:blipFill>
+        <p:spPr>
+          <a:xfrm>
+            <a:off x="1025957" y="4537253"/>
+            <a:ext cx="307238" cy="307238"/>
+          </a:xfrm>
+          <a:prstGeom prst="rect">
+            <a:avLst/>
+          </a:prstGeom>
+        </p:spPr>
+      </p:pic>
+      <p:sp>
+        <p:nvSpPr>
+          <p:cNvPr id="23" name="Text 17"/>
+          <p:cNvSpPr/>
+          <p:nvPr/>
+        </p:nvSpPr>
+        <p:spPr>
+          <a:xfrm>
+            <a:off x="1664208" y="4315968"/>
+            <a:ext cx="9777679" cy="411480"/>
+          </a:xfrm>
+          <a:prstGeom prst="rect">
+            <a:avLst/>
+          </a:prstGeom>
+          <a:noFill/>
+          <a:ln/>
+        </p:spPr>
+        <p:txBody>
+          <a:bodyPr wrap="square" lIns="0" tIns="0" rIns="0" bIns="0" rtlCol="0" anchor="ctr"/>
+          <a:lstStyle/>
+          <a:p>
+            <a:pPr indent="0" marL="0">
+              <a:buNone/>
+            </a:pPr>
+            <a:r>
+              <a:rPr lang="en-US" sz="1800" b="1" dirty="0">
+                <a:solidFill>
+                  <a:srgbClr val="1C2A3E"/>
+                </a:solidFill>
+                <a:latin typeface="Cambria" pitchFamily="34" charset="0"/>
+                <a:ea typeface="Cambria" pitchFamily="34" charset="-122"/>
+                <a:cs typeface="Cambria" pitchFamily="34" charset="-120"/>
+              </a:rPr>
+              <a:t>Where data is clear, and where it is encrypted</a:t>
+            </a:r>
+            <a:endParaRPr lang="en-US" sz="1800" dirty="0"/>
+          </a:p>
+        </p:txBody>
+      </p:sp>
+      <p:sp>
+        <p:nvSpPr>
+          <p:cNvPr id="24" name="Text 18"/>
+          <p:cNvSpPr/>
+          <p:nvPr/>
+        </p:nvSpPr>
+        <p:spPr>
+          <a:xfrm>
+            <a:off x="1664208" y="4754880"/>
+            <a:ext cx="9686239" cy="1280160"/>
+          </a:xfrm>
+          <a:prstGeom prst="rect">
+            <a:avLst/>
+          </a:prstGeom>
+          <a:noFill/>
+          <a:ln/>
+        </p:spPr>
+        <p:txBody>
+          <a:bodyPr wrap="square" lIns="0" tIns="0" rIns="0" bIns="0" rtlCol="0" anchor="t"/>
+          <a:lstStyle/>
+          <a:p>
+            <a:pPr indent="0" marL="0">
+              <a:lnSpc>
+                <a:spcPct val="112000"/>
+              </a:lnSpc>
+              <a:buNone/>
+            </a:pPr>
+            <a:r>
+              <a:rPr lang="en-US" sz="1400" b="1" dirty="0">
+                <a:solidFill>
+                  <a:srgbClr val="1C2A3E"/>
+                </a:solidFill>
+                <a:latin typeface="Calibri" pitchFamily="34" charset="0"/>
+                <a:ea typeface="Calibri" pitchFamily="34" charset="-122"/>
+                <a:cs typeface="Calibri" pitchFamily="34" charset="-120"/>
+              </a:rPr>
+              <a:t xml:space="preserve">Clear in the buffer cache and SGA, and clear on the wire </a:t>
+            </a:r>
+            <a:pPr indent="0" marL="0">
+              <a:lnSpc>
+                <a:spcPct val="112000"/>
+              </a:lnSpc>
+              <a:buNone/>
+            </a:pPr>
+            <a:r>
+              <a:rPr lang="en-US" sz="1400" dirty="0">
+                <a:solidFill>
+                  <a:srgbClr val="44586E"/>
+                </a:solidFill>
+                <a:latin typeface="Calibri" pitchFamily="34" charset="0"/>
+                <a:ea typeface="Calibri" pitchFamily="34" charset="-122"/>
+                <a:cs typeface="Calibri" pitchFamily="34" charset="-120"/>
+              </a:rPr>
+              <a:t xml:space="preserve">(protecting the wire is TLS’s job). Encrypted on disk in the datafiles — and flowing into </a:t>
+            </a:r>
+            <a:pPr indent="0" marL="0">
+              <a:lnSpc>
+                <a:spcPct val="112000"/>
+              </a:lnSpc>
+              <a:buNone/>
+            </a:pPr>
+            <a:r>
+              <a:rPr lang="en-US" sz="1400" b="1" dirty="0">
+                <a:solidFill>
+                  <a:srgbClr val="0B6B66"/>
+                </a:solidFill>
+                <a:latin typeface="Calibri" pitchFamily="34" charset="0"/>
+                <a:ea typeface="Calibri" pitchFamily="34" charset="-122"/>
+                <a:cs typeface="Calibri" pitchFamily="34" charset="-120"/>
+              </a:rPr>
+              <a:t>redo, undo, temp and RMAN backups</a:t>
+            </a:r>
+            <a:pPr indent="0" marL="0">
+              <a:lnSpc>
+                <a:spcPct val="112000"/>
+              </a:lnSpc>
+              <a:buNone/>
+            </a:pPr>
+            <a:r>
+              <a:rPr lang="en-US" sz="1400" dirty="0">
+                <a:solidFill>
+                  <a:srgbClr val="44586E"/>
+                </a:solidFill>
+                <a:latin typeface="Calibri" pitchFamily="34" charset="0"/>
+                <a:ea typeface="Calibri" pitchFamily="34" charset="-122"/>
+                <a:cs typeface="Calibri" pitchFamily="34" charset="-120"/>
+              </a:rPr>
+              <a:t xml:space="preserve"> for encrypted tablespaces. AES is hardware-accelerated on modern POWER, keeping overhead in the low single-digit %.</a:t>
+            </a:r>
+            <a:endParaRPr lang="en-US" sz="1400" dirty="0"/>
+          </a:p>
+        </p:txBody>
+      </p:sp>
+    </p:spTree>
+  </p:cSld>
+  <p:clrMapOvr>
+    <a:masterClrMapping/>
+  </p:clrMapOvr>
+</p:sld>
+</file>
+
+<file path=ppt/slides/slide28.xml><?xml version="1.0" encoding="utf-8"?>
+<p:sld xmlns:a="http://schemas.openxmlformats.org/drawingml/2006/main" xmlns:r="http://schemas.openxmlformats.org/officeDocument/2006/relationships" xmlns:p="http://schemas.openxmlformats.org/presentationml/2006/main">
+  <p:cSld name="Slide 8">
+    <p:bg>
+      <p:bgPr>
+        <a:solidFill>
+          <a:srgbClr val="FFFFFF"/>
+        </a:solidFill>
+      </p:bgPr>
+    </p:bg>
+    <p:spTree>
+      <p:nvGrpSpPr>
+        <p:cNvPr id="1" name=""/>
+        <p:cNvGrpSpPr/>
+        <p:nvPr/>
+      </p:nvGrpSpPr>
+      <p:grpSpPr>
+        <a:xfrm>
+          <a:off x="0" y="0"/>
+          <a:ext cx="0" cy="0"/>
+          <a:chOff x="0" y="0"/>
+          <a:chExt cx="0" cy="0"/>
+        </a:xfrm>
+      </p:grpSpPr>
+      <p:sp>
+        <p:nvSpPr>
+          <p:cNvPr id="2" name="Shape 0"/>
+          <p:cNvSpPr/>
+          <p:nvPr/>
+        </p:nvSpPr>
+        <p:spPr>
+          <a:xfrm>
+            <a:off x="566928" y="457200"/>
+            <a:ext cx="566928" cy="566928"/>
+          </a:xfrm>
+          <a:prstGeom prst="ellipse">
+            <a:avLst/>
+          </a:prstGeom>
+          <a:solidFill>
+            <a:srgbClr val="0F8B85"/>
+          </a:solidFill>
+          <a:ln/>
+        </p:spPr>
+        <p:txBody>
+          <a:bodyPr/>
+          <a:p/>
+        </p:txBody>
+      </p:sp>
+      <p:pic>
+        <p:nvPicPr>
+          <p:cNvPr id="3" name="Image 0" descr="preencoded.png"/>
+          <p:cNvPicPr>
+            <a:picLocks noChangeAspect="1"/>
+          </p:cNvPicPr>
+          <p:nvPr/>
+        </p:nvPicPr>
+        <p:blipFill>
+          <a:blip r:embed="rId1"/>
+          <a:stretch>
+            <a:fillRect/>
+          </a:stretch>
+        </p:blipFill>
+        <p:spPr>
+          <a:xfrm>
+            <a:off x="714329" y="604601"/>
+            <a:ext cx="272125" cy="272125"/>
+          </a:xfrm>
+          <a:prstGeom prst="rect">
+            <a:avLst/>
+          </a:prstGeom>
+        </p:spPr>
+      </p:pic>
+      <p:sp>
+        <p:nvSpPr>
+          <p:cNvPr id="4" name="Text 1"/>
+          <p:cNvSpPr/>
+          <p:nvPr/>
+        </p:nvSpPr>
+        <p:spPr>
+          <a:xfrm>
+            <a:off x="1298448" y="457200"/>
+            <a:ext cx="10326319" cy="274320"/>
+          </a:xfrm>
+          <a:prstGeom prst="rect">
+            <a:avLst/>
+          </a:prstGeom>
+          <a:noFill/>
+          <a:ln/>
+        </p:spPr>
+        <p:txBody>
+          <a:bodyPr wrap="square" lIns="0" tIns="0" rIns="0" bIns="0" rtlCol="0" anchor="ctr"/>
+          <a:lstStyle/>
+          <a:p>
+            <a:pPr algn="l" indent="0" marL="0">
+              <a:buNone/>
+            </a:pPr>
+            <a:r>
+              <a:rPr lang="en-US" sz="1250" b="1" spc="200" kern="0" dirty="0">
+                <a:solidFill>
+                  <a:srgbClr val="0F8B85"/>
+                </a:solidFill>
+                <a:latin typeface="Calibri" pitchFamily="34" charset="0"/>
+                <a:ea typeface="Calibri" pitchFamily="34" charset="-122"/>
+                <a:cs typeface="Calibri" pitchFamily="34" charset="-120"/>
+              </a:rPr>
+              <a:t>FOUNDATIONS — FOR THOSE NEW TO THE TOPIC</a:t>
+            </a:r>
+            <a:endParaRPr lang="en-US" sz="1250" dirty="0"/>
+          </a:p>
+        </p:txBody>
+      </p:sp>
+      <p:sp>
+        <p:nvSpPr>
+          <p:cNvPr id="5" name="Text 2"/>
+          <p:cNvSpPr/>
+          <p:nvPr/>
+        </p:nvSpPr>
+        <p:spPr>
+          <a:xfrm>
+            <a:off x="1298448" y="731520"/>
+            <a:ext cx="10326319" cy="566928"/>
+          </a:xfrm>
+          <a:prstGeom prst="rect">
+            <a:avLst/>
+          </a:prstGeom>
+          <a:noFill/>
+          <a:ln/>
+        </p:spPr>
+        <p:txBody>
+          <a:bodyPr wrap="square" lIns="0" tIns="0" rIns="0" bIns="0" rtlCol="0" anchor="ctr"/>
+          <a:lstStyle/>
+          <a:p>
+            <a:pPr algn="l" indent="0" marL="0">
+              <a:buNone/>
+            </a:pPr>
+            <a:r>
+              <a:rPr lang="en-US" sz="2700" b="1" dirty="0">
+                <a:solidFill>
+                  <a:srgbClr val="1C2A3E"/>
+                </a:solidFill>
+                <a:latin typeface="Cambria" pitchFamily="34" charset="0"/>
+                <a:ea typeface="Cambria" pitchFamily="34" charset="-122"/>
+                <a:cs typeface="Cambria" pitchFamily="34" charset="-120"/>
+              </a:rPr>
+              <a:t>TDE vocabulary — the terms you’ll meet</a:t>
+            </a:r>
+            <a:endParaRPr lang="en-US" sz="2700" dirty="0"/>
+          </a:p>
+        </p:txBody>
+      </p:sp>
+      <p:sp>
+        <p:nvSpPr>
+          <p:cNvPr id="6" name="Shape 3"/>
+          <p:cNvSpPr/>
+          <p:nvPr/>
+        </p:nvSpPr>
+        <p:spPr>
+          <a:xfrm>
+            <a:off x="566928" y="1810512"/>
+            <a:ext cx="5368900" cy="731520"/>
+          </a:xfrm>
+          <a:prstGeom prst="roundRect">
+            <a:avLst>
+              <a:gd name="adj" fmla="val 7500"/>
+            </a:avLst>
+          </a:prstGeom>
+          <a:solidFill>
+            <a:srgbClr val="F3F6FA"/>
+          </a:solidFill>
+          <a:ln w="12700">
+            <a:solidFill>
+              <a:srgbClr val="D8E0EA"/>
+            </a:solidFill>
+            <a:prstDash val="solid"/>
+          </a:ln>
+        </p:spPr>
+        <p:txBody>
+          <a:bodyPr/>
+          <a:p/>
+        </p:txBody>
+      </p:sp>
+      <p:sp>
+        <p:nvSpPr>
+          <p:cNvPr id="7" name="Shape 4"/>
+          <p:cNvSpPr/>
+          <p:nvPr/>
+        </p:nvSpPr>
+        <p:spPr>
+          <a:xfrm>
+            <a:off x="704088" y="1938528"/>
+            <a:ext cx="475488" cy="475488"/>
+          </a:xfrm>
+          <a:prstGeom prst="ellipse">
+            <a:avLst/>
+          </a:prstGeom>
+          <a:solidFill>
+            <a:srgbClr val="0F8B85"/>
+          </a:solidFill>
+          <a:ln/>
+        </p:spPr>
+        <p:txBody>
+          <a:bodyPr/>
+          <a:p/>
+        </p:txBody>
+      </p:sp>
+      <p:pic>
+        <p:nvPicPr>
+          <p:cNvPr id="8" name="Image 1" descr="preencoded.png"/>
+          <p:cNvPicPr>
+            <a:picLocks noChangeAspect="1"/>
+          </p:cNvPicPr>
+          <p:nvPr/>
+        </p:nvPicPr>
+        <p:blipFill>
+          <a:blip r:embed="rId2"/>
+          <a:stretch>
+            <a:fillRect/>
+          </a:stretch>
+        </p:blipFill>
+        <p:spPr>
+          <a:xfrm>
+            <a:off x="827715" y="2062155"/>
+            <a:ext cx="228234" cy="228234"/>
+          </a:xfrm>
+          <a:prstGeom prst="rect">
+            <a:avLst/>
+          </a:prstGeom>
+        </p:spPr>
+      </p:pic>
+      <p:sp>
+        <p:nvSpPr>
+          <p:cNvPr id="9" name="Text 5"/>
+          <p:cNvSpPr/>
+          <p:nvPr/>
+        </p:nvSpPr>
+        <p:spPr>
+          <a:xfrm>
+            <a:off x="1298448" y="1901952"/>
+            <a:ext cx="4500220" cy="292608"/>
+          </a:xfrm>
+          <a:prstGeom prst="rect">
+            <a:avLst/>
+          </a:prstGeom>
+          <a:noFill/>
+          <a:ln/>
+        </p:spPr>
+        <p:txBody>
+          <a:bodyPr wrap="square" lIns="0" tIns="0" rIns="0" bIns="0" rtlCol="0" anchor="ctr"/>
+          <a:lstStyle/>
+          <a:p>
+            <a:pPr indent="0" marL="0">
+              <a:buNone/>
+            </a:pPr>
+            <a:r>
+              <a:rPr lang="en-US" sz="1400" b="1" dirty="0">
+                <a:solidFill>
+                  <a:srgbClr val="1C2A3E"/>
+                </a:solidFill>
+                <a:latin typeface="Calibri" pitchFamily="34" charset="0"/>
+                <a:ea typeface="Calibri" pitchFamily="34" charset="-122"/>
+                <a:cs typeface="Calibri" pitchFamily="34" charset="-120"/>
+              </a:rPr>
+              <a:t>AES</a:t>
+            </a:r>
+            <a:endParaRPr lang="en-US" sz="1400" dirty="0"/>
+          </a:p>
+        </p:txBody>
+      </p:sp>
+      <p:sp>
+        <p:nvSpPr>
+          <p:cNvPr id="10" name="Text 6"/>
+          <p:cNvSpPr/>
+          <p:nvPr/>
+        </p:nvSpPr>
+        <p:spPr>
+          <a:xfrm>
+            <a:off x="1298448" y="2176272"/>
+            <a:ext cx="4500220" cy="310896"/>
+          </a:xfrm>
+          <a:prstGeom prst="rect">
+            <a:avLst/>
+          </a:prstGeom>
+          <a:noFill/>
+          <a:ln/>
+        </p:spPr>
+        <p:txBody>
+          <a:bodyPr wrap="square" lIns="0" tIns="0" rIns="0" bIns="0" rtlCol="0" anchor="ctr"/>
+          <a:lstStyle/>
+          <a:p>
+            <a:pPr indent="0" marL="0">
+              <a:buNone/>
+            </a:pPr>
+            <a:r>
+              <a:rPr lang="en-US" sz="1080" dirty="0">
+                <a:solidFill>
+                  <a:srgbClr val="44586E"/>
+                </a:solidFill>
+                <a:latin typeface="Calibri" pitchFamily="34" charset="0"/>
+                <a:ea typeface="Calibri" pitchFamily="34" charset="-122"/>
+                <a:cs typeface="Calibri" pitchFamily="34" charset="-120"/>
+              </a:rPr>
+              <a:t>The standard symmetric cipher — hardware-accelerated on modern CPUs.</a:t>
+            </a:r>
+            <a:endParaRPr lang="en-US" sz="1080" dirty="0"/>
+          </a:p>
+        </p:txBody>
+      </p:sp>
+      <p:sp>
+        <p:nvSpPr>
+          <p:cNvPr id="11" name="Shape 7"/>
+          <p:cNvSpPr/>
+          <p:nvPr/>
+        </p:nvSpPr>
+        <p:spPr>
+          <a:xfrm>
+            <a:off x="6255868" y="1810512"/>
+            <a:ext cx="5368900" cy="731520"/>
+          </a:xfrm>
+          <a:prstGeom prst="roundRect">
+            <a:avLst>
+              <a:gd name="adj" fmla="val 7500"/>
+            </a:avLst>
+          </a:prstGeom>
+          <a:solidFill>
+            <a:srgbClr val="F3F6FA"/>
+          </a:solidFill>
+          <a:ln w="12700">
+            <a:solidFill>
+              <a:srgbClr val="D8E0EA"/>
+            </a:solidFill>
+            <a:prstDash val="solid"/>
+          </a:ln>
+        </p:spPr>
+        <p:txBody>
+          <a:bodyPr/>
+          <a:p/>
+        </p:txBody>
+      </p:sp>
+      <p:sp>
+        <p:nvSpPr>
+          <p:cNvPr id="12" name="Shape 8"/>
+          <p:cNvSpPr/>
+          <p:nvPr/>
+        </p:nvSpPr>
+        <p:spPr>
+          <a:xfrm>
+            <a:off x="6393028" y="1938528"/>
+            <a:ext cx="475488" cy="475488"/>
+          </a:xfrm>
+          <a:prstGeom prst="ellipse">
+            <a:avLst/>
+          </a:prstGeom>
+          <a:solidFill>
+            <a:srgbClr val="0F8B85"/>
+          </a:solidFill>
+          <a:ln/>
+        </p:spPr>
+        <p:txBody>
+          <a:bodyPr/>
+          <a:p/>
+        </p:txBody>
+      </p:sp>
+      <p:pic>
+        <p:nvPicPr>
+          <p:cNvPr id="13" name="Image 2" descr="preencoded.png"/>
+          <p:cNvPicPr>
+            <a:picLocks noChangeAspect="1"/>
+          </p:cNvPicPr>
+          <p:nvPr/>
+        </p:nvPicPr>
+        <p:blipFill>
+          <a:blip r:embed="rId3"/>
+          <a:stretch>
+            <a:fillRect/>
+          </a:stretch>
+        </p:blipFill>
+        <p:spPr>
+          <a:xfrm>
+            <a:off x="6516654" y="2062155"/>
+            <a:ext cx="228234" cy="228234"/>
+          </a:xfrm>
+          <a:prstGeom prst="rect">
+            <a:avLst/>
+          </a:prstGeom>
+        </p:spPr>
+      </p:pic>
+      <p:sp>
+        <p:nvSpPr>
+          <p:cNvPr id="14" name="Text 9"/>
+          <p:cNvSpPr/>
+          <p:nvPr/>
+        </p:nvSpPr>
+        <p:spPr>
+          <a:xfrm>
+            <a:off x="6987388" y="1901952"/>
+            <a:ext cx="4500220" cy="292608"/>
+          </a:xfrm>
+          <a:prstGeom prst="rect">
+            <a:avLst/>
+          </a:prstGeom>
+          <a:noFill/>
+          <a:ln/>
+        </p:spPr>
+        <p:txBody>
+          <a:bodyPr wrap="square" lIns="0" tIns="0" rIns="0" bIns="0" rtlCol="0" anchor="ctr"/>
+          <a:lstStyle/>
+          <a:p>
+            <a:pPr indent="0" marL="0">
+              <a:buNone/>
+            </a:pPr>
+            <a:r>
+              <a:rPr lang="en-US" sz="1400" b="1" dirty="0">
+                <a:solidFill>
+                  <a:srgbClr val="1C2A3E"/>
+                </a:solidFill>
+                <a:latin typeface="Calibri" pitchFamily="34" charset="0"/>
+                <a:ea typeface="Calibri" pitchFamily="34" charset="-122"/>
+                <a:cs typeface="Calibri" pitchFamily="34" charset="-120"/>
+              </a:rPr>
+              <a:t>Encryption key</a:t>
+            </a:r>
+            <a:endParaRPr lang="en-US" sz="1400" dirty="0"/>
+          </a:p>
+        </p:txBody>
+      </p:sp>
+      <p:sp>
+        <p:nvSpPr>
+          <p:cNvPr id="15" name="Text 10"/>
+          <p:cNvSpPr/>
+          <p:nvPr/>
+        </p:nvSpPr>
+        <p:spPr>
+          <a:xfrm>
+            <a:off x="6987388" y="2176272"/>
+            <a:ext cx="4500220" cy="310896"/>
+          </a:xfrm>
+          <a:prstGeom prst="rect">
+            <a:avLst/>
+          </a:prstGeom>
+          <a:noFill/>
+          <a:ln/>
+        </p:spPr>
+        <p:txBody>
+          <a:bodyPr wrap="square" lIns="0" tIns="0" rIns="0" bIns="0" rtlCol="0" anchor="ctr"/>
+          <a:lstStyle/>
+          <a:p>
+            <a:pPr indent="0" marL="0">
+              <a:buNone/>
+            </a:pPr>
+            <a:r>
+              <a:rPr lang="en-US" sz="1080" dirty="0">
+                <a:solidFill>
+                  <a:srgbClr val="44586E"/>
+                </a:solidFill>
+                <a:latin typeface="Calibri" pitchFamily="34" charset="0"/>
+                <a:ea typeface="Calibri" pitchFamily="34" charset="-122"/>
+                <a:cs typeface="Calibri" pitchFamily="34" charset="-120"/>
+              </a:rPr>
+              <a:t>A random secret that locks and unlocks data — lose it, lose the data.</a:t>
+            </a:r>
+            <a:endParaRPr lang="en-US" sz="1080" dirty="0"/>
+          </a:p>
+        </p:txBody>
+      </p:sp>
+      <p:sp>
+        <p:nvSpPr>
+          <p:cNvPr id="16" name="Shape 11"/>
+          <p:cNvSpPr/>
+          <p:nvPr/>
+        </p:nvSpPr>
+        <p:spPr>
+          <a:xfrm>
+            <a:off x="566928" y="2651760"/>
+            <a:ext cx="5368900" cy="731520"/>
+          </a:xfrm>
+          <a:prstGeom prst="roundRect">
+            <a:avLst>
+              <a:gd name="adj" fmla="val 7500"/>
+            </a:avLst>
+          </a:prstGeom>
+          <a:solidFill>
+            <a:srgbClr val="F3F6FA"/>
+          </a:solidFill>
+          <a:ln w="12700">
+            <a:solidFill>
+              <a:srgbClr val="D8E0EA"/>
+            </a:solidFill>
+            <a:prstDash val="solid"/>
+          </a:ln>
+        </p:spPr>
+        <p:txBody>
+          <a:bodyPr/>
+          <a:p/>
+        </p:txBody>
+      </p:sp>
+      <p:sp>
+        <p:nvSpPr>
+          <p:cNvPr id="17" name="Shape 12"/>
+          <p:cNvSpPr/>
+          <p:nvPr/>
+        </p:nvSpPr>
+        <p:spPr>
+          <a:xfrm>
+            <a:off x="704088" y="2779776"/>
+            <a:ext cx="475488" cy="475488"/>
+          </a:xfrm>
+          <a:prstGeom prst="ellipse">
+            <a:avLst/>
+          </a:prstGeom>
+          <a:solidFill>
+            <a:srgbClr val="0F8B85"/>
+          </a:solidFill>
+          <a:ln/>
+        </p:spPr>
+        <p:txBody>
+          <a:bodyPr/>
+          <a:p/>
+        </p:txBody>
+      </p:sp>
+      <p:pic>
+        <p:nvPicPr>
+          <p:cNvPr id="18" name="Image 3" descr="preencoded.png"/>
+          <p:cNvPicPr>
+            <a:picLocks noChangeAspect="1"/>
+          </p:cNvPicPr>
+          <p:nvPr/>
+        </p:nvPicPr>
+        <p:blipFill>
+          <a:blip r:embed="rId4"/>
+          <a:stretch>
+            <a:fillRect/>
+          </a:stretch>
+        </p:blipFill>
+        <p:spPr>
+          <a:xfrm>
+            <a:off x="827715" y="2903403"/>
+            <a:ext cx="228234" cy="228234"/>
+          </a:xfrm>
+          <a:prstGeom prst="rect">
+            <a:avLst/>
+          </a:prstGeom>
+        </p:spPr>
+      </p:pic>
+      <p:sp>
+        <p:nvSpPr>
+          <p:cNvPr id="19" name="Text 13"/>
+          <p:cNvSpPr/>
+          <p:nvPr/>
+        </p:nvSpPr>
+        <p:spPr>
+          <a:xfrm>
+            <a:off x="1298448" y="2743200"/>
+            <a:ext cx="4500220" cy="292608"/>
+          </a:xfrm>
+          <a:prstGeom prst="rect">
+            <a:avLst/>
+          </a:prstGeom>
+          <a:noFill/>
+          <a:ln/>
+        </p:spPr>
+        <p:txBody>
+          <a:bodyPr wrap="square" lIns="0" tIns="0" rIns="0" bIns="0" rtlCol="0" anchor="ctr"/>
+          <a:lstStyle/>
+          <a:p>
+            <a:pPr indent="0" marL="0">
+              <a:buNone/>
+            </a:pPr>
+            <a:r>
+              <a:rPr lang="en-US" sz="1400" b="1" dirty="0">
+                <a:solidFill>
+                  <a:srgbClr val="1C2A3E"/>
+                </a:solidFill>
+                <a:latin typeface="Calibri" pitchFamily="34" charset="0"/>
+                <a:ea typeface="Calibri" pitchFamily="34" charset="-122"/>
+                <a:cs typeface="Calibri" pitchFamily="34" charset="-120"/>
+              </a:rPr>
+              <a:t>MEK — master encryption key</a:t>
+            </a:r>
+            <a:endParaRPr lang="en-US" sz="1400" dirty="0"/>
+          </a:p>
+        </p:txBody>
+      </p:sp>
+      <p:sp>
+        <p:nvSpPr>
+          <p:cNvPr id="20" name="Text 14"/>
+          <p:cNvSpPr/>
+          <p:nvPr/>
+        </p:nvSpPr>
+        <p:spPr>
+          <a:xfrm>
+            <a:off x="1298448" y="3017520"/>
+            <a:ext cx="4500220" cy="310896"/>
+          </a:xfrm>
+          <a:prstGeom prst="rect">
+            <a:avLst/>
+          </a:prstGeom>
+          <a:noFill/>
+          <a:ln/>
+        </p:spPr>
+        <p:txBody>
+          <a:bodyPr wrap="square" lIns="0" tIns="0" rIns="0" bIns="0" rtlCol="0" anchor="ctr"/>
+          <a:lstStyle/>
+          <a:p>
+            <a:pPr indent="0" marL="0">
+              <a:buNone/>
+            </a:pPr>
+            <a:r>
+              <a:rPr lang="en-US" sz="1080" dirty="0">
+                <a:solidFill>
+                  <a:srgbClr val="44586E"/>
+                </a:solidFill>
+                <a:latin typeface="Calibri" pitchFamily="34" charset="0"/>
+                <a:ea typeface="Calibri" pitchFamily="34" charset="-122"/>
+                <a:cs typeface="Calibri" pitchFamily="34" charset="-120"/>
+              </a:rPr>
+              <a:t>The top key; lives in the keystore, never in the datafiles.</a:t>
+            </a:r>
+            <a:endParaRPr lang="en-US" sz="1080" dirty="0"/>
+          </a:p>
+        </p:txBody>
+      </p:sp>
+      <p:sp>
+        <p:nvSpPr>
+          <p:cNvPr id="21" name="Shape 15"/>
+          <p:cNvSpPr/>
+          <p:nvPr/>
+        </p:nvSpPr>
+        <p:spPr>
+          <a:xfrm>
+            <a:off x="6255868" y="2651760"/>
+            <a:ext cx="5368900" cy="731520"/>
+          </a:xfrm>
+          <a:prstGeom prst="roundRect">
+            <a:avLst>
+              <a:gd name="adj" fmla="val 7500"/>
+            </a:avLst>
+          </a:prstGeom>
+          <a:solidFill>
+            <a:srgbClr val="F3F6FA"/>
+          </a:solidFill>
+          <a:ln w="12700">
+            <a:solidFill>
+              <a:srgbClr val="D8E0EA"/>
+            </a:solidFill>
+            <a:prstDash val="solid"/>
+          </a:ln>
+        </p:spPr>
+        <p:txBody>
+          <a:bodyPr/>
+          <a:p/>
+        </p:txBody>
+      </p:sp>
+      <p:sp>
+        <p:nvSpPr>
+          <p:cNvPr id="22" name="Shape 16"/>
+          <p:cNvSpPr/>
+          <p:nvPr/>
+        </p:nvSpPr>
+        <p:spPr>
+          <a:xfrm>
+            <a:off x="6393028" y="2779776"/>
+            <a:ext cx="475488" cy="475488"/>
+          </a:xfrm>
+          <a:prstGeom prst="ellipse">
+            <a:avLst/>
+          </a:prstGeom>
+          <a:solidFill>
+            <a:srgbClr val="0F8B85"/>
+          </a:solidFill>
+          <a:ln/>
+        </p:spPr>
+        <p:txBody>
+          <a:bodyPr/>
+          <a:p/>
+        </p:txBody>
+      </p:sp>
+      <p:pic>
+        <p:nvPicPr>
+          <p:cNvPr id="23" name="Image 4" descr="preencoded.png"/>
+          <p:cNvPicPr>
+            <a:picLocks noChangeAspect="1"/>
+          </p:cNvPicPr>
+          <p:nvPr/>
+        </p:nvPicPr>
+        <p:blipFill>
+          <a:blip r:embed="rId5"/>
+          <a:stretch>
+            <a:fillRect/>
+          </a:stretch>
+        </p:blipFill>
+        <p:spPr>
+          <a:xfrm>
+            <a:off x="6516654" y="2903403"/>
+            <a:ext cx="228234" cy="228234"/>
+          </a:xfrm>
+          <a:prstGeom prst="rect">
+            <a:avLst/>
+          </a:prstGeom>
+        </p:spPr>
+      </p:pic>
+      <p:sp>
+        <p:nvSpPr>
+          <p:cNvPr id="24" name="Text 17"/>
+          <p:cNvSpPr/>
+          <p:nvPr/>
+        </p:nvSpPr>
+        <p:spPr>
+          <a:xfrm>
+            <a:off x="6987388" y="2743200"/>
+            <a:ext cx="4500220" cy="292608"/>
+          </a:xfrm>
+          <a:prstGeom prst="rect">
+            <a:avLst/>
+          </a:prstGeom>
+          <a:noFill/>
+          <a:ln/>
+        </p:spPr>
+        <p:txBody>
+          <a:bodyPr wrap="square" lIns="0" tIns="0" rIns="0" bIns="0" rtlCol="0" anchor="ctr"/>
+          <a:lstStyle/>
+          <a:p>
+            <a:pPr indent="0" marL="0">
+              <a:buNone/>
+            </a:pPr>
+            <a:r>
+              <a:rPr lang="en-US" sz="1400" b="1" dirty="0">
+                <a:solidFill>
+                  <a:srgbClr val="1C2A3E"/>
+                </a:solidFill>
+                <a:latin typeface="Calibri" pitchFamily="34" charset="0"/>
+                <a:ea typeface="Calibri" pitchFamily="34" charset="-122"/>
+                <a:cs typeface="Calibri" pitchFamily="34" charset="-120"/>
+              </a:rPr>
+              <a:t>Data / tablespace keys</a:t>
+            </a:r>
+            <a:endParaRPr lang="en-US" sz="1400" dirty="0"/>
+          </a:p>
+        </p:txBody>
+      </p:sp>
+      <p:sp>
+        <p:nvSpPr>
+          <p:cNvPr id="25" name="Text 18"/>
+          <p:cNvSpPr/>
+          <p:nvPr/>
+        </p:nvSpPr>
+        <p:spPr>
+          <a:xfrm>
+            <a:off x="6987388" y="3017520"/>
+            <a:ext cx="4500220" cy="310896"/>
+          </a:xfrm>
+          <a:prstGeom prst="rect">
+            <a:avLst/>
+          </a:prstGeom>
+          <a:noFill/>
+          <a:ln/>
+        </p:spPr>
+        <p:txBody>
+          <a:bodyPr wrap="square" lIns="0" tIns="0" rIns="0" bIns="0" rtlCol="0" anchor="ctr"/>
+          <a:lstStyle/>
+          <a:p>
+            <a:pPr indent="0" marL="0">
+              <a:buNone/>
+            </a:pPr>
+            <a:r>
+              <a:rPr lang="en-US" sz="1080" dirty="0">
+                <a:solidFill>
+                  <a:srgbClr val="44586E"/>
+                </a:solidFill>
+                <a:latin typeface="Calibri" pitchFamily="34" charset="0"/>
+                <a:ea typeface="Calibri" pitchFamily="34" charset="-122"/>
+                <a:cs typeface="Calibri" pitchFamily="34" charset="-120"/>
+              </a:rPr>
+              <a:t>Per-tablespace keys in the datafile headers, encrypted by the MEK.</a:t>
+            </a:r>
+            <a:endParaRPr lang="en-US" sz="1080" dirty="0"/>
+          </a:p>
+        </p:txBody>
+      </p:sp>
+      <p:sp>
+        <p:nvSpPr>
+          <p:cNvPr id="26" name="Shape 19"/>
+          <p:cNvSpPr/>
+          <p:nvPr/>
+        </p:nvSpPr>
+        <p:spPr>
+          <a:xfrm>
+            <a:off x="566928" y="3493008"/>
+            <a:ext cx="5368900" cy="731520"/>
+          </a:xfrm>
+          <a:prstGeom prst="roundRect">
+            <a:avLst>
+              <a:gd name="adj" fmla="val 7500"/>
+            </a:avLst>
+          </a:prstGeom>
+          <a:solidFill>
+            <a:srgbClr val="F3F6FA"/>
+          </a:solidFill>
+          <a:ln w="12700">
+            <a:solidFill>
+              <a:srgbClr val="D8E0EA"/>
+            </a:solidFill>
+            <a:prstDash val="solid"/>
+          </a:ln>
+        </p:spPr>
+        <p:txBody>
+          <a:bodyPr/>
+          <a:p/>
+        </p:txBody>
+      </p:sp>
+      <p:sp>
+        <p:nvSpPr>
+          <p:cNvPr id="27" name="Shape 20"/>
+          <p:cNvSpPr/>
+          <p:nvPr/>
+        </p:nvSpPr>
+        <p:spPr>
+          <a:xfrm>
+            <a:off x="704088" y="3621024"/>
+            <a:ext cx="475488" cy="475488"/>
+          </a:xfrm>
+          <a:prstGeom prst="ellipse">
+            <a:avLst/>
+          </a:prstGeom>
+          <a:solidFill>
+            <a:srgbClr val="0F8B85"/>
+          </a:solidFill>
+          <a:ln/>
+        </p:spPr>
+        <p:txBody>
+          <a:bodyPr/>
+          <a:p/>
+        </p:txBody>
+      </p:sp>
+      <p:pic>
+        <p:nvPicPr>
+          <p:cNvPr id="28" name="Image 5" descr="preencoded.png"/>
+          <p:cNvPicPr>
+            <a:picLocks noChangeAspect="1"/>
+          </p:cNvPicPr>
+          <p:nvPr/>
+        </p:nvPicPr>
+        <p:blipFill>
+          <a:blip r:embed="rId6"/>
+          <a:stretch>
+            <a:fillRect/>
+          </a:stretch>
+        </p:blipFill>
+        <p:spPr>
+          <a:xfrm>
+            <a:off x="827715" y="3744651"/>
+            <a:ext cx="228234" cy="228234"/>
+          </a:xfrm>
+          <a:prstGeom prst="rect">
+            <a:avLst/>
+          </a:prstGeom>
+        </p:spPr>
+      </p:pic>
+      <p:sp>
+        <p:nvSpPr>
+          <p:cNvPr id="29" name="Text 21"/>
+          <p:cNvSpPr/>
+          <p:nvPr/>
+        </p:nvSpPr>
+        <p:spPr>
+          <a:xfrm>
+            <a:off x="1298448" y="3584448"/>
+            <a:ext cx="4500220" cy="292608"/>
+          </a:xfrm>
+          <a:prstGeom prst="rect">
+            <a:avLst/>
+          </a:prstGeom>
+          <a:noFill/>
+          <a:ln/>
+        </p:spPr>
+        <p:txBody>
+          <a:bodyPr wrap="square" lIns="0" tIns="0" rIns="0" bIns="0" rtlCol="0" anchor="ctr"/>
+          <a:lstStyle/>
+          <a:p>
+            <a:pPr indent="0" marL="0">
+              <a:buNone/>
+            </a:pPr>
+            <a:r>
+              <a:rPr lang="en-US" sz="1400" b="1" dirty="0">
+                <a:solidFill>
+                  <a:srgbClr val="1C2A3E"/>
+                </a:solidFill>
+                <a:latin typeface="Calibri" pitchFamily="34" charset="0"/>
+                <a:ea typeface="Calibri" pitchFamily="34" charset="-122"/>
+                <a:cs typeface="Calibri" pitchFamily="34" charset="-120"/>
+              </a:rPr>
+              <a:t>Keystore vs wallet</a:t>
+            </a:r>
+            <a:endParaRPr lang="en-US" sz="1400" dirty="0"/>
+          </a:p>
+        </p:txBody>
+      </p:sp>
+      <p:sp>
+        <p:nvSpPr>
+          <p:cNvPr id="30" name="Text 22"/>
+          <p:cNvSpPr/>
+          <p:nvPr/>
+        </p:nvSpPr>
+        <p:spPr>
+          <a:xfrm>
+            <a:off x="1298448" y="3858768"/>
+            <a:ext cx="4500220" cy="310896"/>
+          </a:xfrm>
+          <a:prstGeom prst="rect">
+            <a:avLst/>
+          </a:prstGeom>
+          <a:noFill/>
+          <a:ln/>
+        </p:spPr>
+        <p:txBody>
+          <a:bodyPr wrap="square" lIns="0" tIns="0" rIns="0" bIns="0" rtlCol="0" anchor="ctr"/>
+          <a:lstStyle/>
+          <a:p>
+            <a:pPr indent="0" marL="0">
+              <a:buNone/>
+            </a:pPr>
+            <a:r>
+              <a:rPr lang="en-US" sz="1080" dirty="0">
+                <a:solidFill>
+                  <a:srgbClr val="44586E"/>
+                </a:solidFill>
+                <a:latin typeface="Calibri" pitchFamily="34" charset="0"/>
+                <a:ea typeface="Calibri" pitchFamily="34" charset="-122"/>
+                <a:cs typeface="Calibri" pitchFamily="34" charset="-120"/>
+              </a:rPr>
+              <a:t>Same file concept; keystore is the TDE term — password-protected ewallet.p12.</a:t>
+            </a:r>
+            <a:endParaRPr lang="en-US" sz="1080" dirty="0"/>
+          </a:p>
+        </p:txBody>
+      </p:sp>
+      <p:sp>
+        <p:nvSpPr>
+          <p:cNvPr id="31" name="Shape 23"/>
+          <p:cNvSpPr/>
+          <p:nvPr/>
+        </p:nvSpPr>
+        <p:spPr>
+          <a:xfrm>
+            <a:off x="6255868" y="3493008"/>
+            <a:ext cx="5368900" cy="731520"/>
+          </a:xfrm>
+          <a:prstGeom prst="roundRect">
+            <a:avLst>
+              <a:gd name="adj" fmla="val 7500"/>
+            </a:avLst>
+          </a:prstGeom>
+          <a:solidFill>
+            <a:srgbClr val="F3F6FA"/>
+          </a:solidFill>
+          <a:ln w="12700">
+            <a:solidFill>
+              <a:srgbClr val="D8E0EA"/>
+            </a:solidFill>
+            <a:prstDash val="solid"/>
+          </a:ln>
+        </p:spPr>
+        <p:txBody>
+          <a:bodyPr/>
+          <a:p/>
+        </p:txBody>
+      </p:sp>
+      <p:sp>
+        <p:nvSpPr>
+          <p:cNvPr id="32" name="Shape 24"/>
+          <p:cNvSpPr/>
+          <p:nvPr/>
+        </p:nvSpPr>
+        <p:spPr>
+          <a:xfrm>
+            <a:off x="6393028" y="3621024"/>
+            <a:ext cx="475488" cy="475488"/>
+          </a:xfrm>
+          <a:prstGeom prst="ellipse">
+            <a:avLst/>
+          </a:prstGeom>
+          <a:solidFill>
+            <a:srgbClr val="0F8B85"/>
+          </a:solidFill>
+          <a:ln/>
+        </p:spPr>
+        <p:txBody>
+          <a:bodyPr/>
+          <a:p/>
+        </p:txBody>
+      </p:sp>
+      <p:pic>
+        <p:nvPicPr>
+          <p:cNvPr id="33" name="Image 6" descr="preencoded.png"/>
+          <p:cNvPicPr>
+            <a:picLocks noChangeAspect="1"/>
+          </p:cNvPicPr>
+          <p:nvPr/>
+        </p:nvPicPr>
+        <p:blipFill>
+          <a:blip r:embed="rId7"/>
+          <a:stretch>
+            <a:fillRect/>
+          </a:stretch>
+        </p:blipFill>
+        <p:spPr>
+          <a:xfrm>
+            <a:off x="6516654" y="3744651"/>
+            <a:ext cx="228234" cy="228234"/>
+          </a:xfrm>
+          <a:prstGeom prst="rect">
+            <a:avLst/>
+          </a:prstGeom>
+        </p:spPr>
+      </p:pic>
+      <p:sp>
+        <p:nvSpPr>
+          <p:cNvPr id="34" name="Text 25"/>
+          <p:cNvSpPr/>
+          <p:nvPr/>
+        </p:nvSpPr>
+        <p:spPr>
+          <a:xfrm>
+            <a:off x="6987388" y="3584448"/>
+            <a:ext cx="4500220" cy="292608"/>
+          </a:xfrm>
+          <a:prstGeom prst="rect">
+            <a:avLst/>
+          </a:prstGeom>
+          <a:noFill/>
+          <a:ln/>
+        </p:spPr>
+        <p:txBody>
+          <a:bodyPr wrap="square" lIns="0" tIns="0" rIns="0" bIns="0" rtlCol="0" anchor="ctr"/>
+          <a:lstStyle/>
+          <a:p>
+            <a:pPr indent="0" marL="0">
+              <a:buNone/>
+            </a:pPr>
+            <a:r>
+              <a:rPr lang="en-US" sz="1400" b="1" dirty="0">
+                <a:solidFill>
+                  <a:srgbClr val="1C2A3E"/>
+                </a:solidFill>
+                <a:latin typeface="Calibri" pitchFamily="34" charset="0"/>
+                <a:ea typeface="Calibri" pitchFamily="34" charset="-122"/>
+                <a:cs typeface="Calibri" pitchFamily="34" charset="-120"/>
+              </a:rPr>
+              <a:t>Auto-login keystore</a:t>
+            </a:r>
+            <a:endParaRPr lang="en-US" sz="1400" dirty="0"/>
+          </a:p>
+        </p:txBody>
+      </p:sp>
+      <p:sp>
+        <p:nvSpPr>
+          <p:cNvPr id="35" name="Text 26"/>
+          <p:cNvSpPr/>
+          <p:nvPr/>
+        </p:nvSpPr>
+        <p:spPr>
+          <a:xfrm>
+            <a:off x="6987388" y="3858768"/>
+            <a:ext cx="4500220" cy="310896"/>
+          </a:xfrm>
+          <a:prstGeom prst="rect">
+            <a:avLst/>
+          </a:prstGeom>
+          <a:noFill/>
+          <a:ln/>
+        </p:spPr>
+        <p:txBody>
+          <a:bodyPr wrap="square" lIns="0" tIns="0" rIns="0" bIns="0" rtlCol="0" anchor="ctr"/>
+          <a:lstStyle/>
+          <a:p>
+            <a:pPr indent="0" marL="0">
+              <a:buNone/>
+            </a:pPr>
+            <a:r>
+              <a:rPr lang="en-US" sz="1080" dirty="0">
+                <a:solidFill>
+                  <a:srgbClr val="44586E"/>
+                </a:solidFill>
+                <a:latin typeface="Calibri" pitchFamily="34" charset="0"/>
+                <a:ea typeface="Calibri" pitchFamily="34" charset="-122"/>
+                <a:cs typeface="Calibri" pitchFamily="34" charset="-120"/>
+              </a:rPr>
+              <a:t>cwallet.sso — opens the keystore at startup with no password typed.</a:t>
+            </a:r>
+            <a:endParaRPr lang="en-US" sz="1080" dirty="0"/>
+          </a:p>
+        </p:txBody>
+      </p:sp>
+      <p:sp>
+        <p:nvSpPr>
+          <p:cNvPr id="36" name="Shape 27"/>
+          <p:cNvSpPr/>
+          <p:nvPr/>
+        </p:nvSpPr>
+        <p:spPr>
+          <a:xfrm>
+            <a:off x="566928" y="4334256"/>
+            <a:ext cx="5368900" cy="731520"/>
+          </a:xfrm>
+          <a:prstGeom prst="roundRect">
+            <a:avLst>
+              <a:gd name="adj" fmla="val 7500"/>
+            </a:avLst>
+          </a:prstGeom>
+          <a:solidFill>
+            <a:srgbClr val="F3F6FA"/>
+          </a:solidFill>
+          <a:ln w="12700">
+            <a:solidFill>
+              <a:srgbClr val="D8E0EA"/>
+            </a:solidFill>
+            <a:prstDash val="solid"/>
+          </a:ln>
+        </p:spPr>
+        <p:txBody>
+          <a:bodyPr/>
+          <a:p/>
+        </p:txBody>
+      </p:sp>
+      <p:sp>
+        <p:nvSpPr>
+          <p:cNvPr id="37" name="Shape 28"/>
+          <p:cNvSpPr/>
+          <p:nvPr/>
+        </p:nvSpPr>
+        <p:spPr>
+          <a:xfrm>
+            <a:off x="704088" y="4462272"/>
+            <a:ext cx="475488" cy="475488"/>
+          </a:xfrm>
+          <a:prstGeom prst="ellipse">
+            <a:avLst/>
+          </a:prstGeom>
+          <a:solidFill>
+            <a:srgbClr val="0F8B85"/>
+          </a:solidFill>
+          <a:ln/>
+        </p:spPr>
+        <p:txBody>
+          <a:bodyPr/>
+          <a:p/>
+        </p:txBody>
+      </p:sp>
+      <p:pic>
+        <p:nvPicPr>
+          <p:cNvPr id="38" name="Image 7" descr="preencoded.png"/>
+          <p:cNvPicPr>
+            <a:picLocks noChangeAspect="1"/>
+          </p:cNvPicPr>
+          <p:nvPr/>
+        </p:nvPicPr>
+        <p:blipFill>
+          <a:blip r:embed="rId8"/>
+          <a:stretch>
+            <a:fillRect/>
+          </a:stretch>
+        </p:blipFill>
+        <p:spPr>
+          <a:xfrm>
+            <a:off x="827715" y="4585899"/>
+            <a:ext cx="228234" cy="228234"/>
+          </a:xfrm>
+          <a:prstGeom prst="rect">
+            <a:avLst/>
+          </a:prstGeom>
+        </p:spPr>
+      </p:pic>
+      <p:sp>
+        <p:nvSpPr>
+          <p:cNvPr id="39" name="Text 29"/>
+          <p:cNvSpPr/>
+          <p:nvPr/>
+        </p:nvSpPr>
+        <p:spPr>
+          <a:xfrm>
+            <a:off x="1298448" y="4425696"/>
+            <a:ext cx="4500220" cy="292608"/>
+          </a:xfrm>
+          <a:prstGeom prst="rect">
+            <a:avLst/>
+          </a:prstGeom>
+          <a:noFill/>
+          <a:ln/>
+        </p:spPr>
+        <p:txBody>
+          <a:bodyPr wrap="square" lIns="0" tIns="0" rIns="0" bIns="0" rtlCol="0" anchor="ctr"/>
+          <a:lstStyle/>
+          <a:p>
+            <a:pPr indent="0" marL="0">
+              <a:buNone/>
+            </a:pPr>
+            <a:r>
+              <a:rPr lang="en-US" sz="1400" b="1" dirty="0">
+                <a:solidFill>
+                  <a:srgbClr val="1C2A3E"/>
+                </a:solidFill>
+                <a:latin typeface="Calibri" pitchFamily="34" charset="0"/>
+                <a:ea typeface="Calibri" pitchFamily="34" charset="-122"/>
+                <a:cs typeface="Calibri" pitchFamily="34" charset="-120"/>
+              </a:rPr>
+              <a:t>Key rotation / re-key</a:t>
+            </a:r>
+            <a:endParaRPr lang="en-US" sz="1400" dirty="0"/>
+          </a:p>
+        </p:txBody>
+      </p:sp>
+      <p:sp>
+        <p:nvSpPr>
+          <p:cNvPr id="40" name="Text 30"/>
+          <p:cNvSpPr/>
+          <p:nvPr/>
+        </p:nvSpPr>
+        <p:spPr>
+          <a:xfrm>
+            <a:off x="1298448" y="4700016"/>
+            <a:ext cx="4500220" cy="310896"/>
+          </a:xfrm>
+          <a:prstGeom prst="rect">
+            <a:avLst/>
+          </a:prstGeom>
+          <a:noFill/>
+          <a:ln/>
+        </p:spPr>
+        <p:txBody>
+          <a:bodyPr wrap="square" lIns="0" tIns="0" rIns="0" bIns="0" rtlCol="0" anchor="ctr"/>
+          <a:lstStyle/>
+          <a:p>
+            <a:pPr indent="0" marL="0">
+              <a:buNone/>
+            </a:pPr>
+            <a:r>
+              <a:rPr lang="en-US" sz="1080" dirty="0">
+                <a:solidFill>
+                  <a:srgbClr val="44586E"/>
+                </a:solidFill>
+                <a:latin typeface="Calibri" pitchFamily="34" charset="0"/>
+                <a:ea typeface="Calibri" pitchFamily="34" charset="-122"/>
+                <a:cs typeface="Calibri" pitchFamily="34" charset="-120"/>
+              </a:rPr>
+              <a:t>Issue a new MEK; old keys stay in the keystore forever — never delete it.</a:t>
+            </a:r>
+            <a:endParaRPr lang="en-US" sz="1080" dirty="0"/>
+          </a:p>
+        </p:txBody>
+      </p:sp>
+      <p:sp>
+        <p:nvSpPr>
+          <p:cNvPr id="41" name="Shape 31"/>
+          <p:cNvSpPr/>
+          <p:nvPr/>
+        </p:nvSpPr>
+        <p:spPr>
+          <a:xfrm>
+            <a:off x="6255868" y="4334256"/>
+            <a:ext cx="5368900" cy="731520"/>
+          </a:xfrm>
+          <a:prstGeom prst="roundRect">
+            <a:avLst>
+              <a:gd name="adj" fmla="val 7500"/>
+            </a:avLst>
+          </a:prstGeom>
+          <a:solidFill>
+            <a:srgbClr val="F3F6FA"/>
+          </a:solidFill>
+          <a:ln w="12700">
+            <a:solidFill>
+              <a:srgbClr val="D8E0EA"/>
+            </a:solidFill>
+            <a:prstDash val="solid"/>
+          </a:ln>
+        </p:spPr>
+        <p:txBody>
+          <a:bodyPr/>
+          <a:p/>
+        </p:txBody>
+      </p:sp>
+      <p:sp>
+        <p:nvSpPr>
+          <p:cNvPr id="42" name="Shape 32"/>
+          <p:cNvSpPr/>
+          <p:nvPr/>
+        </p:nvSpPr>
+        <p:spPr>
+          <a:xfrm>
+            <a:off x="6393028" y="4462272"/>
+            <a:ext cx="475488" cy="475488"/>
+          </a:xfrm>
+          <a:prstGeom prst="ellipse">
+            <a:avLst/>
+          </a:prstGeom>
+          <a:solidFill>
+            <a:srgbClr val="0F8B85"/>
+          </a:solidFill>
+          <a:ln/>
+        </p:spPr>
+        <p:txBody>
+          <a:bodyPr/>
+          <a:p/>
+        </p:txBody>
+      </p:sp>
+      <p:pic>
+        <p:nvPicPr>
+          <p:cNvPr id="43" name="Image 8" descr="preencoded.png"/>
+          <p:cNvPicPr>
+            <a:picLocks noChangeAspect="1"/>
+          </p:cNvPicPr>
+          <p:nvPr/>
+        </p:nvPicPr>
+        <p:blipFill>
+          <a:blip r:embed="rId9"/>
+          <a:stretch>
+            <a:fillRect/>
+          </a:stretch>
+        </p:blipFill>
+        <p:spPr>
+          <a:xfrm>
+            <a:off x="6516654" y="4585899"/>
+            <a:ext cx="228234" cy="228234"/>
+          </a:xfrm>
+          <a:prstGeom prst="rect">
+            <a:avLst/>
+          </a:prstGeom>
+        </p:spPr>
+      </p:pic>
+      <p:sp>
+        <p:nvSpPr>
+          <p:cNvPr id="44" name="Text 33"/>
+          <p:cNvSpPr/>
+          <p:nvPr/>
+        </p:nvSpPr>
+        <p:spPr>
+          <a:xfrm>
+            <a:off x="6987388" y="4425696"/>
+            <a:ext cx="4500220" cy="292608"/>
+          </a:xfrm>
+          <a:prstGeom prst="rect">
+            <a:avLst/>
+          </a:prstGeom>
+          <a:noFill/>
+          <a:ln/>
+        </p:spPr>
+        <p:txBody>
+          <a:bodyPr wrap="square" lIns="0" tIns="0" rIns="0" bIns="0" rtlCol="0" anchor="ctr"/>
+          <a:lstStyle/>
+          <a:p>
+            <a:pPr indent="0" marL="0">
+              <a:buNone/>
+            </a:pPr>
+            <a:r>
+              <a:rPr lang="en-US" sz="1400" b="1" dirty="0">
+                <a:solidFill>
+                  <a:srgbClr val="1C2A3E"/>
+                </a:solidFill>
+                <a:latin typeface="Calibri" pitchFamily="34" charset="0"/>
+                <a:ea typeface="Calibri" pitchFamily="34" charset="-122"/>
+                <a:cs typeface="Calibri" pitchFamily="34" charset="-120"/>
+              </a:rPr>
+              <a:t>HSM</a:t>
+            </a:r>
+            <a:endParaRPr lang="en-US" sz="1400" dirty="0"/>
+          </a:p>
+        </p:txBody>
+      </p:sp>
+      <p:sp>
+        <p:nvSpPr>
+          <p:cNvPr id="45" name="Text 34"/>
+          <p:cNvSpPr/>
+          <p:nvPr/>
+        </p:nvSpPr>
+        <p:spPr>
+          <a:xfrm>
+            <a:off x="6987388" y="4700016"/>
+            <a:ext cx="4500220" cy="310896"/>
+          </a:xfrm>
+          <a:prstGeom prst="rect">
+            <a:avLst/>
+          </a:prstGeom>
+          <a:noFill/>
+          <a:ln/>
+        </p:spPr>
+        <p:txBody>
+          <a:bodyPr wrap="square" lIns="0" tIns="0" rIns="0" bIns="0" rtlCol="0" anchor="ctr"/>
+          <a:lstStyle/>
+          <a:p>
+            <a:pPr indent="0" marL="0">
+              <a:buNone/>
+            </a:pPr>
+            <a:r>
+              <a:rPr lang="en-US" sz="1080" dirty="0">
+                <a:solidFill>
+                  <a:srgbClr val="44586E"/>
+                </a:solidFill>
+                <a:latin typeface="Calibri" pitchFamily="34" charset="0"/>
+                <a:ea typeface="Calibri" pitchFamily="34" charset="-122"/>
+                <a:cs typeface="Calibri" pitchFamily="34" charset="-120"/>
+              </a:rPr>
+              <a:t>Hardware Security Module — tamper-proof hardware that guards keys.</a:t>
+            </a:r>
+            <a:endParaRPr lang="en-US" sz="1080" dirty="0"/>
+          </a:p>
+        </p:txBody>
+      </p:sp>
+      <p:sp>
+        <p:nvSpPr>
+          <p:cNvPr id="46" name="Shape 35"/>
+          <p:cNvSpPr/>
+          <p:nvPr/>
+        </p:nvSpPr>
+        <p:spPr>
+          <a:xfrm>
+            <a:off x="566928" y="5349240"/>
+            <a:ext cx="11057839" cy="914400"/>
+          </a:xfrm>
+          <a:prstGeom prst="roundRect">
+            <a:avLst>
+              <a:gd name="adj" fmla="val 8000"/>
+            </a:avLst>
+          </a:prstGeom>
+          <a:solidFill>
+            <a:srgbClr val="12223F"/>
+          </a:solidFill>
+          <a:ln w="12700">
+            <a:solidFill>
+              <a:srgbClr val="D8E0EA"/>
+            </a:solidFill>
+            <a:prstDash val="solid"/>
+          </a:ln>
+          <a:effectLst>
+            <a:outerShdw sx="100000" sy="100000" kx="0" ky="0" algn="bl" rotWithShape="0" blurRad="88900" dist="38100" dir="5400000">
+              <a:srgbClr val="1C2A3E">
+                <a:alpha val="13000"/>
+              </a:srgbClr>
+            </a:outerShdw>
+          </a:effectLst>
+        </p:spPr>
+        <p:txBody>
+          <a:bodyPr/>
+          <a:p/>
+        </p:txBody>
+      </p:sp>
+      <p:sp>
+        <p:nvSpPr>
+          <p:cNvPr id="47" name="Text 36"/>
+          <p:cNvSpPr/>
+          <p:nvPr/>
+        </p:nvSpPr>
+        <p:spPr>
+          <a:xfrm>
+            <a:off x="841248" y="5468112"/>
+            <a:ext cx="1371600" cy="274320"/>
+          </a:xfrm>
+          <a:prstGeom prst="rect">
+            <a:avLst/>
+          </a:prstGeom>
+          <a:noFill/>
+          <a:ln/>
+        </p:spPr>
+        <p:txBody>
+          <a:bodyPr wrap="square" lIns="0" tIns="0" rIns="0" bIns="0" rtlCol="0" anchor="ctr"/>
+          <a:lstStyle/>
+          <a:p>
+            <a:pPr indent="0" marL="0">
+              <a:buNone/>
+            </a:pPr>
+            <a:r>
+              <a:rPr lang="en-US" sz="1200" b="1" spc="200" kern="0" dirty="0">
+                <a:solidFill>
+                  <a:srgbClr val="0F8B85"/>
+                </a:solidFill>
+                <a:latin typeface="Calibri" pitchFamily="34" charset="0"/>
+                <a:ea typeface="Calibri" pitchFamily="34" charset="-122"/>
+                <a:cs typeface="Calibri" pitchFamily="34" charset="-120"/>
+              </a:rPr>
+              <a:t>OKV</a:t>
+            </a:r>
+            <a:endParaRPr lang="en-US" sz="1200" dirty="0"/>
+          </a:p>
+        </p:txBody>
+      </p:sp>
+      <p:sp>
+        <p:nvSpPr>
+          <p:cNvPr id="48" name="Text 37"/>
+          <p:cNvSpPr/>
+          <p:nvPr/>
+        </p:nvSpPr>
+        <p:spPr>
+          <a:xfrm>
+            <a:off x="841248" y="5760720"/>
+            <a:ext cx="10509199" cy="411480"/>
+          </a:xfrm>
+          <a:prstGeom prst="rect">
+            <a:avLst/>
+          </a:prstGeom>
+          <a:noFill/>
+          <a:ln/>
+        </p:spPr>
+        <p:txBody>
+          <a:bodyPr wrap="square" lIns="0" tIns="0" rIns="0" bIns="0" rtlCol="0" anchor="ctr"/>
+          <a:lstStyle/>
+          <a:p>
+            <a:pPr indent="0" marL="0">
+              <a:buNone/>
+            </a:pPr>
+            <a:r>
+              <a:rPr lang="en-US" sz="1250" b="1" dirty="0">
+                <a:solidFill>
+                  <a:srgbClr val="FFFFFF"/>
+                </a:solidFill>
+                <a:latin typeface="Calibri" pitchFamily="34" charset="0"/>
+                <a:ea typeface="Calibri" pitchFamily="34" charset="-122"/>
+                <a:cs typeface="Calibri" pitchFamily="34" charset="-120"/>
+              </a:rPr>
+              <a:t xml:space="preserve">Oracle Key Vault — </a:t>
+            </a:r>
+            <a:pPr indent="0" marL="0">
+              <a:buNone/>
+            </a:pPr>
+            <a:r>
+              <a:rPr lang="en-US" sz="1250" dirty="0">
+                <a:solidFill>
+                  <a:srgbClr val="C7D2E0"/>
+                </a:solidFill>
+                <a:latin typeface="Calibri" pitchFamily="34" charset="0"/>
+                <a:ea typeface="Calibri" pitchFamily="34" charset="-122"/>
+                <a:cs typeface="Calibri" pitchFamily="34" charset="-120"/>
+              </a:rPr>
+              <a:t>a central key-management appliance; our Phase 2 for fleet-wide custody, audit and rotation.</a:t>
+            </a:r>
+            <a:endParaRPr lang="en-US" sz="1250" dirty="0"/>
           </a:p>
         </p:txBody>
       </p:sp>
@@ -22048,7 +27254,7 @@
       </p:sp>
       <p:pic>
         <p:nvPicPr>
-          <p:cNvPr id="3" name="Image 0" descr="preencoded.png">    </p:cNvPr>
+          <p:cNvPr id="3" name="Image 0" descr="preencoded.png"/>
           <p:cNvPicPr>
             <a:picLocks noChangeAspect="1"/>
           </p:cNvPicPr>
@@ -22212,7 +27418,7 @@
       </p:sp>
       <p:pic>
         <p:nvPicPr>
-          <p:cNvPr id="8" name="Image 1" descr="preencoded.png">    </p:cNvPr>
+          <p:cNvPr id="8" name="Image 1" descr="preencoded.png"/>
           <p:cNvPicPr>
             <a:picLocks noChangeAspect="1"/>
           </p:cNvPicPr>
@@ -22275,7 +27481,7 @@
       </p:sp>
       <p:pic>
         <p:nvPicPr>
-          <p:cNvPr id="10" name="Image 2" descr="preencoded.png">    </p:cNvPr>
+          <p:cNvPr id="10" name="Image 2" descr="preencoded.png"/>
           <p:cNvPicPr>
             <a:picLocks noChangeAspect="1"/>
           </p:cNvPicPr>
@@ -22333,7 +27539,7 @@
                 <a:ea typeface="Calibri" pitchFamily="34" charset="-122"/>
                 <a:cs typeface="Calibri" pitchFamily="34" charset="-120"/>
               </a:rPr>
-              <a:t>DORA  </a:t>
+              <a:t xml:space="preserve">DORA  </a:t>
             </a:r>
             <a:pPr indent="0" marL="0">
               <a:lnSpc>
@@ -22358,7 +27564,7 @@
       </p:sp>
       <p:pic>
         <p:nvPicPr>
-          <p:cNvPr id="12" name="Image 3" descr="preencoded.png">    </p:cNvPr>
+          <p:cNvPr id="12" name="Image 3" descr="preencoded.png"/>
           <p:cNvPicPr>
             <a:picLocks noChangeAspect="1"/>
           </p:cNvPicPr>
@@ -22416,7 +27622,7 @@
                 <a:ea typeface="Calibri" pitchFamily="34" charset="-122"/>
                 <a:cs typeface="Calibri" pitchFamily="34" charset="-120"/>
               </a:rPr>
-              <a:t>PCI-DSS-style  </a:t>
+              <a:t xml:space="preserve">PCI-DSS-style  </a:t>
             </a:r>
             <a:pPr indent="0" marL="0">
               <a:lnSpc>
@@ -22441,7 +27647,7 @@
       </p:sp>
       <p:pic>
         <p:nvPicPr>
-          <p:cNvPr id="14" name="Image 4" descr="preencoded.png">    </p:cNvPr>
+          <p:cNvPr id="14" name="Image 4" descr="preencoded.png"/>
           <p:cNvPicPr>
             <a:picLocks noChangeAspect="1"/>
           </p:cNvPicPr>
@@ -22499,7 +27705,7 @@
                 <a:ea typeface="Calibri" pitchFamily="34" charset="-122"/>
                 <a:cs typeface="Calibri" pitchFamily="34" charset="-120"/>
               </a:rPr>
-              <a:t>Bank security policy  </a:t>
+              <a:t xml:space="preserve">Bank security policy  </a:t>
             </a:r>
             <a:pPr indent="0" marL="0">
               <a:lnSpc>
@@ -22524,7 +27730,7 @@
       </p:sp>
       <p:pic>
         <p:nvPicPr>
-          <p:cNvPr id="16" name="Image 5" descr="preencoded.png">    </p:cNvPr>
+          <p:cNvPr id="16" name="Image 5" descr="preencoded.png"/>
           <p:cNvPicPr>
             <a:picLocks noChangeAspect="1"/>
           </p:cNvPicPr>
@@ -22582,7 +27788,7 @@
                 <a:ea typeface="Calibri" pitchFamily="34" charset="-122"/>
                 <a:cs typeface="Calibri" pitchFamily="34" charset="-120"/>
               </a:rPr>
-              <a:t>Audit / regulator findings  </a:t>
+              <a:t xml:space="preserve">Audit / regulator findings  </a:t>
             </a:r>
             <a:pPr indent="0" marL="0">
               <a:lnSpc>
@@ -23355,6 +28561,45 @@
               <a:t>Covers TDE · OKV would be a separate purchase</a:t>
             </a:r>
             <a:endParaRPr lang="en-US" sz="1150" dirty="0"/>
+          </a:p>
+        </p:txBody>
+      </p:sp>
+      <p:sp>
+        <p:nvSpPr>
+          <p:cNvPr id="37" name="Footnote 37"/>
+          <p:cNvSpPr/>
+          <p:nvPr/>
+        </p:nvSpPr>
+        <p:spPr>
+          <a:xfrm>
+            <a:off x="566928" y="6438000"/>
+            <a:ext cx="11057839" cy="245000"/>
+          </a:xfrm>
+          <a:prstGeom prst="rect">
+            <a:avLst/>
+          </a:prstGeom>
+          <a:noFill/>
+          <a:ln/>
+        </p:spPr>
+        <p:txBody>
+          <a:bodyPr wrap="square" lIns="0" tIns="0" rIns="0" bIns="0" rtlCol="0" anchor="ctr"/>
+          <a:lstStyle/>
+          <a:p>
+            <a:pPr algn="l" indent="0" marL="0">
+              <a:buNone/>
+            </a:pPr>
+            <a:r>
+              <a:rPr lang="en-US" sz="900" i="1" kern="0" dirty="0">
+                <a:solidFill>
+                  <a:srgbClr val="8194A8"/>
+                </a:solidFill>
+                <a:latin typeface="Calibri" pitchFamily="34" charset="0"/>
+                <a:ea typeface="Calibri" pitchFamily="34" charset="-122"/>
+                <a:cs typeface="Calibri" pitchFamily="34" charset="-120"/>
+              </a:rPr>
+              <a:t>DORA = EU Digital Operational Resilience Act (financial-sector regulation). PCI DSS = the payment-card industry data-security standard.</a:t>
+            </a:r>
+            <a:endParaRPr lang="en-US" sz="900" i="1" dirty="0"/>
           </a:p>
         </p:txBody>
       </p:sp>
@@ -23416,7 +28661,7 @@
       </p:sp>
       <p:pic>
         <p:nvPicPr>
-          <p:cNvPr id="3" name="Image 0" descr="preencoded.png">    </p:cNvPr>
+          <p:cNvPr id="3" name="Image 0" descr="preencoded.png"/>
           <p:cNvPicPr>
             <a:picLocks noChangeAspect="1"/>
           </p:cNvPicPr>
@@ -23580,7 +28825,7 @@
       </p:sp>
       <p:pic>
         <p:nvPicPr>
-          <p:cNvPr id="8" name="Image 1" descr="preencoded.png">    </p:cNvPr>
+          <p:cNvPr id="8" name="Image 1" descr="preencoded.png"/>
           <p:cNvPicPr>
             <a:picLocks noChangeAspect="1"/>
           </p:cNvPicPr>
@@ -23713,7 +28958,7 @@
                 <a:ea typeface="Calibri" pitchFamily="34" charset="-122"/>
                 <a:cs typeface="Calibri" pitchFamily="34" charset="-120"/>
               </a:rPr>
-              <a:t>Touches: </a:t>
+              <a:t xml:space="preserve">Touches: </a:t>
             </a:r>
             <a:pPr indent="0" marL="0">
               <a:buNone/>
@@ -23805,7 +29050,7 @@
       </p:sp>
       <p:pic>
         <p:nvPicPr>
-          <p:cNvPr id="14" name="Image 2" descr="preencoded.png">    </p:cNvPr>
+          <p:cNvPr id="14" name="Image 2" descr="preencoded.png"/>
           <p:cNvPicPr>
             <a:picLocks noChangeAspect="1"/>
           </p:cNvPicPr>
@@ -23899,7 +29144,7 @@
       </p:sp>
       <p:pic>
         <p:nvPicPr>
-          <p:cNvPr id="17" name="Image 3" descr="preencoded.png">    </p:cNvPr>
+          <p:cNvPr id="17" name="Image 3" descr="preencoded.png"/>
           <p:cNvPicPr>
             <a:picLocks noChangeAspect="1"/>
           </p:cNvPicPr>
@@ -23993,7 +29238,7 @@
       </p:sp>
       <p:pic>
         <p:nvPicPr>
-          <p:cNvPr id="20" name="Image 4" descr="preencoded.png">    </p:cNvPr>
+          <p:cNvPr id="20" name="Image 4" descr="preencoded.png"/>
           <p:cNvPicPr>
             <a:picLocks noChangeAspect="1"/>
           </p:cNvPicPr>
@@ -24188,7 +29433,7 @@
       </p:sp>
       <p:pic>
         <p:nvPicPr>
-          <p:cNvPr id="26" name="Image 5" descr="preencoded.png">    </p:cNvPr>
+          <p:cNvPr id="26" name="Image 5" descr="preencoded.png"/>
           <p:cNvPicPr>
             <a:picLocks noChangeAspect="1"/>
           </p:cNvPicPr>
@@ -24321,7 +29566,7 @@
                 <a:ea typeface="Calibri" pitchFamily="34" charset="-122"/>
                 <a:cs typeface="Calibri" pitchFamily="34" charset="-120"/>
               </a:rPr>
-              <a:t>Touches: </a:t>
+              <a:t xml:space="preserve">Touches: </a:t>
             </a:r>
             <a:pPr indent="0" marL="0">
               <a:buNone/>
@@ -24413,7 +29658,7 @@
       </p:sp>
       <p:pic>
         <p:nvPicPr>
-          <p:cNvPr id="32" name="Image 6" descr="preencoded.png">    </p:cNvPr>
+          <p:cNvPr id="32" name="Image 6" descr="preencoded.png"/>
           <p:cNvPicPr>
             <a:picLocks noChangeAspect="1"/>
           </p:cNvPicPr>
@@ -24507,7 +29752,7 @@
       </p:sp>
       <p:pic>
         <p:nvPicPr>
-          <p:cNvPr id="35" name="Image 7" descr="preencoded.png">    </p:cNvPr>
+          <p:cNvPr id="35" name="Image 7" descr="preencoded.png"/>
           <p:cNvPicPr>
             <a:picLocks noChangeAspect="1"/>
           </p:cNvPicPr>
@@ -24601,7 +29846,7 @@
       </p:sp>
       <p:pic>
         <p:nvPicPr>
-          <p:cNvPr id="38" name="Image 8" descr="preencoded.png">    </p:cNvPr>
+          <p:cNvPr id="38" name="Image 8" descr="preencoded.png"/>
           <p:cNvPicPr>
             <a:picLocks noChangeAspect="1"/>
           </p:cNvPicPr>
@@ -24796,7 +30041,7 @@
       </p:sp>
       <p:pic>
         <p:nvPicPr>
-          <p:cNvPr id="44" name="Image 9" descr="preencoded.png">    </p:cNvPr>
+          <p:cNvPr id="44" name="Image 9" descr="preencoded.png"/>
           <p:cNvPicPr>
             <a:picLocks noChangeAspect="1"/>
           </p:cNvPicPr>
@@ -24854,7 +30099,7 @@
                 <a:ea typeface="Calibri" pitchFamily="34" charset="-122"/>
                 <a:cs typeface="Calibri" pitchFamily="34" charset="-120"/>
               </a:rPr>
-              <a:t>Separate change windows, separate rollback, separate acceptance criteria.  </a:t>
+              <a:t xml:space="preserve">Separate change windows, separate rollback, separate acceptance criteria.  </a:t>
             </a:r>
             <a:pPr indent="0" marL="0">
               <a:lnSpc>
@@ -24935,7 +30180,7 @@
       </p:sp>
       <p:pic>
         <p:nvPicPr>
-          <p:cNvPr id="3" name="Image 0" descr="preencoded.png">    </p:cNvPr>
+          <p:cNvPr id="3" name="Image 0" descr="preencoded.png"/>
           <p:cNvPicPr>
             <a:picLocks noChangeAspect="1"/>
           </p:cNvPicPr>
@@ -25076,7 +30321,7 @@
       </p:sp>
       <p:pic>
         <p:nvPicPr>
-          <p:cNvPr id="7" name="Image 1" descr="preencoded.png">    </p:cNvPr>
+          <p:cNvPr id="7" name="Image 1" descr="preencoded.png"/>
           <p:cNvPicPr>
             <a:picLocks noChangeAspect="1"/>
           </p:cNvPicPr>
@@ -25139,7 +30384,7 @@
       </p:sp>
       <p:pic>
         <p:nvPicPr>
-          <p:cNvPr id="9" name="Image 2" descr="preencoded.png">    </p:cNvPr>
+          <p:cNvPr id="9" name="Image 2" descr="preencoded.png"/>
           <p:cNvPicPr>
             <a:picLocks noChangeAspect="1"/>
           </p:cNvPicPr>
@@ -25202,7 +30447,7 @@
       </p:sp>
       <p:pic>
         <p:nvPicPr>
-          <p:cNvPr id="11" name="Image 3" descr="preencoded.png">    </p:cNvPr>
+          <p:cNvPr id="11" name="Image 3" descr="preencoded.png"/>
           <p:cNvPicPr>
             <a:picLocks noChangeAspect="1"/>
           </p:cNvPicPr>
@@ -25265,7 +30510,7 @@
       </p:sp>
       <p:pic>
         <p:nvPicPr>
-          <p:cNvPr id="13" name="Image 4" descr="preencoded.png">    </p:cNvPr>
+          <p:cNvPr id="13" name="Image 4" descr="preencoded.png"/>
           <p:cNvPicPr>
             <a:picLocks noChangeAspect="1"/>
           </p:cNvPicPr>
@@ -25328,7 +30573,7 @@
       </p:sp>
       <p:pic>
         <p:nvPicPr>
-          <p:cNvPr id="15" name="Image 5" descr="preencoded.png">    </p:cNvPr>
+          <p:cNvPr id="15" name="Image 5" descr="preencoded.png"/>
           <p:cNvPicPr>
             <a:picLocks noChangeAspect="1"/>
           </p:cNvPicPr>
@@ -25391,7 +30636,7 @@
       </p:sp>
       <p:pic>
         <p:nvPicPr>
-          <p:cNvPr id="17" name="Image 6" descr="preencoded.png">    </p:cNvPr>
+          <p:cNvPr id="17" name="Image 6" descr="preencoded.png"/>
           <p:cNvPicPr>
             <a:picLocks noChangeAspect="1"/>
           </p:cNvPicPr>
@@ -25510,7 +30755,7 @@
       </p:sp>
       <p:pic>
         <p:nvPicPr>
-          <p:cNvPr id="3" name="Image 0" descr="preencoded.png">    </p:cNvPr>
+          <p:cNvPr id="3" name="Image 0" descr="preencoded.png"/>
           <p:cNvPicPr>
             <a:picLocks noChangeAspect="1"/>
           </p:cNvPicPr>
@@ -25813,7 +31058,7 @@
       </p:sp>
       <p:pic>
         <p:nvPicPr>
-          <p:cNvPr id="10" name="Image 1" descr="preencoded.png">    </p:cNvPr>
+          <p:cNvPr id="10" name="Image 1" descr="preencoded.png"/>
           <p:cNvPicPr>
             <a:picLocks noChangeAspect="1"/>
           </p:cNvPicPr>
@@ -26100,7 +31345,7 @@
       </p:sp>
       <p:pic>
         <p:nvPicPr>
-          <p:cNvPr id="17" name="Image 2" descr="preencoded.png">    </p:cNvPr>
+          <p:cNvPr id="17" name="Image 2" descr="preencoded.png"/>
           <p:cNvPicPr>
             <a:picLocks noChangeAspect="1"/>
           </p:cNvPicPr>
@@ -26316,7 +31561,7 @@
       </p:sp>
       <p:pic>
         <p:nvPicPr>
-          <p:cNvPr id="22" name="Image 3" descr="preencoded.png">    </p:cNvPr>
+          <p:cNvPr id="22" name="Image 3" descr="preencoded.png"/>
           <p:cNvPicPr>
             <a:picLocks noChangeAspect="1"/>
           </p:cNvPicPr>
@@ -26413,7 +31658,7 @@
                 <a:ea typeface="Calibri" pitchFamily="34" charset="-122"/>
                 <a:cs typeface="Calibri" pitchFamily="34" charset="-120"/>
               </a:rPr>
-              <a:t>One listener serves both TCP 1526 and TCPS 1527 simultaneously. </a:t>
+              <a:t xml:space="preserve">One listener serves both TCP 1526 and TCPS 1527 simultaneously. </a:t>
             </a:r>
             <a:pPr indent="0" marL="0">
               <a:lnSpc>
@@ -26430,7 +31675,7 @@
                 <a:ea typeface="Calibri" pitchFamily="34" charset="-122"/>
                 <a:cs typeface="Calibri" pitchFamily="34" charset="-120"/>
               </a:rPr>
-              <a:t>Existing clients keep working on 1526 while each application team migrates its connect strings, truststores and pools to 1527 at its own pace. Only when monitoring shows </a:t>
+              <a:t xml:space="preserve">Existing clients keep working on 1526 while each application team migrates its connect strings, truststores and pools to 1527 at its own pace. Only when monitoring shows </a:t>
             </a:r>
             <a:pPr indent="0" marL="0">
               <a:lnSpc>
@@ -26464,7 +31709,7 @@
                 <a:ea typeface="Calibri" pitchFamily="34" charset="-122"/>
                 <a:cs typeface="Calibri" pitchFamily="34" charset="-120"/>
               </a:rPr>
-              <a:t> do we close 1526. This decouples DBA-side enablement from app-side migration — the biggest schedule risk on this track.</a:t>
+              <a:t xml:space="preserve"> do we close 1526. This decouples DBA-side enablement from app-side migration — the biggest schedule risk on this track.</a:t>
             </a:r>
             <a:endParaRPr lang="en-US" sz="1400" dirty="0"/>
           </a:p>
@@ -26528,7 +31773,7 @@
       </p:sp>
       <p:pic>
         <p:nvPicPr>
-          <p:cNvPr id="3" name="Image 0" descr="preencoded.png">    </p:cNvPr>
+          <p:cNvPr id="3" name="Image 0" descr="preencoded.png"/>
           <p:cNvPicPr>
             <a:picLocks noChangeAspect="1"/>
           </p:cNvPicPr>
@@ -26692,7 +31937,7 @@
       </p:sp>
       <p:pic>
         <p:nvPicPr>
-          <p:cNvPr id="8" name="Image 1" descr="preencoded.png">    </p:cNvPr>
+          <p:cNvPr id="8" name="Image 1" descr="preencoded.png"/>
           <p:cNvPicPr>
             <a:picLocks noChangeAspect="1"/>
           </p:cNvPicPr>
@@ -26859,7 +32104,7 @@
       </p:sp>
       <p:pic>
         <p:nvPicPr>
-          <p:cNvPr id="13" name="Image 2" descr="preencoded.png">    </p:cNvPr>
+          <p:cNvPr id="13" name="Image 2" descr="preencoded.png"/>
           <p:cNvPicPr>
             <a:picLocks noChangeAspect="1"/>
           </p:cNvPicPr>
@@ -27026,7 +32271,7 @@
       </p:sp>
       <p:pic>
         <p:nvPicPr>
-          <p:cNvPr id="18" name="Image 3" descr="preencoded.png">    </p:cNvPr>
+          <p:cNvPr id="18" name="Image 3" descr="preencoded.png"/>
           <p:cNvPicPr>
             <a:picLocks noChangeAspect="1"/>
           </p:cNvPicPr>
@@ -27193,7 +32438,7 @@
       </p:sp>
       <p:pic>
         <p:nvPicPr>
-          <p:cNvPr id="23" name="Image 4" descr="preencoded.png">    </p:cNvPr>
+          <p:cNvPr id="23" name="Image 4" descr="preencoded.png"/>
           <p:cNvPicPr>
             <a:picLocks noChangeAspect="1"/>
           </p:cNvPicPr>
@@ -27360,7 +32605,7 @@
       </p:sp>
       <p:pic>
         <p:nvPicPr>
-          <p:cNvPr id="28" name="Image 5" descr="preencoded.png">    </p:cNvPr>
+          <p:cNvPr id="28" name="Image 5" descr="preencoded.png"/>
           <p:cNvPicPr>
             <a:picLocks noChangeAspect="1"/>
           </p:cNvPicPr>
@@ -27527,7 +32772,7 @@
       </p:sp>
       <p:pic>
         <p:nvPicPr>
-          <p:cNvPr id="33" name="Image 6" descr="preencoded.png">    </p:cNvPr>
+          <p:cNvPr id="33" name="Image 6" descr="preencoded.png"/>
           <p:cNvPicPr>
             <a:picLocks noChangeAspect="1"/>
           </p:cNvPicPr>
@@ -27688,7 +32933,7 @@
       </p:sp>
       <p:pic>
         <p:nvPicPr>
-          <p:cNvPr id="3" name="Image 0" descr="preencoded.png">    </p:cNvPr>
+          <p:cNvPr id="3" name="Image 0" descr="preencoded.png"/>
           <p:cNvPicPr>
             <a:picLocks noChangeAspect="1"/>
           </p:cNvPicPr>
@@ -27845,7 +33090,7 @@
       </p:sp>
       <p:pic>
         <p:nvPicPr>
-          <p:cNvPr id="8" name="Image 1" descr="preencoded.png">    </p:cNvPr>
+          <p:cNvPr id="8" name="Image 1" descr="preencoded.png"/>
           <p:cNvPicPr>
             <a:picLocks noChangeAspect="1"/>
           </p:cNvPicPr>
@@ -28002,7 +33247,7 @@
       </p:sp>
       <p:pic>
         <p:nvPicPr>
-          <p:cNvPr id="13" name="Image 2" descr="preencoded.png">    </p:cNvPr>
+          <p:cNvPr id="13" name="Image 2" descr="preencoded.png"/>
           <p:cNvPicPr>
             <a:picLocks noChangeAspect="1"/>
           </p:cNvPicPr>
@@ -28159,7 +33404,7 @@
       </p:sp>
       <p:pic>
         <p:nvPicPr>
-          <p:cNvPr id="18" name="Image 3" descr="preencoded.png">    </p:cNvPr>
+          <p:cNvPr id="18" name="Image 3" descr="preencoded.png"/>
           <p:cNvPicPr>
             <a:picLocks noChangeAspect="1"/>
           </p:cNvPicPr>
@@ -28316,7 +33561,7 @@
       </p:sp>
       <p:pic>
         <p:nvPicPr>
-          <p:cNvPr id="23" name="Image 4" descr="preencoded.png">    </p:cNvPr>
+          <p:cNvPr id="23" name="Image 4" descr="preencoded.png"/>
           <p:cNvPicPr>
             <a:picLocks noChangeAspect="1"/>
           </p:cNvPicPr>
@@ -28473,7 +33718,7 @@
       </p:sp>
       <p:pic>
         <p:nvPicPr>
-          <p:cNvPr id="28" name="Image 5" descr="preencoded.png">    </p:cNvPr>
+          <p:cNvPr id="28" name="Image 5" descr="preencoded.png"/>
           <p:cNvPicPr>
             <a:picLocks noChangeAspect="1"/>
           </p:cNvPicPr>
@@ -28630,7 +33875,7 @@
       </p:sp>
       <p:pic>
         <p:nvPicPr>
-          <p:cNvPr id="33" name="Image 6" descr="preencoded.png">    </p:cNvPr>
+          <p:cNvPr id="33" name="Image 6" descr="preencoded.png"/>
           <p:cNvPicPr>
             <a:picLocks noChangeAspect="1"/>
           </p:cNvPicPr>
@@ -28787,7 +34032,7 @@
       </p:sp>
       <p:pic>
         <p:nvPicPr>
-          <p:cNvPr id="38" name="Image 7" descr="preencoded.png">    </p:cNvPr>
+          <p:cNvPr id="38" name="Image 7" descr="preencoded.png"/>
           <p:cNvPicPr>
             <a:picLocks noChangeAspect="1"/>
           </p:cNvPicPr>
@@ -28944,7 +34189,7 @@
       </p:sp>
       <p:pic>
         <p:nvPicPr>
-          <p:cNvPr id="43" name="Image 8" descr="preencoded.png">    </p:cNvPr>
+          <p:cNvPr id="43" name="Image 8" descr="preencoded.png"/>
           <p:cNvPicPr>
             <a:picLocks noChangeAspect="1"/>
           </p:cNvPicPr>
@@ -29168,7 +34413,7 @@
                 <a:ea typeface="Consolas" pitchFamily="34" charset="-122"/>
                 <a:cs typeface="Consolas" pitchFamily="34" charset="-120"/>
               </a:rPr>
-              <a:t>  01 wallet+CSR   ·   02 listener/sqlnet/tns fragments   ·   03 TCPS verification (.sql + .sh)</a:t>
+              <a:t xml:space="preserve">  01 wallet+CSR   ·   02 listener/sqlnet/tns fragments   ·   03 TCPS verification (.sql + .sh)</a:t>
             </a:r>
             <a:endParaRPr lang="en-US" sz="1250" dirty="0"/>
           </a:p>
@@ -29232,7 +34477,7 @@
       </p:sp>
       <p:pic>
         <p:nvPicPr>
-          <p:cNvPr id="3" name="Image 0" descr="preencoded.png">    </p:cNvPr>
+          <p:cNvPr id="3" name="Image 0" descr="preencoded.png"/>
           <p:cNvPicPr>
             <a:picLocks noChangeAspect="1"/>
           </p:cNvPicPr>
@@ -29396,7 +34641,7 @@
       </p:sp>
       <p:pic>
         <p:nvPicPr>
-          <p:cNvPr id="8" name="Image 1" descr="preencoded.png">    </p:cNvPr>
+          <p:cNvPr id="8" name="Image 1" descr="preencoded.png"/>
           <p:cNvPicPr>
             <a:picLocks noChangeAspect="1"/>
           </p:cNvPicPr>
@@ -29563,7 +34808,7 @@
       </p:sp>
       <p:pic>
         <p:nvPicPr>
-          <p:cNvPr id="13" name="Image 2" descr="preencoded.png">    </p:cNvPr>
+          <p:cNvPr id="13" name="Image 2" descr="preencoded.png"/>
           <p:cNvPicPr>
             <a:picLocks noChangeAspect="1"/>
           </p:cNvPicPr>
@@ -29730,7 +34975,7 @@
       </p:sp>
       <p:pic>
         <p:nvPicPr>
-          <p:cNvPr id="18" name="Image 3" descr="preencoded.png">    </p:cNvPr>
+          <p:cNvPr id="18" name="Image 3" descr="preencoded.png"/>
           <p:cNvPicPr>
             <a:picLocks noChangeAspect="1"/>
           </p:cNvPicPr>
@@ -29897,7 +35142,7 @@
       </p:sp>
       <p:pic>
         <p:nvPicPr>
-          <p:cNvPr id="23" name="Image 4" descr="preencoded.png">    </p:cNvPr>
+          <p:cNvPr id="23" name="Image 4" descr="preencoded.png"/>
           <p:cNvPicPr>
             <a:picLocks noChangeAspect="1"/>
           </p:cNvPicPr>
@@ -29997,6 +35242,45 @@
               <a:t>Adding the TCPS ADDRESS needs a full lsnrctl stop/start — reload is not enough. (Cert renewal into the same wallet IS picked up by reload.)</a:t>
             </a:r>
             <a:endParaRPr lang="en-US" sz="1200" dirty="0"/>
+          </a:p>
+        </p:txBody>
+      </p:sp>
+      <p:sp>
+        <p:nvSpPr>
+          <p:cNvPr id="26" name="Footnote 26"/>
+          <p:cNvSpPr/>
+          <p:nvPr/>
+        </p:nvSpPr>
+        <p:spPr>
+          <a:xfrm>
+            <a:off x="566928" y="6438000"/>
+            <a:ext cx="11057839" cy="245000"/>
+          </a:xfrm>
+          <a:prstGeom prst="rect">
+            <a:avLst/>
+          </a:prstGeom>
+          <a:noFill/>
+          <a:ln/>
+        </p:spPr>
+        <p:txBody>
+          <a:bodyPr wrap="square" lIns="0" tIns="0" rIns="0" bIns="0" rtlCol="0" anchor="ctr"/>
+          <a:lstStyle/>
+          <a:p>
+            <a:pPr algn="l" indent="0" marL="0">
+              <a:buNone/>
+            </a:pPr>
+            <a:r>
+              <a:rPr lang="en-US" sz="900" i="1" kern="0" dirty="0">
+                <a:solidFill>
+                  <a:srgbClr val="8194A8"/>
+                </a:solidFill>
+                <a:latin typeface="Calibri" pitchFamily="34" charset="0"/>
+                <a:ea typeface="Calibri" pitchFamily="34" charset="-122"/>
+                <a:cs typeface="Calibri" pitchFamily="34" charset="-120"/>
+              </a:rPr>
+              <a:t>SEPS = Secure External Password Store — wallet-stored database credentials used by scripts and batch jobs.</a:t>
+            </a:r>
+            <a:endParaRPr lang="en-US" sz="900" i="1" dirty="0"/>
           </a:p>
         </p:txBody>
       </p:sp>
